--- a/test/generator/baseline/gen.ods.to.pptx.pptx
+++ b/test/generator/baseline/gen.ods.to.pptx.pptx
@@ -153,7 +153,8 @@
             <a:tbl>
               <a:tblPr firstRow="1"/>
               <a:tblGrid>
-                <a:gridCol w="8229600"/>
+                <a:gridCol w="4114800"/>
+                <a:gridCol w="4114800"/>
               </a:tblGrid>
               <a:tr h="334818">
                 <a:tc>
@@ -170,6 +171,35 @@
                       </a:r>
                       <a:endParaRPr lang="en-US" sz="1200" dirty="0"/>
                     </a:p>
+                  </a:txBody>
+                  <a:tcPr>
+                    <a:lnL w="9525">
+                      <a:solidFill>
+                        <a:srgbClr val="BFBFBF"/>
+                      </a:solidFill>
+                    </a:lnL>
+                    <a:lnR w="9525">
+                      <a:solidFill>
+                        <a:srgbClr val="BFBFBF"/>
+                      </a:solidFill>
+                    </a:lnR>
+                    <a:lnT w="9525">
+                      <a:solidFill>
+                        <a:srgbClr val="BFBFBF"/>
+                      </a:solidFill>
+                    </a:lnT>
+                    <a:lnB w="9525">
+                      <a:solidFill>
+                        <a:srgbClr val="BFBFBF"/>
+                      </a:solidFill>
+                    </a:lnB>
+                  </a:tcPr>
+                </a:tc>
+                <a:tc>
+                  <a:txBody>
+                    <a:bodyPr/>
+                    <a:lstStyle/>
+                    <a:p/>
                   </a:txBody>
                   <a:tcPr>
                     <a:lnL w="9525">
@@ -247,6 +277,35 @@
                     </a:lnB>
                   </a:tcPr>
                 </a:tc>
+                <a:tc>
+                  <a:txBody>
+                    <a:bodyPr/>
+                    <a:lstStyle/>
+                    <a:p/>
+                  </a:txBody>
+                  <a:tcPr>
+                    <a:lnL w="9525">
+                      <a:solidFill>
+                        <a:srgbClr val="BFBFBF"/>
+                      </a:solidFill>
+                    </a:lnL>
+                    <a:lnR w="9525">
+                      <a:solidFill>
+                        <a:srgbClr val="BFBFBF"/>
+                      </a:solidFill>
+                    </a:lnR>
+                    <a:lnT w="9525">
+                      <a:solidFill>
+                        <a:srgbClr val="BFBFBF"/>
+                      </a:solidFill>
+                    </a:lnT>
+                    <a:lnB w="9525">
+                      <a:solidFill>
+                        <a:srgbClr val="BFBFBF"/>
+                      </a:solidFill>
+                    </a:lnB>
+                  </a:tcPr>
+                </a:tc>
               </a:tr>
               <a:tr h="334818">
                 <a:tc>
@@ -263,6 +322,35 @@
                       </a:r>
                       <a:endParaRPr lang="en-US" sz="1200" dirty="0"/>
                     </a:p>
+                  </a:txBody>
+                  <a:tcPr>
+                    <a:lnL w="9525">
+                      <a:solidFill>
+                        <a:srgbClr val="BFBFBF"/>
+                      </a:solidFill>
+                    </a:lnL>
+                    <a:lnR w="9525">
+                      <a:solidFill>
+                        <a:srgbClr val="BFBFBF"/>
+                      </a:solidFill>
+                    </a:lnR>
+                    <a:lnT w="9525">
+                      <a:solidFill>
+                        <a:srgbClr val="BFBFBF"/>
+                      </a:solidFill>
+                    </a:lnT>
+                    <a:lnB w="9525">
+                      <a:solidFill>
+                        <a:srgbClr val="BFBFBF"/>
+                      </a:solidFill>
+                    </a:lnB>
+                  </a:tcPr>
+                </a:tc>
+                <a:tc>
+                  <a:txBody>
+                    <a:bodyPr/>
+                    <a:lstStyle/>
+                    <a:p/>
                   </a:txBody>
                   <a:tcPr>
                     <a:lnL w="9525">
@@ -366,12 +454,70 @@
                     </a:lnB>
                   </a:tcPr>
                 </a:tc>
+                <a:tc>
+                  <a:txBody>
+                    <a:bodyPr/>
+                    <a:lstStyle/>
+                    <a:p/>
+                  </a:txBody>
+                  <a:tcPr>
+                    <a:lnL w="9525">
+                      <a:solidFill>
+                        <a:srgbClr val="BFBFBF"/>
+                      </a:solidFill>
+                    </a:lnL>
+                    <a:lnR w="9525">
+                      <a:solidFill>
+                        <a:srgbClr val="BFBFBF"/>
+                      </a:solidFill>
+                    </a:lnR>
+                    <a:lnT w="9525">
+                      <a:solidFill>
+                        <a:srgbClr val="BFBFBF"/>
+                      </a:solidFill>
+                    </a:lnT>
+                    <a:lnB w="9525">
+                      <a:solidFill>
+                        <a:srgbClr val="BFBFBF"/>
+                      </a:solidFill>
+                    </a:lnB>
+                  </a:tcPr>
+                </a:tc>
               </a:tr>
               <a:tr h="334818">
                 <a:tc>
                   <a:txBody>
                     <a:bodyPr/>
                     <a:lstStyle/>
+                    <a:p/>
+                  </a:txBody>
+                  <a:tcPr>
+                    <a:lnL w="9525">
+                      <a:solidFill>
+                        <a:srgbClr val="BFBFBF"/>
+                      </a:solidFill>
+                    </a:lnL>
+                    <a:lnR w="9525">
+                      <a:solidFill>
+                        <a:srgbClr val="BFBFBF"/>
+                      </a:solidFill>
+                    </a:lnR>
+                    <a:lnT w="9525">
+                      <a:solidFill>
+                        <a:srgbClr val="BFBFBF"/>
+                      </a:solidFill>
+                    </a:lnT>
+                    <a:lnB w="9525">
+                      <a:solidFill>
+                        <a:srgbClr val="BFBFBF"/>
+                      </a:solidFill>
+                    </a:lnB>
+                  </a:tcPr>
+                </a:tc>
+                <a:tc>
+                  <a:txBody>
+                    <a:bodyPr/>
+                    <a:lstStyle/>
                     <a:p>
                       <a:pPr>
                         <a:buNone/>
@@ -412,6 +558,35 @@
                   <a:txBody>
                     <a:bodyPr/>
                     <a:lstStyle/>
+                    <a:p/>
+                  </a:txBody>
+                  <a:tcPr>
+                    <a:lnL w="9525">
+                      <a:solidFill>
+                        <a:srgbClr val="BFBFBF"/>
+                      </a:solidFill>
+                    </a:lnL>
+                    <a:lnR w="9525">
+                      <a:solidFill>
+                        <a:srgbClr val="BFBFBF"/>
+                      </a:solidFill>
+                    </a:lnR>
+                    <a:lnT w="9525">
+                      <a:solidFill>
+                        <a:srgbClr val="BFBFBF"/>
+                      </a:solidFill>
+                    </a:lnT>
+                    <a:lnB w="9525">
+                      <a:solidFill>
+                        <a:srgbClr val="BFBFBF"/>
+                      </a:solidFill>
+                    </a:lnB>
+                  </a:tcPr>
+                </a:tc>
+                <a:tc>
+                  <a:txBody>
+                    <a:bodyPr/>
+                    <a:lstStyle/>
                     <a:p>
                       <a:pPr>
                         <a:buNone/>
@@ -452,6 +627,35 @@
                   <a:txBody>
                     <a:bodyPr/>
                     <a:lstStyle/>
+                    <a:p/>
+                  </a:txBody>
+                  <a:tcPr>
+                    <a:lnL w="9525">
+                      <a:solidFill>
+                        <a:srgbClr val="BFBFBF"/>
+                      </a:solidFill>
+                    </a:lnL>
+                    <a:lnR w="9525">
+                      <a:solidFill>
+                        <a:srgbClr val="BFBFBF"/>
+                      </a:solidFill>
+                    </a:lnR>
+                    <a:lnT w="9525">
+                      <a:solidFill>
+                        <a:srgbClr val="BFBFBF"/>
+                      </a:solidFill>
+                    </a:lnT>
+                    <a:lnB w="9525">
+                      <a:solidFill>
+                        <a:srgbClr val="BFBFBF"/>
+                      </a:solidFill>
+                    </a:lnB>
+                  </a:tcPr>
+                </a:tc>
+                <a:tc>
+                  <a:txBody>
+                    <a:bodyPr/>
+                    <a:lstStyle/>
                     <a:p>
                       <a:pPr>
                         <a:buNone/>
@@ -492,6 +696,35 @@
                   <a:txBody>
                     <a:bodyPr/>
                     <a:lstStyle/>
+                    <a:p/>
+                  </a:txBody>
+                  <a:tcPr>
+                    <a:lnL w="9525">
+                      <a:solidFill>
+                        <a:srgbClr val="BFBFBF"/>
+                      </a:solidFill>
+                    </a:lnL>
+                    <a:lnR w="9525">
+                      <a:solidFill>
+                        <a:srgbClr val="BFBFBF"/>
+                      </a:solidFill>
+                    </a:lnR>
+                    <a:lnT w="9525">
+                      <a:solidFill>
+                        <a:srgbClr val="BFBFBF"/>
+                      </a:solidFill>
+                    </a:lnT>
+                    <a:lnB w="9525">
+                      <a:solidFill>
+                        <a:srgbClr val="BFBFBF"/>
+                      </a:solidFill>
+                    </a:lnB>
+                  </a:tcPr>
+                </a:tc>
+                <a:tc>
+                  <a:txBody>
+                    <a:bodyPr/>
+                    <a:lstStyle/>
                     <a:p>
                       <a:pPr>
                         <a:buNone/>
@@ -532,6 +765,35 @@
                   <a:txBody>
                     <a:bodyPr/>
                     <a:lstStyle/>
+                    <a:p/>
+                  </a:txBody>
+                  <a:tcPr>
+                    <a:lnL w="9525">
+                      <a:solidFill>
+                        <a:srgbClr val="BFBFBF"/>
+                      </a:solidFill>
+                    </a:lnL>
+                    <a:lnR w="9525">
+                      <a:solidFill>
+                        <a:srgbClr val="BFBFBF"/>
+                      </a:solidFill>
+                    </a:lnR>
+                    <a:lnT w="9525">
+                      <a:solidFill>
+                        <a:srgbClr val="BFBFBF"/>
+                      </a:solidFill>
+                    </a:lnT>
+                    <a:lnB w="9525">
+                      <a:solidFill>
+                        <a:srgbClr val="BFBFBF"/>
+                      </a:solidFill>
+                    </a:lnB>
+                  </a:tcPr>
+                </a:tc>
+                <a:tc>
+                  <a:txBody>
+                    <a:bodyPr/>
+                    <a:lstStyle/>
                     <a:p>
                       <a:pPr>
                         <a:buNone/>
@@ -572,6 +834,35 @@
                   <a:txBody>
                     <a:bodyPr/>
                     <a:lstStyle/>
+                    <a:p/>
+                  </a:txBody>
+                  <a:tcPr>
+                    <a:lnL w="9525">
+                      <a:solidFill>
+                        <a:srgbClr val="BFBFBF"/>
+                      </a:solidFill>
+                    </a:lnL>
+                    <a:lnR w="9525">
+                      <a:solidFill>
+                        <a:srgbClr val="BFBFBF"/>
+                      </a:solidFill>
+                    </a:lnR>
+                    <a:lnT w="9525">
+                      <a:solidFill>
+                        <a:srgbClr val="BFBFBF"/>
+                      </a:solidFill>
+                    </a:lnT>
+                    <a:lnB w="9525">
+                      <a:solidFill>
+                        <a:srgbClr val="BFBFBF"/>
+                      </a:solidFill>
+                    </a:lnB>
+                  </a:tcPr>
+                </a:tc>
+                <a:tc>
+                  <a:txBody>
+                    <a:bodyPr/>
+                    <a:lstStyle/>
                     <a:p>
                       <a:pPr>
                         <a:buNone/>
@@ -608,6 +899,35 @@
                 </a:tc>
               </a:tr>
               <a:tr h="334818">
+                <a:tc>
+                  <a:txBody>
+                    <a:bodyPr/>
+                    <a:lstStyle/>
+                    <a:p/>
+                  </a:txBody>
+                  <a:tcPr>
+                    <a:lnL w="9525">
+                      <a:solidFill>
+                        <a:srgbClr val="BFBFBF"/>
+                      </a:solidFill>
+                    </a:lnL>
+                    <a:lnR w="9525">
+                      <a:solidFill>
+                        <a:srgbClr val="BFBFBF"/>
+                      </a:solidFill>
+                    </a:lnR>
+                    <a:lnT w="9525">
+                      <a:solidFill>
+                        <a:srgbClr val="BFBFBF"/>
+                      </a:solidFill>
+                    </a:lnT>
+                    <a:lnB w="9525">
+                      <a:solidFill>
+                        <a:srgbClr val="BFBFBF"/>
+                      </a:solidFill>
+                    </a:lnB>
+                  </a:tcPr>
+                </a:tc>
                 <a:tc>
                   <a:txBody>
                     <a:bodyPr/>
@@ -5811,11 +6131,12 @@
             <a:tbl>
               <a:tblPr firstRow="1"/>
               <a:tblGrid>
-                <a:gridCol w="2057400"/>
-                <a:gridCol w="2057400"/>
-                <a:gridCol w="1645920"/>
-                <a:gridCol w="1645920"/>
-                <a:gridCol w="822960"/>
+                <a:gridCol w="1122218"/>
+                <a:gridCol w="748145"/>
+                <a:gridCol w="1870364"/>
+                <a:gridCol w="1496291"/>
+                <a:gridCol w="1496291"/>
+                <a:gridCol w="1496291"/>
               </a:tblGrid>
               <a:tr h="613833">
                 <a:tc>
@@ -5972,12 +6293,99 @@
                     </a:lnB>
                   </a:tcPr>
                 </a:tc>
+                <a:tc>
+                  <a:txBody>
+                    <a:bodyPr/>
+                    <a:lstStyle/>
+                    <a:p/>
+                  </a:txBody>
+                  <a:tcPr>
+                    <a:lnL w="9525">
+                      <a:solidFill>
+                        <a:srgbClr val="BFBFBF"/>
+                      </a:solidFill>
+                    </a:lnL>
+                    <a:lnR w="9525">
+                      <a:solidFill>
+                        <a:srgbClr val="BFBFBF"/>
+                      </a:solidFill>
+                    </a:lnR>
+                    <a:lnT w="9525">
+                      <a:solidFill>
+                        <a:srgbClr val="BFBFBF"/>
+                      </a:solidFill>
+                    </a:lnT>
+                    <a:lnB w="9525">
+                      <a:solidFill>
+                        <a:srgbClr val="BFBFBF"/>
+                      </a:solidFill>
+                    </a:lnB>
+                  </a:tcPr>
+                </a:tc>
               </a:tr>
               <a:tr h="613833">
                 <a:tc>
                   <a:txBody>
                     <a:bodyPr/>
                     <a:lstStyle/>
+                    <a:p/>
+                  </a:txBody>
+                  <a:tcPr>
+                    <a:lnL w="9525">
+                      <a:solidFill>
+                        <a:srgbClr val="BFBFBF"/>
+                      </a:solidFill>
+                    </a:lnL>
+                    <a:lnR w="9525">
+                      <a:solidFill>
+                        <a:srgbClr val="BFBFBF"/>
+                      </a:solidFill>
+                    </a:lnR>
+                    <a:lnT w="9525">
+                      <a:solidFill>
+                        <a:srgbClr val="BFBFBF"/>
+                      </a:solidFill>
+                    </a:lnT>
+                    <a:lnB w="9525">
+                      <a:solidFill>
+                        <a:srgbClr val="BFBFBF"/>
+                      </a:solidFill>
+                    </a:lnB>
+                  </a:tcPr>
+                </a:tc>
+                <a:tc>
+                  <a:txBody>
+                    <a:bodyPr/>
+                    <a:lstStyle/>
+                    <a:p/>
+                  </a:txBody>
+                  <a:tcPr>
+                    <a:lnL w="9525">
+                      <a:solidFill>
+                        <a:srgbClr val="BFBFBF"/>
+                      </a:solidFill>
+                    </a:lnL>
+                    <a:lnR w="9525">
+                      <a:solidFill>
+                        <a:srgbClr val="BFBFBF"/>
+                      </a:solidFill>
+                    </a:lnR>
+                    <a:lnT w="9525">
+                      <a:solidFill>
+                        <a:srgbClr val="BFBFBF"/>
+                      </a:solidFill>
+                    </a:lnT>
+                    <a:lnB w="9525">
+                      <a:solidFill>
+                        <a:srgbClr val="BFBFBF"/>
+                      </a:solidFill>
+                    </a:lnB>
+                  </a:tcPr>
+                </a:tc>
+                <a:tc>
+                  <a:txBody>
+                    <a:bodyPr/>
+                    <a:lstStyle/>
                     <a:p>
                       <a:pPr>
                         <a:buNone/>
@@ -6098,35 +6506,6 @@
                       </a:r>
                       <a:endParaRPr lang="en-US" sz="1200" dirty="0"/>
                     </a:p>
-                  </a:txBody>
-                  <a:tcPr>
-                    <a:lnL w="9525">
-                      <a:solidFill>
-                        <a:srgbClr val="BFBFBF"/>
-                      </a:solidFill>
-                    </a:lnL>
-                    <a:lnR w="9525">
-                      <a:solidFill>
-                        <a:srgbClr val="BFBFBF"/>
-                      </a:solidFill>
-                    </a:lnR>
-                    <a:lnT w="9525">
-                      <a:solidFill>
-                        <a:srgbClr val="BFBFBF"/>
-                      </a:solidFill>
-                    </a:lnT>
-                    <a:lnB w="9525">
-                      <a:solidFill>
-                        <a:srgbClr val="BFBFBF"/>
-                      </a:solidFill>
-                    </a:lnB>
-                  </a:tcPr>
-                </a:tc>
-                <a:tc>
-                  <a:txBody>
-                    <a:bodyPr/>
-                    <a:lstStyle/>
-                    <a:p/>
                   </a:txBody>
                   <a:tcPr>
                     <a:lnL w="9525">
@@ -6157,6 +6536,64 @@
                   <a:txBody>
                     <a:bodyPr/>
                     <a:lstStyle/>
+                    <a:p/>
+                  </a:txBody>
+                  <a:tcPr>
+                    <a:lnL w="9525">
+                      <a:solidFill>
+                        <a:srgbClr val="BFBFBF"/>
+                      </a:solidFill>
+                    </a:lnL>
+                    <a:lnR w="9525">
+                      <a:solidFill>
+                        <a:srgbClr val="BFBFBF"/>
+                      </a:solidFill>
+                    </a:lnR>
+                    <a:lnT w="9525">
+                      <a:solidFill>
+                        <a:srgbClr val="BFBFBF"/>
+                      </a:solidFill>
+                    </a:lnT>
+                    <a:lnB w="9525">
+                      <a:solidFill>
+                        <a:srgbClr val="BFBFBF"/>
+                      </a:solidFill>
+                    </a:lnB>
+                  </a:tcPr>
+                </a:tc>
+                <a:tc>
+                  <a:txBody>
+                    <a:bodyPr/>
+                    <a:lstStyle/>
+                    <a:p/>
+                  </a:txBody>
+                  <a:tcPr>
+                    <a:lnL w="9525">
+                      <a:solidFill>
+                        <a:srgbClr val="BFBFBF"/>
+                      </a:solidFill>
+                    </a:lnL>
+                    <a:lnR w="9525">
+                      <a:solidFill>
+                        <a:srgbClr val="BFBFBF"/>
+                      </a:solidFill>
+                    </a:lnR>
+                    <a:lnT w="9525">
+                      <a:solidFill>
+                        <a:srgbClr val="BFBFBF"/>
+                      </a:solidFill>
+                    </a:lnT>
+                    <a:lnB w="9525">
+                      <a:solidFill>
+                        <a:srgbClr val="BFBFBF"/>
+                      </a:solidFill>
+                    </a:lnB>
+                  </a:tcPr>
+                </a:tc>
+                <a:tc>
+                  <a:txBody>
+                    <a:bodyPr/>
+                    <a:lstStyle/>
                     <a:p>
                       <a:pPr>
                         <a:buNone/>
@@ -6281,35 +6718,6 @@
                       </a:r>
                       <a:endParaRPr lang="en-US" sz="1200" dirty="0"/>
                     </a:p>
-                  </a:txBody>
-                  <a:tcPr>
-                    <a:lnL w="9525">
-                      <a:solidFill>
-                        <a:srgbClr val="BFBFBF"/>
-                      </a:solidFill>
-                    </a:lnL>
-                    <a:lnR w="9525">
-                      <a:solidFill>
-                        <a:srgbClr val="BFBFBF"/>
-                      </a:solidFill>
-                    </a:lnR>
-                    <a:lnT w="9525">
-                      <a:solidFill>
-                        <a:srgbClr val="BFBFBF"/>
-                      </a:solidFill>
-                    </a:lnT>
-                    <a:lnB w="9525">
-                      <a:solidFill>
-                        <a:srgbClr val="BFBFBF"/>
-                      </a:solidFill>
-                    </a:lnB>
-                  </a:tcPr>
-                </a:tc>
-                <a:tc>
-                  <a:txBody>
-                    <a:bodyPr/>
-                    <a:lstStyle/>
-                    <a:p/>
                   </a:txBody>
                   <a:tcPr>
                     <a:lnL w="9525">
@@ -6374,6 +6782,35 @@
                   <a:txBody>
                     <a:bodyPr/>
                     <a:lstStyle/>
+                    <a:p/>
+                  </a:txBody>
+                  <a:tcPr>
+                    <a:lnL w="9525">
+                      <a:solidFill>
+                        <a:srgbClr val="BFBFBF"/>
+                      </a:solidFill>
+                    </a:lnL>
+                    <a:lnR w="9525">
+                      <a:solidFill>
+                        <a:srgbClr val="BFBFBF"/>
+                      </a:solidFill>
+                    </a:lnR>
+                    <a:lnT w="9525">
+                      <a:solidFill>
+                        <a:srgbClr val="BFBFBF"/>
+                      </a:solidFill>
+                    </a:lnT>
+                    <a:lnB w="9525">
+                      <a:solidFill>
+                        <a:srgbClr val="BFBFBF"/>
+                      </a:solidFill>
+                    </a:lnB>
+                  </a:tcPr>
+                </a:tc>
+                <a:tc>
+                  <a:txBody>
+                    <a:bodyPr/>
+                    <a:lstStyle/>
                     <a:p>
                       <a:pPr>
                         <a:buNone/>
@@ -6528,6 +6965,64 @@
                   <a:txBody>
                     <a:bodyPr/>
                     <a:lstStyle/>
+                    <a:p/>
+                  </a:txBody>
+                  <a:tcPr>
+                    <a:lnL w="9525">
+                      <a:solidFill>
+                        <a:srgbClr val="BFBFBF"/>
+                      </a:solidFill>
+                    </a:lnL>
+                    <a:lnR w="9525">
+                      <a:solidFill>
+                        <a:srgbClr val="BFBFBF"/>
+                      </a:solidFill>
+                    </a:lnR>
+                    <a:lnT w="9525">
+                      <a:solidFill>
+                        <a:srgbClr val="BFBFBF"/>
+                      </a:solidFill>
+                    </a:lnT>
+                    <a:lnB w="9525">
+                      <a:solidFill>
+                        <a:srgbClr val="BFBFBF"/>
+                      </a:solidFill>
+                    </a:lnB>
+                  </a:tcPr>
+                </a:tc>
+                <a:tc>
+                  <a:txBody>
+                    <a:bodyPr/>
+                    <a:lstStyle/>
+                    <a:p/>
+                  </a:txBody>
+                  <a:tcPr>
+                    <a:lnL w="9525">
+                      <a:solidFill>
+                        <a:srgbClr val="BFBFBF"/>
+                      </a:solidFill>
+                    </a:lnL>
+                    <a:lnR w="9525">
+                      <a:solidFill>
+                        <a:srgbClr val="BFBFBF"/>
+                      </a:solidFill>
+                    </a:lnR>
+                    <a:lnT w="9525">
+                      <a:solidFill>
+                        <a:srgbClr val="BFBFBF"/>
+                      </a:solidFill>
+                    </a:lnT>
+                    <a:lnB w="9525">
+                      <a:solidFill>
+                        <a:srgbClr val="BFBFBF"/>
+                      </a:solidFill>
+                    </a:lnB>
+                  </a:tcPr>
+                </a:tc>
+                <a:tc>
+                  <a:txBody>
+                    <a:bodyPr/>
+                    <a:lstStyle/>
                     <a:p>
                       <a:pPr>
                         <a:buNone/>
@@ -6652,35 +7147,6 @@
                       </a:r>
                       <a:endParaRPr lang="en-US" sz="1200" dirty="0"/>
                     </a:p>
-                  </a:txBody>
-                  <a:tcPr>
-                    <a:lnL w="9525">
-                      <a:solidFill>
-                        <a:srgbClr val="BFBFBF"/>
-                      </a:solidFill>
-                    </a:lnL>
-                    <a:lnR w="9525">
-                      <a:solidFill>
-                        <a:srgbClr val="BFBFBF"/>
-                      </a:solidFill>
-                    </a:lnR>
-                    <a:lnT w="9525">
-                      <a:solidFill>
-                        <a:srgbClr val="BFBFBF"/>
-                      </a:solidFill>
-                    </a:lnT>
-                    <a:lnB w="9525">
-                      <a:solidFill>
-                        <a:srgbClr val="BFBFBF"/>
-                      </a:solidFill>
-                    </a:lnB>
-                  </a:tcPr>
-                </a:tc>
-                <a:tc>
-                  <a:txBody>
-                    <a:bodyPr/>
-                    <a:lstStyle/>
-                    <a:p/>
                   </a:txBody>
                   <a:tcPr>
                     <a:lnL w="9525">
@@ -6711,6 +7177,64 @@
                   <a:txBody>
                     <a:bodyPr/>
                     <a:lstStyle/>
+                    <a:p/>
+                  </a:txBody>
+                  <a:tcPr>
+                    <a:lnL w="9525">
+                      <a:solidFill>
+                        <a:srgbClr val="BFBFBF"/>
+                      </a:solidFill>
+                    </a:lnL>
+                    <a:lnR w="9525">
+                      <a:solidFill>
+                        <a:srgbClr val="BFBFBF"/>
+                      </a:solidFill>
+                    </a:lnR>
+                    <a:lnT w="9525">
+                      <a:solidFill>
+                        <a:srgbClr val="BFBFBF"/>
+                      </a:solidFill>
+                    </a:lnT>
+                    <a:lnB w="9525">
+                      <a:solidFill>
+                        <a:srgbClr val="BFBFBF"/>
+                      </a:solidFill>
+                    </a:lnB>
+                  </a:tcPr>
+                </a:tc>
+                <a:tc>
+                  <a:txBody>
+                    <a:bodyPr/>
+                    <a:lstStyle/>
+                    <a:p/>
+                  </a:txBody>
+                  <a:tcPr>
+                    <a:lnL w="9525">
+                      <a:solidFill>
+                        <a:srgbClr val="BFBFBF"/>
+                      </a:solidFill>
+                    </a:lnL>
+                    <a:lnR w="9525">
+                      <a:solidFill>
+                        <a:srgbClr val="BFBFBF"/>
+                      </a:solidFill>
+                    </a:lnR>
+                    <a:lnT w="9525">
+                      <a:solidFill>
+                        <a:srgbClr val="BFBFBF"/>
+                      </a:solidFill>
+                    </a:lnT>
+                    <a:lnB w="9525">
+                      <a:solidFill>
+                        <a:srgbClr val="BFBFBF"/>
+                      </a:solidFill>
+                    </a:lnB>
+                  </a:tcPr>
+                </a:tc>
+                <a:tc>
+                  <a:txBody>
+                    <a:bodyPr/>
+                    <a:lstStyle/>
                     <a:p>
                       <a:pPr>
                         <a:buNone/>
@@ -6835,35 +7359,6 @@
                       </a:r>
                       <a:endParaRPr lang="en-US" sz="1200" dirty="0"/>
                     </a:p>
-                  </a:txBody>
-                  <a:tcPr>
-                    <a:lnL w="9525">
-                      <a:solidFill>
-                        <a:srgbClr val="BFBFBF"/>
-                      </a:solidFill>
-                    </a:lnL>
-                    <a:lnR w="9525">
-                      <a:solidFill>
-                        <a:srgbClr val="BFBFBF"/>
-                      </a:solidFill>
-                    </a:lnR>
-                    <a:lnT w="9525">
-                      <a:solidFill>
-                        <a:srgbClr val="BFBFBF"/>
-                      </a:solidFill>
-                    </a:lnT>
-                    <a:lnB w="9525">
-                      <a:solidFill>
-                        <a:srgbClr val="BFBFBF"/>
-                      </a:solidFill>
-                    </a:lnB>
-                  </a:tcPr>
-                </a:tc>
-                <a:tc>
-                  <a:txBody>
-                    <a:bodyPr/>
-                    <a:lstStyle/>
-                    <a:p/>
                   </a:txBody>
                   <a:tcPr>
                     <a:lnL w="9525">
@@ -6971,7 +7466,8 @@
             <a:tbl>
               <a:tblPr firstRow="1"/>
               <a:tblGrid>
-                <a:gridCol w="8229600"/>
+                <a:gridCol w="4114800"/>
+                <a:gridCol w="4114800"/>
               </a:tblGrid>
               <a:tr h="613833">
                 <a:tc>
@@ -7012,12 +7508,70 @@
                     </a:lnB>
                   </a:tcPr>
                 </a:tc>
+                <a:tc>
+                  <a:txBody>
+                    <a:bodyPr/>
+                    <a:lstStyle/>
+                    <a:p/>
+                  </a:txBody>
+                  <a:tcPr>
+                    <a:lnL w="9525">
+                      <a:solidFill>
+                        <a:srgbClr val="BFBFBF"/>
+                      </a:solidFill>
+                    </a:lnL>
+                    <a:lnR w="9525">
+                      <a:solidFill>
+                        <a:srgbClr val="BFBFBF"/>
+                      </a:solidFill>
+                    </a:lnR>
+                    <a:lnT w="9525">
+                      <a:solidFill>
+                        <a:srgbClr val="BFBFBF"/>
+                      </a:solidFill>
+                    </a:lnT>
+                    <a:lnB w="9525">
+                      <a:solidFill>
+                        <a:srgbClr val="BFBFBF"/>
+                      </a:solidFill>
+                    </a:lnB>
+                  </a:tcPr>
+                </a:tc>
               </a:tr>
               <a:tr h="613833">
                 <a:tc>
                   <a:txBody>
                     <a:bodyPr/>
                     <a:lstStyle/>
+                    <a:p/>
+                  </a:txBody>
+                  <a:tcPr>
+                    <a:lnL w="9525">
+                      <a:solidFill>
+                        <a:srgbClr val="BFBFBF"/>
+                      </a:solidFill>
+                    </a:lnL>
+                    <a:lnR w="9525">
+                      <a:solidFill>
+                        <a:srgbClr val="BFBFBF"/>
+                      </a:solidFill>
+                    </a:lnR>
+                    <a:lnT w="9525">
+                      <a:solidFill>
+                        <a:srgbClr val="BFBFBF"/>
+                      </a:solidFill>
+                    </a:lnT>
+                    <a:lnB w="9525">
+                      <a:solidFill>
+                        <a:srgbClr val="BFBFBF"/>
+                      </a:solidFill>
+                    </a:lnB>
+                  </a:tcPr>
+                </a:tc>
+                <a:tc>
+                  <a:txBody>
+                    <a:bodyPr/>
+                    <a:lstStyle/>
                     <a:p>
                       <a:pPr>
                         <a:buNone/>
@@ -7058,6 +7612,35 @@
                   <a:txBody>
                     <a:bodyPr/>
                     <a:lstStyle/>
+                    <a:p/>
+                  </a:txBody>
+                  <a:tcPr>
+                    <a:lnL w="9525">
+                      <a:solidFill>
+                        <a:srgbClr val="BFBFBF"/>
+                      </a:solidFill>
+                    </a:lnL>
+                    <a:lnR w="9525">
+                      <a:solidFill>
+                        <a:srgbClr val="BFBFBF"/>
+                      </a:solidFill>
+                    </a:lnR>
+                    <a:lnT w="9525">
+                      <a:solidFill>
+                        <a:srgbClr val="BFBFBF"/>
+                      </a:solidFill>
+                    </a:lnT>
+                    <a:lnB w="9525">
+                      <a:solidFill>
+                        <a:srgbClr val="BFBFBF"/>
+                      </a:solidFill>
+                    </a:lnB>
+                  </a:tcPr>
+                </a:tc>
+                <a:tc>
+                  <a:txBody>
+                    <a:bodyPr/>
+                    <a:lstStyle/>
                     <a:p>
                       <a:pPr>
                         <a:buNone/>
@@ -7098,6 +7681,35 @@
                   <a:txBody>
                     <a:bodyPr/>
                     <a:lstStyle/>
+                    <a:p/>
+                  </a:txBody>
+                  <a:tcPr>
+                    <a:lnL w="9525">
+                      <a:solidFill>
+                        <a:srgbClr val="BFBFBF"/>
+                      </a:solidFill>
+                    </a:lnL>
+                    <a:lnR w="9525">
+                      <a:solidFill>
+                        <a:srgbClr val="BFBFBF"/>
+                      </a:solidFill>
+                    </a:lnR>
+                    <a:lnT w="9525">
+                      <a:solidFill>
+                        <a:srgbClr val="BFBFBF"/>
+                      </a:solidFill>
+                    </a:lnT>
+                    <a:lnB w="9525">
+                      <a:solidFill>
+                        <a:srgbClr val="BFBFBF"/>
+                      </a:solidFill>
+                    </a:lnB>
+                  </a:tcPr>
+                </a:tc>
+                <a:tc>
+                  <a:txBody>
+                    <a:bodyPr/>
+                    <a:lstStyle/>
                     <a:p>
                       <a:pPr>
                         <a:buNone/>
@@ -7138,6 +7750,35 @@
                   <a:txBody>
                     <a:bodyPr/>
                     <a:lstStyle/>
+                    <a:p/>
+                  </a:txBody>
+                  <a:tcPr>
+                    <a:lnL w="9525">
+                      <a:solidFill>
+                        <a:srgbClr val="BFBFBF"/>
+                      </a:solidFill>
+                    </a:lnL>
+                    <a:lnR w="9525">
+                      <a:solidFill>
+                        <a:srgbClr val="BFBFBF"/>
+                      </a:solidFill>
+                    </a:lnR>
+                    <a:lnT w="9525">
+                      <a:solidFill>
+                        <a:srgbClr val="BFBFBF"/>
+                      </a:solidFill>
+                    </a:lnT>
+                    <a:lnB w="9525">
+                      <a:solidFill>
+                        <a:srgbClr val="BFBFBF"/>
+                      </a:solidFill>
+                    </a:lnB>
+                  </a:tcPr>
+                </a:tc>
+                <a:tc>
+                  <a:txBody>
+                    <a:bodyPr/>
+                    <a:lstStyle/>
                     <a:p>
                       <a:pPr>
                         <a:buNone/>
@@ -7174,6 +7815,35 @@
                 </a:tc>
               </a:tr>
               <a:tr h="613833">
+                <a:tc>
+                  <a:txBody>
+                    <a:bodyPr/>
+                    <a:lstStyle/>
+                    <a:p/>
+                  </a:txBody>
+                  <a:tcPr>
+                    <a:lnL w="9525">
+                      <a:solidFill>
+                        <a:srgbClr val="BFBFBF"/>
+                      </a:solidFill>
+                    </a:lnL>
+                    <a:lnR w="9525">
+                      <a:solidFill>
+                        <a:srgbClr val="BFBFBF"/>
+                      </a:solidFill>
+                    </a:lnR>
+                    <a:lnT w="9525">
+                      <a:solidFill>
+                        <a:srgbClr val="BFBFBF"/>
+                      </a:solidFill>
+                    </a:lnT>
+                    <a:lnB w="9525">
+                      <a:solidFill>
+                        <a:srgbClr val="BFBFBF"/>
+                      </a:solidFill>
+                    </a:lnB>
+                  </a:tcPr>
+                </a:tc>
                 <a:tc>
                   <a:txBody>
                     <a:bodyPr/>
@@ -13734,6 +14404,35 @@
                   <a:txBody>
                     <a:bodyPr/>
                     <a:lstStyle/>
+                    <a:p/>
+                  </a:txBody>
+                  <a:tcPr>
+                    <a:lnL w="9525">
+                      <a:solidFill>
+                        <a:srgbClr val="BFBFBF"/>
+                      </a:solidFill>
+                    </a:lnL>
+                    <a:lnR w="9525">
+                      <a:solidFill>
+                        <a:srgbClr val="BFBFBF"/>
+                      </a:solidFill>
+                    </a:lnR>
+                    <a:lnT w="9525">
+                      <a:solidFill>
+                        <a:srgbClr val="BFBFBF"/>
+                      </a:solidFill>
+                    </a:lnT>
+                    <a:lnB w="9525">
+                      <a:solidFill>
+                        <a:srgbClr val="BFBFBF"/>
+                      </a:solidFill>
+                    </a:lnB>
+                  </a:tcPr>
+                </a:tc>
+                <a:tc>
+                  <a:txBody>
+                    <a:bodyPr/>
+                    <a:lstStyle/>
                     <a:p>
                       <a:pPr>
                         <a:buNone/>
@@ -13744,35 +14443,6 @@
                       </a:r>
                       <a:endParaRPr lang="en-US" sz="1200" dirty="0"/>
                     </a:p>
-                  </a:txBody>
-                  <a:tcPr>
-                    <a:lnL w="9525">
-                      <a:solidFill>
-                        <a:srgbClr val="BFBFBF"/>
-                      </a:solidFill>
-                    </a:lnL>
-                    <a:lnR w="9525">
-                      <a:solidFill>
-                        <a:srgbClr val="BFBFBF"/>
-                      </a:solidFill>
-                    </a:lnR>
-                    <a:lnT w="9525">
-                      <a:solidFill>
-                        <a:srgbClr val="BFBFBF"/>
-                      </a:solidFill>
-                    </a:lnT>
-                    <a:lnB w="9525">
-                      <a:solidFill>
-                        <a:srgbClr val="BFBFBF"/>
-                      </a:solidFill>
-                    </a:lnB>
-                  </a:tcPr>
-                </a:tc>
-                <a:tc>
-                  <a:txBody>
-                    <a:bodyPr/>
-                    <a:lstStyle/>
-                    <a:p/>
                   </a:txBody>
                   <a:tcPr>
                     <a:lnL w="9525">

--- a/test/generator/baseline/gen.ods.to.pptx.pptx
+++ b/test/generator/baseline/gen.ods.to.pptx.pptx
@@ -21,6 +21,7 @@
     <p:sldId id="269" r:id="rId15"/>
     <p:sldId id="270" r:id="rId16"/>
     <p:sldId id="271" r:id="rId17"/>
+    <p:sldId id="272" r:id="rId18"/>
   </p:sldIdLst>
   <p:sldSz cx="9144000" cy="5143500"/>
   <p:notesSz cx="6858000" cy="9144000"/>
@@ -3744,831 +3745,36 @@
             </a:pPr>
             <a:r>
               <a:rPr lang="en-US" sz="2800" b="1" dirty="0"/>
-              <a:t>Sheet8</a:t>
+              <a:t>Sheet7</a:t>
             </a:r>
             <a:endParaRPr lang="en-US" sz="2800" dirty="0"/>
           </a:p>
         </p:txBody>
       </p:sp>
-      <p:graphicFrame>
-        <p:nvGraphicFramePr>
-          <p:cNvPr id="3" name="Table 3"/>
-          <p:cNvGraphicFramePr>
-            <a:graphicFrameLocks noGrp="1"/>
-          </p:cNvGraphicFramePr>
+      <p:pic>
+        <p:nvPicPr>
+          <p:cNvPr id="3" name="Picture 3" descr="165 Inspirational Quotes To Keep You Motivated In Life"/>
+          <p:cNvPicPr>
+            <a:picLocks noChangeAspect="1"/>
+          </p:cNvPicPr>
           <p:nvPr/>
-        </p:nvGraphicFramePr>
-        <p:xfrm>
-          <a:off x="457200" y="1143000"/>
-          <a:ext cx="8229600" cy="3683000"/>
-        </p:xfrm>
-        <a:graphic>
-          <a:graphicData uri="http://schemas.openxmlformats.org/drawingml/2006/table">
-            <a:tbl>
-              <a:tblPr firstRow="1"/>
-              <a:tblGrid>
-                <a:gridCol w="4114800"/>
-                <a:gridCol w="4114800"/>
-              </a:tblGrid>
-              <a:tr h="334818">
-                <a:tc>
-                  <a:txBody>
-                    <a:bodyPr/>
-                    <a:lstStyle/>
-                    <a:p>
-                      <a:pPr>
-                        <a:buNone/>
-                      </a:pPr>
-                      <a:r>
-                        <a:rPr lang="en-US" sz="1200" dirty="0"/>
-                        <a:t>Lists </a:t>
-                      </a:r>
-                      <a:endParaRPr lang="en-US" sz="1200" dirty="0"/>
-                    </a:p>
-                  </a:txBody>
-                  <a:tcPr>
-                    <a:lnL w="9525">
-                      <a:solidFill>
-                        <a:srgbClr val="BFBFBF"/>
-                      </a:solidFill>
-                    </a:lnL>
-                    <a:lnR w="9525">
-                      <a:solidFill>
-                        <a:srgbClr val="BFBFBF"/>
-                      </a:solidFill>
-                    </a:lnR>
-                    <a:lnT w="9525">
-                      <a:solidFill>
-                        <a:srgbClr val="BFBFBF"/>
-                      </a:solidFill>
-                    </a:lnT>
-                    <a:lnB w="9525">
-                      <a:solidFill>
-                        <a:srgbClr val="BFBFBF"/>
-                      </a:solidFill>
-                    </a:lnB>
-                  </a:tcPr>
-                </a:tc>
-                <a:tc>
-                  <a:txBody>
-                    <a:bodyPr/>
-                    <a:lstStyle/>
-                    <a:p/>
-                  </a:txBody>
-                  <a:tcPr>
-                    <a:lnL w="9525">
-                      <a:solidFill>
-                        <a:srgbClr val="BFBFBF"/>
-                      </a:solidFill>
-                    </a:lnL>
-                    <a:lnR w="9525">
-                      <a:solidFill>
-                        <a:srgbClr val="BFBFBF"/>
-                      </a:solidFill>
-                    </a:lnR>
-                    <a:lnT w="9525">
-                      <a:solidFill>
-                        <a:srgbClr val="BFBFBF"/>
-                      </a:solidFill>
-                    </a:lnT>
-                    <a:lnB w="9525">
-                      <a:solidFill>
-                        <a:srgbClr val="BFBFBF"/>
-                      </a:solidFill>
-                    </a:lnB>
-                  </a:tcPr>
-                </a:tc>
-              </a:tr>
-              <a:tr h="334818">
-                <a:tc>
-                  <a:txBody>
-                    <a:bodyPr/>
-                    <a:lstStyle/>
-                    <a:p>
-                      <a:pPr>
-                        <a:buNone/>
-                      </a:pPr>
-                      <a:r>
-                        <a:rPr lang="en-US" sz="1200" dirty="0"/>
-                        <a:t>All types of lists are supported by the conversion, with the exception of lists that use fancy bullets, these get converted to regular bullets. </a:t>
-                      </a:r>
-                      <a:endParaRPr lang="en-US" sz="1200" dirty="0"/>
-                    </a:p>
-                  </a:txBody>
-                  <a:tcPr>
-                    <a:lnL w="9525">
-                      <a:solidFill>
-                        <a:srgbClr val="BFBFBF"/>
-                      </a:solidFill>
-                    </a:lnL>
-                    <a:lnR w="9525">
-                      <a:solidFill>
-                        <a:srgbClr val="BFBFBF"/>
-                      </a:solidFill>
-                    </a:lnR>
-                    <a:lnT w="9525">
-                      <a:solidFill>
-                        <a:srgbClr val="BFBFBF"/>
-                      </a:solidFill>
-                    </a:lnT>
-                    <a:lnB w="9525">
-                      <a:solidFill>
-                        <a:srgbClr val="BFBFBF"/>
-                      </a:solidFill>
-                    </a:lnB>
-                  </a:tcPr>
-                </a:tc>
-                <a:tc>
-                  <a:txBody>
-                    <a:bodyPr/>
-                    <a:lstStyle/>
-                    <a:p/>
-                  </a:txBody>
-                  <a:tcPr>
-                    <a:lnL w="9525">
-                      <a:solidFill>
-                        <a:srgbClr val="BFBFBF"/>
-                      </a:solidFill>
-                    </a:lnL>
-                    <a:lnR w="9525">
-                      <a:solidFill>
-                        <a:srgbClr val="BFBFBF"/>
-                      </a:solidFill>
-                    </a:lnR>
-                    <a:lnT w="9525">
-                      <a:solidFill>
-                        <a:srgbClr val="BFBFBF"/>
-                      </a:solidFill>
-                    </a:lnT>
-                    <a:lnB w="9525">
-                      <a:solidFill>
-                        <a:srgbClr val="BFBFBF"/>
-                      </a:solidFill>
-                    </a:lnB>
-                  </a:tcPr>
-                </a:tc>
-              </a:tr>
-              <a:tr h="334818">
-                <a:tc>
-                  <a:txBody>
-                    <a:bodyPr/>
-                    <a:lstStyle/>
-                    <a:p>
-                      <a:pPr>
-                        <a:buNone/>
-                      </a:pPr>
-                      <a:r>
-                        <a:rPr lang="en-US" sz="1200" dirty="0"/>
-                        <a:t>Bulleted List </a:t>
-                      </a:r>
-                      <a:endParaRPr lang="en-US" sz="1200" dirty="0"/>
-                    </a:p>
-                  </a:txBody>
-                  <a:tcPr>
-                    <a:lnL w="9525">
-                      <a:solidFill>
-                        <a:srgbClr val="BFBFBF"/>
-                      </a:solidFill>
-                    </a:lnL>
-                    <a:lnR w="9525">
-                      <a:solidFill>
-                        <a:srgbClr val="BFBFBF"/>
-                      </a:solidFill>
-                    </a:lnR>
-                    <a:lnT w="9525">
-                      <a:solidFill>
-                        <a:srgbClr val="BFBFBF"/>
-                      </a:solidFill>
-                    </a:lnT>
-                    <a:lnB w="9525">
-                      <a:solidFill>
-                        <a:srgbClr val="BFBFBF"/>
-                      </a:solidFill>
-                    </a:lnB>
-                  </a:tcPr>
-                </a:tc>
-                <a:tc>
-                  <a:txBody>
-                    <a:bodyPr/>
-                    <a:lstStyle/>
-                    <a:p/>
-                  </a:txBody>
-                  <a:tcPr>
-                    <a:lnL w="9525">
-                      <a:solidFill>
-                        <a:srgbClr val="BFBFBF"/>
-                      </a:solidFill>
-                    </a:lnL>
-                    <a:lnR w="9525">
-                      <a:solidFill>
-                        <a:srgbClr val="BFBFBF"/>
-                      </a:solidFill>
-                    </a:lnR>
-                    <a:lnT w="9525">
-                      <a:solidFill>
-                        <a:srgbClr val="BFBFBF"/>
-                      </a:solidFill>
-                    </a:lnT>
-                    <a:lnB w="9525">
-                      <a:solidFill>
-                        <a:srgbClr val="BFBFBF"/>
-                      </a:solidFill>
-                    </a:lnB>
-                  </a:tcPr>
-                </a:tc>
-              </a:tr>
-              <a:tr h="334818">
-                <a:tc>
-                  <a:txBody>
-                    <a:bodyPr/>
-                    <a:lstStyle/>
-                    <a:p>
-                      <a:pPr>
-                        <a:buNone/>
-                      </a:pPr>
-                      <a:r>
-                        <a:rPr lang="en-US" sz="1200" dirty="0"/>
-                        <a:t>One </a:t>
-                      </a:r>
-                      <a:endParaRPr lang="en-US" sz="1200" dirty="0"/>
-                    </a:p>
-                  </a:txBody>
-                  <a:tcPr>
-                    <a:lnL w="9525">
-                      <a:solidFill>
-                        <a:srgbClr val="BFBFBF"/>
-                      </a:solidFill>
-                    </a:lnL>
-                    <a:lnR w="9525">
-                      <a:solidFill>
-                        <a:srgbClr val="BFBFBF"/>
-                      </a:solidFill>
-                    </a:lnR>
-                    <a:lnT w="9525">
-                      <a:solidFill>
-                        <a:srgbClr val="BFBFBF"/>
-                      </a:solidFill>
-                    </a:lnT>
-                    <a:lnB w="9525">
-                      <a:solidFill>
-                        <a:srgbClr val="BFBFBF"/>
-                      </a:solidFill>
-                    </a:lnB>
-                  </a:tcPr>
-                </a:tc>
-                <a:tc>
-                  <a:txBody>
-                    <a:bodyPr/>
-                    <a:lstStyle/>
-                    <a:p/>
-                  </a:txBody>
-                  <a:tcPr>
-                    <a:lnL w="9525">
-                      <a:solidFill>
-                        <a:srgbClr val="BFBFBF"/>
-                      </a:solidFill>
-                    </a:lnL>
-                    <a:lnR w="9525">
-                      <a:solidFill>
-                        <a:srgbClr val="BFBFBF"/>
-                      </a:solidFill>
-                    </a:lnR>
-                    <a:lnT w="9525">
-                      <a:solidFill>
-                        <a:srgbClr val="BFBFBF"/>
-                      </a:solidFill>
-                    </a:lnT>
-                    <a:lnB w="9525">
-                      <a:solidFill>
-                        <a:srgbClr val="BFBFBF"/>
-                      </a:solidFill>
-                    </a:lnB>
-                  </a:tcPr>
-                </a:tc>
-              </a:tr>
-              <a:tr h="334818">
-                <a:tc>
-                  <a:txBody>
-                    <a:bodyPr/>
-                    <a:lstStyle/>
-                    <a:p>
-                      <a:pPr>
-                        <a:buNone/>
-                      </a:pPr>
-                      <a:r>
-                        <a:rPr lang="en-US" sz="1200" dirty="0"/>
-                        <a:t>Two </a:t>
-                      </a:r>
-                      <a:endParaRPr lang="en-US" sz="1200" dirty="0"/>
-                    </a:p>
-                  </a:txBody>
-                  <a:tcPr>
-                    <a:lnL w="9525">
-                      <a:solidFill>
-                        <a:srgbClr val="BFBFBF"/>
-                      </a:solidFill>
-                    </a:lnL>
-                    <a:lnR w="9525">
-                      <a:solidFill>
-                        <a:srgbClr val="BFBFBF"/>
-                      </a:solidFill>
-                    </a:lnR>
-                    <a:lnT w="9525">
-                      <a:solidFill>
-                        <a:srgbClr val="BFBFBF"/>
-                      </a:solidFill>
-                    </a:lnT>
-                    <a:lnB w="9525">
-                      <a:solidFill>
-                        <a:srgbClr val="BFBFBF"/>
-                      </a:solidFill>
-                    </a:lnB>
-                  </a:tcPr>
-                </a:tc>
-                <a:tc>
-                  <a:txBody>
-                    <a:bodyPr/>
-                    <a:lstStyle/>
-                    <a:p/>
-                  </a:txBody>
-                  <a:tcPr>
-                    <a:lnL w="9525">
-                      <a:solidFill>
-                        <a:srgbClr val="BFBFBF"/>
-                      </a:solidFill>
-                    </a:lnL>
-                    <a:lnR w="9525">
-                      <a:solidFill>
-                        <a:srgbClr val="BFBFBF"/>
-                      </a:solidFill>
-                    </a:lnR>
-                    <a:lnT w="9525">
-                      <a:solidFill>
-                        <a:srgbClr val="BFBFBF"/>
-                      </a:solidFill>
-                    </a:lnT>
-                    <a:lnB w="9525">
-                      <a:solidFill>
-                        <a:srgbClr val="BFBFBF"/>
-                      </a:solidFill>
-                    </a:lnB>
-                  </a:tcPr>
-                </a:tc>
-              </a:tr>
-              <a:tr h="334818">
-                <a:tc>
-                  <a:txBody>
-                    <a:bodyPr/>
-                    <a:lstStyle/>
-                    <a:p>
-                      <a:pPr>
-                        <a:buNone/>
-                      </a:pPr>
-                      <a:r>
-                        <a:rPr lang="en-US" sz="1200" dirty="0"/>
-                        <a:t>Numbered List </a:t>
-                      </a:r>
-                      <a:endParaRPr lang="en-US" sz="1200" dirty="0"/>
-                    </a:p>
-                  </a:txBody>
-                  <a:tcPr>
-                    <a:lnL w="9525">
-                      <a:solidFill>
-                        <a:srgbClr val="BFBFBF"/>
-                      </a:solidFill>
-                    </a:lnL>
-                    <a:lnR w="9525">
-                      <a:solidFill>
-                        <a:srgbClr val="BFBFBF"/>
-                      </a:solidFill>
-                    </a:lnR>
-                    <a:lnT w="9525">
-                      <a:solidFill>
-                        <a:srgbClr val="BFBFBF"/>
-                      </a:solidFill>
-                    </a:lnT>
-                    <a:lnB w="9525">
-                      <a:solidFill>
-                        <a:srgbClr val="BFBFBF"/>
-                      </a:solidFill>
-                    </a:lnB>
-                  </a:tcPr>
-                </a:tc>
-                <a:tc>
-                  <a:txBody>
-                    <a:bodyPr/>
-                    <a:lstStyle/>
-                    <a:p/>
-                  </a:txBody>
-                  <a:tcPr>
-                    <a:lnL w="9525">
-                      <a:solidFill>
-                        <a:srgbClr val="BFBFBF"/>
-                      </a:solidFill>
-                    </a:lnL>
-                    <a:lnR w="9525">
-                      <a:solidFill>
-                        <a:srgbClr val="BFBFBF"/>
-                      </a:solidFill>
-                    </a:lnR>
-                    <a:lnT w="9525">
-                      <a:solidFill>
-                        <a:srgbClr val="BFBFBF"/>
-                      </a:solidFill>
-                    </a:lnT>
-                    <a:lnB w="9525">
-                      <a:solidFill>
-                        <a:srgbClr val="BFBFBF"/>
-                      </a:solidFill>
-                    </a:lnB>
-                  </a:tcPr>
-                </a:tc>
-              </a:tr>
-              <a:tr h="334818">
-                <a:tc>
-                  <a:txBody>
-                    <a:bodyPr/>
-                    <a:lstStyle/>
-                    <a:p>
-                      <a:pPr>
-                        <a:buNone/>
-                      </a:pPr>
-                      <a:r>
-                        <a:rPr lang="en-US" sz="1200" dirty="0"/>
-                        <a:t>1</a:t>
-                      </a:r>
-                      <a:endParaRPr lang="en-US" sz="1200" dirty="0"/>
-                    </a:p>
-                  </a:txBody>
-                  <a:tcPr>
-                    <a:lnL w="9525">
-                      <a:solidFill>
-                        <a:srgbClr val="BFBFBF"/>
-                      </a:solidFill>
-                    </a:lnL>
-                    <a:lnR w="9525">
-                      <a:solidFill>
-                        <a:srgbClr val="BFBFBF"/>
-                      </a:solidFill>
-                    </a:lnR>
-                    <a:lnT w="9525">
-                      <a:solidFill>
-                        <a:srgbClr val="BFBFBF"/>
-                      </a:solidFill>
-                    </a:lnT>
-                    <a:lnB w="9525">
-                      <a:solidFill>
-                        <a:srgbClr val="BFBFBF"/>
-                      </a:solidFill>
-                    </a:lnB>
-                  </a:tcPr>
-                </a:tc>
-                <a:tc>
-                  <a:txBody>
-                    <a:bodyPr/>
-                    <a:lstStyle/>
-                    <a:p>
-                      <a:pPr>
-                        <a:buNone/>
-                      </a:pPr>
-                      <a:r>
-                        <a:rPr lang="en-US" sz="1200" dirty="0"/>
-                        <a:t>One, with a very long line to demonstrate that the hanging indent for the list is working correctly </a:t>
-                      </a:r>
-                      <a:endParaRPr lang="en-US" sz="1200" dirty="0"/>
-                    </a:p>
-                  </a:txBody>
-                  <a:tcPr>
-                    <a:lnL w="9525">
-                      <a:solidFill>
-                        <a:srgbClr val="BFBFBF"/>
-                      </a:solidFill>
-                    </a:lnL>
-                    <a:lnR w="9525">
-                      <a:solidFill>
-                        <a:srgbClr val="BFBFBF"/>
-                      </a:solidFill>
-                    </a:lnR>
-                    <a:lnT w="9525">
-                      <a:solidFill>
-                        <a:srgbClr val="BFBFBF"/>
-                      </a:solidFill>
-                    </a:lnT>
-                    <a:lnB w="9525">
-                      <a:solidFill>
-                        <a:srgbClr val="BFBFBF"/>
-                      </a:solidFill>
-                    </a:lnB>
-                  </a:tcPr>
-                </a:tc>
-              </a:tr>
-              <a:tr h="334818">
-                <a:tc>
-                  <a:txBody>
-                    <a:bodyPr/>
-                    <a:lstStyle/>
-                    <a:p>
-                      <a:pPr>
-                        <a:buNone/>
-                      </a:pPr>
-                      <a:r>
-                        <a:rPr lang="en-US" sz="1200" dirty="0"/>
-                        <a:t>2</a:t>
-                      </a:r>
-                      <a:endParaRPr lang="en-US" sz="1200" dirty="0"/>
-                    </a:p>
-                  </a:txBody>
-                  <a:tcPr>
-                    <a:lnL w="9525">
-                      <a:solidFill>
-                        <a:srgbClr val="BFBFBF"/>
-                      </a:solidFill>
-                    </a:lnL>
-                    <a:lnR w="9525">
-                      <a:solidFill>
-                        <a:srgbClr val="BFBFBF"/>
-                      </a:solidFill>
-                    </a:lnR>
-                    <a:lnT w="9525">
-                      <a:solidFill>
-                        <a:srgbClr val="BFBFBF"/>
-                      </a:solidFill>
-                    </a:lnT>
-                    <a:lnB w="9525">
-                      <a:solidFill>
-                        <a:srgbClr val="BFBFBF"/>
-                      </a:solidFill>
-                    </a:lnB>
-                  </a:tcPr>
-                </a:tc>
-                <a:tc>
-                  <a:txBody>
-                    <a:bodyPr/>
-                    <a:lstStyle/>
-                    <a:p>
-                      <a:pPr>
-                        <a:buNone/>
-                      </a:pPr>
-                      <a:r>
-                        <a:rPr lang="en-US" sz="1200" dirty="0"/>
-                        <a:t>Two </a:t>
-                      </a:r>
-                      <a:endParaRPr lang="en-US" sz="1200" dirty="0"/>
-                    </a:p>
-                  </a:txBody>
-                  <a:tcPr>
-                    <a:lnL w="9525">
-                      <a:solidFill>
-                        <a:srgbClr val="BFBFBF"/>
-                      </a:solidFill>
-                    </a:lnL>
-                    <a:lnR w="9525">
-                      <a:solidFill>
-                        <a:srgbClr val="BFBFBF"/>
-                      </a:solidFill>
-                    </a:lnR>
-                    <a:lnT w="9525">
-                      <a:solidFill>
-                        <a:srgbClr val="BFBFBF"/>
-                      </a:solidFill>
-                    </a:lnT>
-                    <a:lnB w="9525">
-                      <a:solidFill>
-                        <a:srgbClr val="BFBFBF"/>
-                      </a:solidFill>
-                    </a:lnB>
-                  </a:tcPr>
-                </a:tc>
-              </a:tr>
-              <a:tr h="334818">
-                <a:tc>
-                  <a:txBody>
-                    <a:bodyPr/>
-                    <a:lstStyle/>
-                    <a:p>
-                      <a:pPr>
-                        <a:buNone/>
-                      </a:pPr>
-                      <a:r>
-                        <a:rPr lang="en-US" sz="1200" dirty="0"/>
-                        <a:t>Multi-level Lists </a:t>
-                      </a:r>
-                      <a:endParaRPr lang="en-US" sz="1200" dirty="0"/>
-                    </a:p>
-                  </a:txBody>
-                  <a:tcPr>
-                    <a:lnL w="9525">
-                      <a:solidFill>
-                        <a:srgbClr val="BFBFBF"/>
-                      </a:solidFill>
-                    </a:lnL>
-                    <a:lnR w="9525">
-                      <a:solidFill>
-                        <a:srgbClr val="BFBFBF"/>
-                      </a:solidFill>
-                    </a:lnR>
-                    <a:lnT w="9525">
-                      <a:solidFill>
-                        <a:srgbClr val="BFBFBF"/>
-                      </a:solidFill>
-                    </a:lnT>
-                    <a:lnB w="9525">
-                      <a:solidFill>
-                        <a:srgbClr val="BFBFBF"/>
-                      </a:solidFill>
-                    </a:lnB>
-                  </a:tcPr>
-                </a:tc>
-                <a:tc>
-                  <a:txBody>
-                    <a:bodyPr/>
-                    <a:lstStyle/>
-                    <a:p/>
-                  </a:txBody>
-                  <a:tcPr>
-                    <a:lnL w="9525">
-                      <a:solidFill>
-                        <a:srgbClr val="BFBFBF"/>
-                      </a:solidFill>
-                    </a:lnL>
-                    <a:lnR w="9525">
-                      <a:solidFill>
-                        <a:srgbClr val="BFBFBF"/>
-                      </a:solidFill>
-                    </a:lnR>
-                    <a:lnT w="9525">
-                      <a:solidFill>
-                        <a:srgbClr val="BFBFBF"/>
-                      </a:solidFill>
-                    </a:lnT>
-                    <a:lnB w="9525">
-                      <a:solidFill>
-                        <a:srgbClr val="BFBFBF"/>
-                      </a:solidFill>
-                    </a:lnB>
-                  </a:tcPr>
-                </a:tc>
-              </a:tr>
-              <a:tr h="334818">
-                <a:tc>
-                  <a:txBody>
-                    <a:bodyPr/>
-                    <a:lstStyle/>
-                    <a:p>
-                      <a:pPr>
-                        <a:buNone/>
-                      </a:pPr>
-                      <a:r>
-                        <a:rPr lang="en-US" sz="1200" dirty="0"/>
-                        <a:t>1</a:t>
-                      </a:r>
-                      <a:endParaRPr lang="en-US" sz="1200" dirty="0"/>
-                    </a:p>
-                  </a:txBody>
-                  <a:tcPr>
-                    <a:lnL w="9525">
-                      <a:solidFill>
-                        <a:srgbClr val="BFBFBF"/>
-                      </a:solidFill>
-                    </a:lnL>
-                    <a:lnR w="9525">
-                      <a:solidFill>
-                        <a:srgbClr val="BFBFBF"/>
-                      </a:solidFill>
-                    </a:lnR>
-                    <a:lnT w="9525">
-                      <a:solidFill>
-                        <a:srgbClr val="BFBFBF"/>
-                      </a:solidFill>
-                    </a:lnT>
-                    <a:lnB w="9525">
-                      <a:solidFill>
-                        <a:srgbClr val="BFBFBF"/>
-                      </a:solidFill>
-                    </a:lnB>
-                  </a:tcPr>
-                </a:tc>
-                <a:tc>
-                  <a:txBody>
-                    <a:bodyPr/>
-                    <a:lstStyle/>
-                    <a:p>
-                      <a:pPr>
-                        <a:buNone/>
-                      </a:pPr>
-                      <a:r>
-                        <a:rPr lang="en-US" sz="1200" dirty="0"/>
-                        <a:t>One </a:t>
-                      </a:r>
-                      <a:endParaRPr lang="en-US" sz="1200" dirty="0"/>
-                    </a:p>
-                  </a:txBody>
-                  <a:tcPr>
-                    <a:lnL w="9525">
-                      <a:solidFill>
-                        <a:srgbClr val="BFBFBF"/>
-                      </a:solidFill>
-                    </a:lnL>
-                    <a:lnR w="9525">
-                      <a:solidFill>
-                        <a:srgbClr val="BFBFBF"/>
-                      </a:solidFill>
-                    </a:lnR>
-                    <a:lnT w="9525">
-                      <a:solidFill>
-                        <a:srgbClr val="BFBFBF"/>
-                      </a:solidFill>
-                    </a:lnT>
-                    <a:lnB w="9525">
-                      <a:solidFill>
-                        <a:srgbClr val="BFBFBF"/>
-                      </a:solidFill>
-                    </a:lnB>
-                  </a:tcPr>
-                </a:tc>
-              </a:tr>
-              <a:tr h="334818">
-                <a:tc>
-                  <a:txBody>
-                    <a:bodyPr/>
-                    <a:lstStyle/>
-                    <a:p>
-                      <a:pPr>
-                        <a:buNone/>
-                      </a:pPr>
-                      <a:r>
-                        <a:rPr lang="en-US" sz="1200" dirty="0"/>
-                        <a:t>1</a:t>
-                      </a:r>
-                      <a:endParaRPr lang="en-US" sz="1200" dirty="0"/>
-                    </a:p>
-                  </a:txBody>
-                  <a:tcPr>
-                    <a:lnL w="9525">
-                      <a:solidFill>
-                        <a:srgbClr val="BFBFBF"/>
-                      </a:solidFill>
-                    </a:lnL>
-                    <a:lnR w="9525">
-                      <a:solidFill>
-                        <a:srgbClr val="BFBFBF"/>
-                      </a:solidFill>
-                    </a:lnR>
-                    <a:lnT w="9525">
-                      <a:solidFill>
-                        <a:srgbClr val="BFBFBF"/>
-                      </a:solidFill>
-                    </a:lnT>
-                    <a:lnB w="9525">
-                      <a:solidFill>
-                        <a:srgbClr val="BFBFBF"/>
-                      </a:solidFill>
-                    </a:lnB>
-                  </a:tcPr>
-                </a:tc>
-                <a:tc>
-                  <a:txBody>
-                    <a:bodyPr/>
-                    <a:lstStyle/>
-                    <a:p>
-                      <a:pPr>
-                        <a:buNone/>
-                      </a:pPr>
-                      <a:r>
-                        <a:rPr lang="en-US" sz="1200" dirty="0"/>
-                        <a:t>Two </a:t>
-                      </a:r>
-                      <a:endParaRPr lang="en-US" sz="1200" dirty="0"/>
-                    </a:p>
-                  </a:txBody>
-                  <a:tcPr>
-                    <a:lnL w="9525">
-                      <a:solidFill>
-                        <a:srgbClr val="BFBFBF"/>
-                      </a:solidFill>
-                    </a:lnL>
-                    <a:lnR w="9525">
-                      <a:solidFill>
-                        <a:srgbClr val="BFBFBF"/>
-                      </a:solidFill>
-                    </a:lnR>
-                    <a:lnT w="9525">
-                      <a:solidFill>
-                        <a:srgbClr val="BFBFBF"/>
-                      </a:solidFill>
-                    </a:lnT>
-                    <a:lnB w="9525">
-                      <a:solidFill>
-                        <a:srgbClr val="BFBFBF"/>
-                      </a:solidFill>
-                    </a:lnB>
-                  </a:tcPr>
-                </a:tc>
-              </a:tr>
-            </a:tbl>
-          </a:graphicData>
-        </a:graphic>
-      </p:graphicFrame>
+        </p:nvPicPr>
+        <p:blipFill>
+          <a:blip r:embed="rId2"/>
+          <a:stretch>
+            <a:fillRect/>
+          </a:stretch>
+        </p:blipFill>
+        <p:spPr>
+          <a:xfrm>
+            <a:off x="2730500" y="1143000"/>
+            <a:ext cx="3683000" cy="3683000"/>
+          </a:xfrm>
+          <a:prstGeom prst="rect">
+            <a:avLst/>
+          </a:prstGeom>
+        </p:spPr>
+      </p:pic>
     </p:spTree>
   </p:cSld>
   <p:clrMapOvr>
@@ -4730,48 +3936,39 @@
                       </a:pPr>
                       <a:r>
                         <a:rPr lang="en-US" sz="1200" dirty="0"/>
-                        <a:t>1</a:t>
-                      </a:r>
-                      <a:endParaRPr lang="en-US" sz="1200" dirty="0"/>
-                    </a:p>
-                  </a:txBody>
-                  <a:tcPr>
-                    <a:lnL w="9525">
-                      <a:solidFill>
-                        <a:srgbClr val="BFBFBF"/>
-                      </a:solidFill>
-                    </a:lnL>
-                    <a:lnR w="9525">
-                      <a:solidFill>
-                        <a:srgbClr val="BFBFBF"/>
-                      </a:solidFill>
-                    </a:lnR>
-                    <a:lnT w="9525">
-                      <a:solidFill>
-                        <a:srgbClr val="BFBFBF"/>
-                      </a:solidFill>
-                    </a:lnT>
-                    <a:lnB w="9525">
-                      <a:solidFill>
-                        <a:srgbClr val="BFBFBF"/>
-                      </a:solidFill>
-                    </a:lnB>
-                  </a:tcPr>
-                </a:tc>
-                <a:tc>
-                  <a:txBody>
-                    <a:bodyPr/>
-                    <a:lstStyle/>
-                    <a:p>
-                      <a:pPr>
-                        <a:buNone/>
-                      </a:pPr>
-                      <a:r>
-                        <a:rPr lang="en-US" sz="1200" dirty="0"/>
-                        <a:t>Three </a:t>
-                      </a:r>
-                      <a:endParaRPr lang="en-US" sz="1200" dirty="0"/>
-                    </a:p>
+                        <a:t>All types of lists are supported by the conversion, with the exception of lists that use fancy bullets, these get converted to regular bullets. </a:t>
+                      </a:r>
+                      <a:endParaRPr lang="en-US" sz="1200" dirty="0"/>
+                    </a:p>
+                  </a:txBody>
+                  <a:tcPr>
+                    <a:lnL w="9525">
+                      <a:solidFill>
+                        <a:srgbClr val="BFBFBF"/>
+                      </a:solidFill>
+                    </a:lnL>
+                    <a:lnR w="9525">
+                      <a:solidFill>
+                        <a:srgbClr val="BFBFBF"/>
+                      </a:solidFill>
+                    </a:lnR>
+                    <a:lnT w="9525">
+                      <a:solidFill>
+                        <a:srgbClr val="BFBFBF"/>
+                      </a:solidFill>
+                    </a:lnT>
+                    <a:lnB w="9525">
+                      <a:solidFill>
+                        <a:srgbClr val="BFBFBF"/>
+                      </a:solidFill>
+                    </a:lnB>
+                  </a:tcPr>
+                </a:tc>
+                <a:tc>
+                  <a:txBody>
+                    <a:bodyPr/>
+                    <a:lstStyle/>
+                    <a:p/>
                   </a:txBody>
                   <a:tcPr>
                     <a:lnL w="9525">
@@ -4808,48 +4005,39 @@
                       </a:pPr>
                       <a:r>
                         <a:rPr lang="en-US" sz="1200" dirty="0"/>
-                        <a:t>2</a:t>
-                      </a:r>
-                      <a:endParaRPr lang="en-US" sz="1200" dirty="0"/>
-                    </a:p>
-                  </a:txBody>
-                  <a:tcPr>
-                    <a:lnL w="9525">
-                      <a:solidFill>
-                        <a:srgbClr val="BFBFBF"/>
-                      </a:solidFill>
-                    </a:lnL>
-                    <a:lnR w="9525">
-                      <a:solidFill>
-                        <a:srgbClr val="BFBFBF"/>
-                      </a:solidFill>
-                    </a:lnR>
-                    <a:lnT w="9525">
-                      <a:solidFill>
-                        <a:srgbClr val="BFBFBF"/>
-                      </a:solidFill>
-                    </a:lnT>
-                    <a:lnB w="9525">
-                      <a:solidFill>
-                        <a:srgbClr val="BFBFBF"/>
-                      </a:solidFill>
-                    </a:lnB>
-                  </a:tcPr>
-                </a:tc>
-                <a:tc>
-                  <a:txBody>
-                    <a:bodyPr/>
-                    <a:lstStyle/>
-                    <a:p>
-                      <a:pPr>
-                        <a:buNone/>
-                      </a:pPr>
-                      <a:r>
-                        <a:rPr lang="en-US" sz="1200" dirty="0"/>
-                        <a:t>Four with a very long line to demonstrate that the hanging indent for the list is working correctly. </a:t>
-                      </a:r>
-                      <a:endParaRPr lang="en-US" sz="1200" dirty="0"/>
-                    </a:p>
+                        <a:t>Bulleted List </a:t>
+                      </a:r>
+                      <a:endParaRPr lang="en-US" sz="1200" dirty="0"/>
+                    </a:p>
+                  </a:txBody>
+                  <a:tcPr>
+                    <a:lnL w="9525">
+                      <a:solidFill>
+                        <a:srgbClr val="BFBFBF"/>
+                      </a:solidFill>
+                    </a:lnL>
+                    <a:lnR w="9525">
+                      <a:solidFill>
+                        <a:srgbClr val="BFBFBF"/>
+                      </a:solidFill>
+                    </a:lnR>
+                    <a:lnT w="9525">
+                      <a:solidFill>
+                        <a:srgbClr val="BFBFBF"/>
+                      </a:solidFill>
+                    </a:lnT>
+                    <a:lnB w="9525">
+                      <a:solidFill>
+                        <a:srgbClr val="BFBFBF"/>
+                      </a:solidFill>
+                    </a:lnB>
+                  </a:tcPr>
+                </a:tc>
+                <a:tc>
+                  <a:txBody>
+                    <a:bodyPr/>
+                    <a:lstStyle/>
+                    <a:p/>
                   </a:txBody>
                   <a:tcPr>
                     <a:lnL w="9525">
@@ -4886,48 +4074,39 @@
                       </a:pPr>
                       <a:r>
                         <a:rPr lang="en-US" sz="1200" dirty="0"/>
-                        <a:t>3</a:t>
-                      </a:r>
-                      <a:endParaRPr lang="en-US" sz="1200" dirty="0"/>
-                    </a:p>
-                  </a:txBody>
-                  <a:tcPr>
-                    <a:lnL w="9525">
-                      <a:solidFill>
-                        <a:srgbClr val="BFBFBF"/>
-                      </a:solidFill>
-                    </a:lnL>
-                    <a:lnR w="9525">
-                      <a:solidFill>
-                        <a:srgbClr val="BFBFBF"/>
-                      </a:solidFill>
-                    </a:lnR>
-                    <a:lnT w="9525">
-                      <a:solidFill>
-                        <a:srgbClr val="BFBFBF"/>
-                      </a:solidFill>
-                    </a:lnT>
-                    <a:lnB w="9525">
-                      <a:solidFill>
-                        <a:srgbClr val="BFBFBF"/>
-                      </a:solidFill>
-                    </a:lnB>
-                  </a:tcPr>
-                </a:tc>
-                <a:tc>
-                  <a:txBody>
-                    <a:bodyPr/>
-                    <a:lstStyle/>
-                    <a:p>
-                      <a:pPr>
-                        <a:buNone/>
-                      </a:pPr>
-                      <a:r>
-                        <a:rPr lang="en-US" sz="1200" dirty="0"/>
-                        <a:t>Five </a:t>
-                      </a:r>
-                      <a:endParaRPr lang="en-US" sz="1200" dirty="0"/>
-                    </a:p>
+                        <a:t>One </a:t>
+                      </a:r>
+                      <a:endParaRPr lang="en-US" sz="1200" dirty="0"/>
+                    </a:p>
+                  </a:txBody>
+                  <a:tcPr>
+                    <a:lnL w="9525">
+                      <a:solidFill>
+                        <a:srgbClr val="BFBFBF"/>
+                      </a:solidFill>
+                    </a:lnL>
+                    <a:lnR w="9525">
+                      <a:solidFill>
+                        <a:srgbClr val="BFBFBF"/>
+                      </a:solidFill>
+                    </a:lnR>
+                    <a:lnT w="9525">
+                      <a:solidFill>
+                        <a:srgbClr val="BFBFBF"/>
+                      </a:solidFill>
+                    </a:lnT>
+                    <a:lnB w="9525">
+                      <a:solidFill>
+                        <a:srgbClr val="BFBFBF"/>
+                      </a:solidFill>
+                    </a:lnB>
+                  </a:tcPr>
+                </a:tc>
+                <a:tc>
+                  <a:txBody>
+                    <a:bodyPr/>
+                    <a:lstStyle/>
+                    <a:p/>
                   </a:txBody>
                   <a:tcPr>
                     <a:lnL w="9525">
@@ -4964,48 +4143,39 @@
                       </a:pPr>
                       <a:r>
                         <a:rPr lang="en-US" sz="1200" dirty="0"/>
-                        <a:t>2</a:t>
-                      </a:r>
-                      <a:endParaRPr lang="en-US" sz="1200" dirty="0"/>
-                    </a:p>
-                  </a:txBody>
-                  <a:tcPr>
-                    <a:lnL w="9525">
-                      <a:solidFill>
-                        <a:srgbClr val="BFBFBF"/>
-                      </a:solidFill>
-                    </a:lnL>
-                    <a:lnR w="9525">
-                      <a:solidFill>
-                        <a:srgbClr val="BFBFBF"/>
-                      </a:solidFill>
-                    </a:lnR>
-                    <a:lnT w="9525">
-                      <a:solidFill>
-                        <a:srgbClr val="BFBFBF"/>
-                      </a:solidFill>
-                    </a:lnT>
-                    <a:lnB w="9525">
-                      <a:solidFill>
-                        <a:srgbClr val="BFBFBF"/>
-                      </a:solidFill>
-                    </a:lnB>
-                  </a:tcPr>
-                </a:tc>
-                <a:tc>
-                  <a:txBody>
-                    <a:bodyPr/>
-                    <a:lstStyle/>
-                    <a:p>
-                      <a:pPr>
-                        <a:buNone/>
-                      </a:pPr>
-                      <a:r>
-                        <a:rPr lang="en-US" sz="1200" dirty="0"/>
-                        <a:t>Six </a:t>
-                      </a:r>
-                      <a:endParaRPr lang="en-US" sz="1200" dirty="0"/>
-                    </a:p>
+                        <a:t>Two </a:t>
+                      </a:r>
+                      <a:endParaRPr lang="en-US" sz="1200" dirty="0"/>
+                    </a:p>
+                  </a:txBody>
+                  <a:tcPr>
+                    <a:lnL w="9525">
+                      <a:solidFill>
+                        <a:srgbClr val="BFBFBF"/>
+                      </a:solidFill>
+                    </a:lnL>
+                    <a:lnR w="9525">
+                      <a:solidFill>
+                        <a:srgbClr val="BFBFBF"/>
+                      </a:solidFill>
+                    </a:lnR>
+                    <a:lnT w="9525">
+                      <a:solidFill>
+                        <a:srgbClr val="BFBFBF"/>
+                      </a:solidFill>
+                    </a:lnT>
+                    <a:lnB w="9525">
+                      <a:solidFill>
+                        <a:srgbClr val="BFBFBF"/>
+                      </a:solidFill>
+                    </a:lnB>
+                  </a:tcPr>
+                </a:tc>
+                <a:tc>
+                  <a:txBody>
+                    <a:bodyPr/>
+                    <a:lstStyle/>
+                    <a:p/>
                   </a:txBody>
                   <a:tcPr>
                     <a:lnL w="9525">
@@ -5042,7 +4212,7 @@
                       </a:pPr>
                       <a:r>
                         <a:rPr lang="en-US" sz="1200" dirty="0"/>
-                        <a:t>A Multi-level list with bullets: </a:t>
+                        <a:t>Numbered List </a:t>
                       </a:r>
                       <a:endParaRPr lang="en-US" sz="1200" dirty="0"/>
                     </a:p>
@@ -5111,39 +4281,48 @@
                       </a:pPr>
                       <a:r>
                         <a:rPr lang="en-US" sz="1200" dirty="0"/>
-                        <a:t>One </a:t>
-                      </a:r>
-                      <a:endParaRPr lang="en-US" sz="1200" dirty="0"/>
-                    </a:p>
-                  </a:txBody>
-                  <a:tcPr>
-                    <a:lnL w="9525">
-                      <a:solidFill>
-                        <a:srgbClr val="BFBFBF"/>
-                      </a:solidFill>
-                    </a:lnL>
-                    <a:lnR w="9525">
-                      <a:solidFill>
-                        <a:srgbClr val="BFBFBF"/>
-                      </a:solidFill>
-                    </a:lnR>
-                    <a:lnT w="9525">
-                      <a:solidFill>
-                        <a:srgbClr val="BFBFBF"/>
-                      </a:solidFill>
-                    </a:lnT>
-                    <a:lnB w="9525">
-                      <a:solidFill>
-                        <a:srgbClr val="BFBFBF"/>
-                      </a:solidFill>
-                    </a:lnB>
-                  </a:tcPr>
-                </a:tc>
-                <a:tc>
-                  <a:txBody>
-                    <a:bodyPr/>
-                    <a:lstStyle/>
-                    <a:p/>
+                        <a:t>1</a:t>
+                      </a:r>
+                      <a:endParaRPr lang="en-US" sz="1200" dirty="0"/>
+                    </a:p>
+                  </a:txBody>
+                  <a:tcPr>
+                    <a:lnL w="9525">
+                      <a:solidFill>
+                        <a:srgbClr val="BFBFBF"/>
+                      </a:solidFill>
+                    </a:lnL>
+                    <a:lnR w="9525">
+                      <a:solidFill>
+                        <a:srgbClr val="BFBFBF"/>
+                      </a:solidFill>
+                    </a:lnR>
+                    <a:lnT w="9525">
+                      <a:solidFill>
+                        <a:srgbClr val="BFBFBF"/>
+                      </a:solidFill>
+                    </a:lnT>
+                    <a:lnB w="9525">
+                      <a:solidFill>
+                        <a:srgbClr val="BFBFBF"/>
+                      </a:solidFill>
+                    </a:lnB>
+                  </a:tcPr>
+                </a:tc>
+                <a:tc>
+                  <a:txBody>
+                    <a:bodyPr/>
+                    <a:lstStyle/>
+                    <a:p>
+                      <a:pPr>
+                        <a:buNone/>
+                      </a:pPr>
+                      <a:r>
+                        <a:rPr lang="en-US" sz="1200" dirty="0"/>
+                        <a:t>One, with a very long line to demonstrate that the hanging indent for the list is working correctly </a:t>
+                      </a:r>
+                      <a:endParaRPr lang="en-US" sz="1200" dirty="0"/>
+                    </a:p>
                   </a:txBody>
                   <a:tcPr>
                     <a:lnL w="9525">
@@ -5180,39 +4359,48 @@
                       </a:pPr>
                       <a:r>
                         <a:rPr lang="en-US" sz="1200" dirty="0"/>
+                        <a:t>2</a:t>
+                      </a:r>
+                      <a:endParaRPr lang="en-US" sz="1200" dirty="0"/>
+                    </a:p>
+                  </a:txBody>
+                  <a:tcPr>
+                    <a:lnL w="9525">
+                      <a:solidFill>
+                        <a:srgbClr val="BFBFBF"/>
+                      </a:solidFill>
+                    </a:lnL>
+                    <a:lnR w="9525">
+                      <a:solidFill>
+                        <a:srgbClr val="BFBFBF"/>
+                      </a:solidFill>
+                    </a:lnR>
+                    <a:lnT w="9525">
+                      <a:solidFill>
+                        <a:srgbClr val="BFBFBF"/>
+                      </a:solidFill>
+                    </a:lnT>
+                    <a:lnB w="9525">
+                      <a:solidFill>
+                        <a:srgbClr val="BFBFBF"/>
+                      </a:solidFill>
+                    </a:lnB>
+                  </a:tcPr>
+                </a:tc>
+                <a:tc>
+                  <a:txBody>
+                    <a:bodyPr/>
+                    <a:lstStyle/>
+                    <a:p>
+                      <a:pPr>
+                        <a:buNone/>
+                      </a:pPr>
+                      <a:r>
+                        <a:rPr lang="en-US" sz="1200" dirty="0"/>
                         <a:t>Two </a:t>
                       </a:r>
                       <a:endParaRPr lang="en-US" sz="1200" dirty="0"/>
                     </a:p>
-                  </a:txBody>
-                  <a:tcPr>
-                    <a:lnL w="9525">
-                      <a:solidFill>
-                        <a:srgbClr val="BFBFBF"/>
-                      </a:solidFill>
-                    </a:lnL>
-                    <a:lnR w="9525">
-                      <a:solidFill>
-                        <a:srgbClr val="BFBFBF"/>
-                      </a:solidFill>
-                    </a:lnR>
-                    <a:lnT w="9525">
-                      <a:solidFill>
-                        <a:srgbClr val="BFBFBF"/>
-                      </a:solidFill>
-                    </a:lnT>
-                    <a:lnB w="9525">
-                      <a:solidFill>
-                        <a:srgbClr val="BFBFBF"/>
-                      </a:solidFill>
-                    </a:lnB>
-                  </a:tcPr>
-                </a:tc>
-                <a:tc>
-                  <a:txBody>
-                    <a:bodyPr/>
-                    <a:lstStyle/>
-                    <a:p/>
                   </a:txBody>
                   <a:tcPr>
                     <a:lnL w="9525">
@@ -5249,7 +4437,7 @@
                       </a:pPr>
                       <a:r>
                         <a:rPr lang="en-US" sz="1200" dirty="0"/>
-                        <a:t>This bullet uses an image as the bullet item </a:t>
+                        <a:t>Multi-level Lists </a:t>
                       </a:r>
                       <a:endParaRPr lang="en-US" sz="1200" dirty="0"/>
                     </a:p>
@@ -5318,39 +4506,48 @@
                       </a:pPr>
                       <a:r>
                         <a:rPr lang="en-US" sz="1200" dirty="0"/>
-                        <a:t>Four </a:t>
-                      </a:r>
-                      <a:endParaRPr lang="en-US" sz="1200" dirty="0"/>
-                    </a:p>
-                  </a:txBody>
-                  <a:tcPr>
-                    <a:lnL w="9525">
-                      <a:solidFill>
-                        <a:srgbClr val="BFBFBF"/>
-                      </a:solidFill>
-                    </a:lnL>
-                    <a:lnR w="9525">
-                      <a:solidFill>
-                        <a:srgbClr val="BFBFBF"/>
-                      </a:solidFill>
-                    </a:lnR>
-                    <a:lnT w="9525">
-                      <a:solidFill>
-                        <a:srgbClr val="BFBFBF"/>
-                      </a:solidFill>
-                    </a:lnT>
-                    <a:lnB w="9525">
-                      <a:solidFill>
-                        <a:srgbClr val="BFBFBF"/>
-                      </a:solidFill>
-                    </a:lnB>
-                  </a:tcPr>
-                </a:tc>
-                <a:tc>
-                  <a:txBody>
-                    <a:bodyPr/>
-                    <a:lstStyle/>
-                    <a:p/>
+                        <a:t>1</a:t>
+                      </a:r>
+                      <a:endParaRPr lang="en-US" sz="1200" dirty="0"/>
+                    </a:p>
+                  </a:txBody>
+                  <a:tcPr>
+                    <a:lnL w="9525">
+                      <a:solidFill>
+                        <a:srgbClr val="BFBFBF"/>
+                      </a:solidFill>
+                    </a:lnL>
+                    <a:lnR w="9525">
+                      <a:solidFill>
+                        <a:srgbClr val="BFBFBF"/>
+                      </a:solidFill>
+                    </a:lnR>
+                    <a:lnT w="9525">
+                      <a:solidFill>
+                        <a:srgbClr val="BFBFBF"/>
+                      </a:solidFill>
+                    </a:lnT>
+                    <a:lnB w="9525">
+                      <a:solidFill>
+                        <a:srgbClr val="BFBFBF"/>
+                      </a:solidFill>
+                    </a:lnB>
+                  </a:tcPr>
+                </a:tc>
+                <a:tc>
+                  <a:txBody>
+                    <a:bodyPr/>
+                    <a:lstStyle/>
+                    <a:p>
+                      <a:pPr>
+                        <a:buNone/>
+                      </a:pPr>
+                      <a:r>
+                        <a:rPr lang="en-US" sz="1200" dirty="0"/>
+                        <a:t>One </a:t>
+                      </a:r>
+                      <a:endParaRPr lang="en-US" sz="1200" dirty="0"/>
+                    </a:p>
                   </a:txBody>
                   <a:tcPr>
                     <a:lnL w="9525">
@@ -5387,39 +4584,48 @@
                       </a:pPr>
                       <a:r>
                         <a:rPr lang="en-US" sz="1200" dirty="0"/>
-                        <a:t>Five </a:t>
-                      </a:r>
-                      <a:endParaRPr lang="en-US" sz="1200" dirty="0"/>
-                    </a:p>
-                  </a:txBody>
-                  <a:tcPr>
-                    <a:lnL w="9525">
-                      <a:solidFill>
-                        <a:srgbClr val="BFBFBF"/>
-                      </a:solidFill>
-                    </a:lnL>
-                    <a:lnR w="9525">
-                      <a:solidFill>
-                        <a:srgbClr val="BFBFBF"/>
-                      </a:solidFill>
-                    </a:lnR>
-                    <a:lnT w="9525">
-                      <a:solidFill>
-                        <a:srgbClr val="BFBFBF"/>
-                      </a:solidFill>
-                    </a:lnT>
-                    <a:lnB w="9525">
-                      <a:solidFill>
-                        <a:srgbClr val="BFBFBF"/>
-                      </a:solidFill>
-                    </a:lnB>
-                  </a:tcPr>
-                </a:tc>
-                <a:tc>
-                  <a:txBody>
-                    <a:bodyPr/>
-                    <a:lstStyle/>
-                    <a:p/>
+                        <a:t>1</a:t>
+                      </a:r>
+                      <a:endParaRPr lang="en-US" sz="1200" dirty="0"/>
+                    </a:p>
+                  </a:txBody>
+                  <a:tcPr>
+                    <a:lnL w="9525">
+                      <a:solidFill>
+                        <a:srgbClr val="BFBFBF"/>
+                      </a:solidFill>
+                    </a:lnL>
+                    <a:lnR w="9525">
+                      <a:solidFill>
+                        <a:srgbClr val="BFBFBF"/>
+                      </a:solidFill>
+                    </a:lnR>
+                    <a:lnT w="9525">
+                      <a:solidFill>
+                        <a:srgbClr val="BFBFBF"/>
+                      </a:solidFill>
+                    </a:lnT>
+                    <a:lnB w="9525">
+                      <a:solidFill>
+                        <a:srgbClr val="BFBFBF"/>
+                      </a:solidFill>
+                    </a:lnB>
+                  </a:tcPr>
+                </a:tc>
+                <a:tc>
+                  <a:txBody>
+                    <a:bodyPr/>
+                    <a:lstStyle/>
+                    <a:p>
+                      <a:pPr>
+                        <a:buNone/>
+                      </a:pPr>
+                      <a:r>
+                        <a:rPr lang="en-US" sz="1200" dirty="0"/>
+                        <a:t>Two </a:t>
+                      </a:r>
+                      <a:endParaRPr lang="en-US" sz="1200" dirty="0"/>
+                    </a:p>
                   </a:txBody>
                   <a:tcPr>
                     <a:lnL w="9525">
@@ -5530,7 +4736,7 @@
                 <a:gridCol w="4114800"/>
                 <a:gridCol w="4114800"/>
               </a:tblGrid>
-              <a:tr h="526143">
+              <a:tr h="334818">
                 <a:tc>
                   <a:txBody>
                     <a:bodyPr/>
@@ -5599,18 +4805,330 @@
                   </a:tcPr>
                 </a:tc>
               </a:tr>
-              <a:tr h="526143">
-                <a:tc>
-                  <a:txBody>
-                    <a:bodyPr/>
-                    <a:lstStyle/>
-                    <a:p>
-                      <a:pPr>
-                        <a:buNone/>
-                      </a:pPr>
-                      <a:r>
-                        <a:rPr lang="en-US" sz="1200" dirty="0"/>
-                        <a:t>Continued Lists </a:t>
+              <a:tr h="334818">
+                <a:tc>
+                  <a:txBody>
+                    <a:bodyPr/>
+                    <a:lstStyle/>
+                    <a:p>
+                      <a:pPr>
+                        <a:buNone/>
+                      </a:pPr>
+                      <a:r>
+                        <a:rPr lang="en-US" sz="1200" dirty="0"/>
+                        <a:t>1</a:t>
+                      </a:r>
+                      <a:endParaRPr lang="en-US" sz="1200" dirty="0"/>
+                    </a:p>
+                  </a:txBody>
+                  <a:tcPr>
+                    <a:lnL w="9525">
+                      <a:solidFill>
+                        <a:srgbClr val="BFBFBF"/>
+                      </a:solidFill>
+                    </a:lnL>
+                    <a:lnR w="9525">
+                      <a:solidFill>
+                        <a:srgbClr val="BFBFBF"/>
+                      </a:solidFill>
+                    </a:lnR>
+                    <a:lnT w="9525">
+                      <a:solidFill>
+                        <a:srgbClr val="BFBFBF"/>
+                      </a:solidFill>
+                    </a:lnT>
+                    <a:lnB w="9525">
+                      <a:solidFill>
+                        <a:srgbClr val="BFBFBF"/>
+                      </a:solidFill>
+                    </a:lnB>
+                  </a:tcPr>
+                </a:tc>
+                <a:tc>
+                  <a:txBody>
+                    <a:bodyPr/>
+                    <a:lstStyle/>
+                    <a:p>
+                      <a:pPr>
+                        <a:buNone/>
+                      </a:pPr>
+                      <a:r>
+                        <a:rPr lang="en-US" sz="1200" dirty="0"/>
+                        <a:t>Three </a:t>
+                      </a:r>
+                      <a:endParaRPr lang="en-US" sz="1200" dirty="0"/>
+                    </a:p>
+                  </a:txBody>
+                  <a:tcPr>
+                    <a:lnL w="9525">
+                      <a:solidFill>
+                        <a:srgbClr val="BFBFBF"/>
+                      </a:solidFill>
+                    </a:lnL>
+                    <a:lnR w="9525">
+                      <a:solidFill>
+                        <a:srgbClr val="BFBFBF"/>
+                      </a:solidFill>
+                    </a:lnR>
+                    <a:lnT w="9525">
+                      <a:solidFill>
+                        <a:srgbClr val="BFBFBF"/>
+                      </a:solidFill>
+                    </a:lnT>
+                    <a:lnB w="9525">
+                      <a:solidFill>
+                        <a:srgbClr val="BFBFBF"/>
+                      </a:solidFill>
+                    </a:lnB>
+                  </a:tcPr>
+                </a:tc>
+              </a:tr>
+              <a:tr h="334818">
+                <a:tc>
+                  <a:txBody>
+                    <a:bodyPr/>
+                    <a:lstStyle/>
+                    <a:p>
+                      <a:pPr>
+                        <a:buNone/>
+                      </a:pPr>
+                      <a:r>
+                        <a:rPr lang="en-US" sz="1200" dirty="0"/>
+                        <a:t>2</a:t>
+                      </a:r>
+                      <a:endParaRPr lang="en-US" sz="1200" dirty="0"/>
+                    </a:p>
+                  </a:txBody>
+                  <a:tcPr>
+                    <a:lnL w="9525">
+                      <a:solidFill>
+                        <a:srgbClr val="BFBFBF"/>
+                      </a:solidFill>
+                    </a:lnL>
+                    <a:lnR w="9525">
+                      <a:solidFill>
+                        <a:srgbClr val="BFBFBF"/>
+                      </a:solidFill>
+                    </a:lnR>
+                    <a:lnT w="9525">
+                      <a:solidFill>
+                        <a:srgbClr val="BFBFBF"/>
+                      </a:solidFill>
+                    </a:lnT>
+                    <a:lnB w="9525">
+                      <a:solidFill>
+                        <a:srgbClr val="BFBFBF"/>
+                      </a:solidFill>
+                    </a:lnB>
+                  </a:tcPr>
+                </a:tc>
+                <a:tc>
+                  <a:txBody>
+                    <a:bodyPr/>
+                    <a:lstStyle/>
+                    <a:p>
+                      <a:pPr>
+                        <a:buNone/>
+                      </a:pPr>
+                      <a:r>
+                        <a:rPr lang="en-US" sz="1200" dirty="0"/>
+                        <a:t>Four with a very long line to demonstrate that the hanging indent for the list is working correctly. </a:t>
+                      </a:r>
+                      <a:endParaRPr lang="en-US" sz="1200" dirty="0"/>
+                    </a:p>
+                  </a:txBody>
+                  <a:tcPr>
+                    <a:lnL w="9525">
+                      <a:solidFill>
+                        <a:srgbClr val="BFBFBF"/>
+                      </a:solidFill>
+                    </a:lnL>
+                    <a:lnR w="9525">
+                      <a:solidFill>
+                        <a:srgbClr val="BFBFBF"/>
+                      </a:solidFill>
+                    </a:lnR>
+                    <a:lnT w="9525">
+                      <a:solidFill>
+                        <a:srgbClr val="BFBFBF"/>
+                      </a:solidFill>
+                    </a:lnT>
+                    <a:lnB w="9525">
+                      <a:solidFill>
+                        <a:srgbClr val="BFBFBF"/>
+                      </a:solidFill>
+                    </a:lnB>
+                  </a:tcPr>
+                </a:tc>
+              </a:tr>
+              <a:tr h="334818">
+                <a:tc>
+                  <a:txBody>
+                    <a:bodyPr/>
+                    <a:lstStyle/>
+                    <a:p>
+                      <a:pPr>
+                        <a:buNone/>
+                      </a:pPr>
+                      <a:r>
+                        <a:rPr lang="en-US" sz="1200" dirty="0"/>
+                        <a:t>3</a:t>
+                      </a:r>
+                      <a:endParaRPr lang="en-US" sz="1200" dirty="0"/>
+                    </a:p>
+                  </a:txBody>
+                  <a:tcPr>
+                    <a:lnL w="9525">
+                      <a:solidFill>
+                        <a:srgbClr val="BFBFBF"/>
+                      </a:solidFill>
+                    </a:lnL>
+                    <a:lnR w="9525">
+                      <a:solidFill>
+                        <a:srgbClr val="BFBFBF"/>
+                      </a:solidFill>
+                    </a:lnR>
+                    <a:lnT w="9525">
+                      <a:solidFill>
+                        <a:srgbClr val="BFBFBF"/>
+                      </a:solidFill>
+                    </a:lnT>
+                    <a:lnB w="9525">
+                      <a:solidFill>
+                        <a:srgbClr val="BFBFBF"/>
+                      </a:solidFill>
+                    </a:lnB>
+                  </a:tcPr>
+                </a:tc>
+                <a:tc>
+                  <a:txBody>
+                    <a:bodyPr/>
+                    <a:lstStyle/>
+                    <a:p>
+                      <a:pPr>
+                        <a:buNone/>
+                      </a:pPr>
+                      <a:r>
+                        <a:rPr lang="en-US" sz="1200" dirty="0"/>
+                        <a:t>Five </a:t>
+                      </a:r>
+                      <a:endParaRPr lang="en-US" sz="1200" dirty="0"/>
+                    </a:p>
+                  </a:txBody>
+                  <a:tcPr>
+                    <a:lnL w="9525">
+                      <a:solidFill>
+                        <a:srgbClr val="BFBFBF"/>
+                      </a:solidFill>
+                    </a:lnL>
+                    <a:lnR w="9525">
+                      <a:solidFill>
+                        <a:srgbClr val="BFBFBF"/>
+                      </a:solidFill>
+                    </a:lnR>
+                    <a:lnT w="9525">
+                      <a:solidFill>
+                        <a:srgbClr val="BFBFBF"/>
+                      </a:solidFill>
+                    </a:lnT>
+                    <a:lnB w="9525">
+                      <a:solidFill>
+                        <a:srgbClr val="BFBFBF"/>
+                      </a:solidFill>
+                    </a:lnB>
+                  </a:tcPr>
+                </a:tc>
+              </a:tr>
+              <a:tr h="334818">
+                <a:tc>
+                  <a:txBody>
+                    <a:bodyPr/>
+                    <a:lstStyle/>
+                    <a:p>
+                      <a:pPr>
+                        <a:buNone/>
+                      </a:pPr>
+                      <a:r>
+                        <a:rPr lang="en-US" sz="1200" dirty="0"/>
+                        <a:t>2</a:t>
+                      </a:r>
+                      <a:endParaRPr lang="en-US" sz="1200" dirty="0"/>
+                    </a:p>
+                  </a:txBody>
+                  <a:tcPr>
+                    <a:lnL w="9525">
+                      <a:solidFill>
+                        <a:srgbClr val="BFBFBF"/>
+                      </a:solidFill>
+                    </a:lnL>
+                    <a:lnR w="9525">
+                      <a:solidFill>
+                        <a:srgbClr val="BFBFBF"/>
+                      </a:solidFill>
+                    </a:lnR>
+                    <a:lnT w="9525">
+                      <a:solidFill>
+                        <a:srgbClr val="BFBFBF"/>
+                      </a:solidFill>
+                    </a:lnT>
+                    <a:lnB w="9525">
+                      <a:solidFill>
+                        <a:srgbClr val="BFBFBF"/>
+                      </a:solidFill>
+                    </a:lnB>
+                  </a:tcPr>
+                </a:tc>
+                <a:tc>
+                  <a:txBody>
+                    <a:bodyPr/>
+                    <a:lstStyle/>
+                    <a:p>
+                      <a:pPr>
+                        <a:buNone/>
+                      </a:pPr>
+                      <a:r>
+                        <a:rPr lang="en-US" sz="1200" dirty="0"/>
+                        <a:t>Six </a:t>
+                      </a:r>
+                      <a:endParaRPr lang="en-US" sz="1200" dirty="0"/>
+                    </a:p>
+                  </a:txBody>
+                  <a:tcPr>
+                    <a:lnL w="9525">
+                      <a:solidFill>
+                        <a:srgbClr val="BFBFBF"/>
+                      </a:solidFill>
+                    </a:lnL>
+                    <a:lnR w="9525">
+                      <a:solidFill>
+                        <a:srgbClr val="BFBFBF"/>
+                      </a:solidFill>
+                    </a:lnR>
+                    <a:lnT w="9525">
+                      <a:solidFill>
+                        <a:srgbClr val="BFBFBF"/>
+                      </a:solidFill>
+                    </a:lnT>
+                    <a:lnB w="9525">
+                      <a:solidFill>
+                        <a:srgbClr val="BFBFBF"/>
+                      </a:solidFill>
+                    </a:lnB>
+                  </a:tcPr>
+                </a:tc>
+              </a:tr>
+              <a:tr h="334818">
+                <a:tc>
+                  <a:txBody>
+                    <a:bodyPr/>
+                    <a:lstStyle/>
+                    <a:p>
+                      <a:pPr>
+                        <a:buNone/>
+                      </a:pPr>
+                      <a:r>
+                        <a:rPr lang="en-US" sz="1200" dirty="0"/>
+                        <a:t>A Multi-level list with bullets: </a:t>
                       </a:r>
                       <a:endParaRPr lang="en-US" sz="1200" dirty="0"/>
                     </a:p>
@@ -5668,45 +5186,7 @@
                   </a:tcPr>
                 </a:tc>
               </a:tr>
-              <a:tr h="526143">
-                <a:tc>
-                  <a:txBody>
-                    <a:bodyPr/>
-                    <a:lstStyle/>
-                    <a:p>
-                      <a:pPr>
-                        <a:buNone/>
-                      </a:pPr>
-                      <a:r>
-                        <a:rPr lang="en-US" sz="1200" dirty="0"/>
-                        <a:t>i</a:t>
-                      </a:r>
-                      <a:endParaRPr lang="en-US" sz="1200" dirty="0"/>
-                    </a:p>
-                  </a:txBody>
-                  <a:tcPr>
-                    <a:lnL w="9525">
-                      <a:solidFill>
-                        <a:srgbClr val="BFBFBF"/>
-                      </a:solidFill>
-                    </a:lnL>
-                    <a:lnR w="9525">
-                      <a:solidFill>
-                        <a:srgbClr val="BFBFBF"/>
-                      </a:solidFill>
-                    </a:lnR>
-                    <a:lnT w="9525">
-                      <a:solidFill>
-                        <a:srgbClr val="BFBFBF"/>
-                      </a:solidFill>
-                    </a:lnT>
-                    <a:lnB w="9525">
-                      <a:solidFill>
-                        <a:srgbClr val="BFBFBF"/>
-                      </a:solidFill>
-                    </a:lnB>
-                  </a:tcPr>
-                </a:tc>
+              <a:tr h="334818">
                 <a:tc>
                   <a:txBody>
                     <a:bodyPr/>
@@ -5745,46 +5225,37 @@
                     </a:lnB>
                   </a:tcPr>
                 </a:tc>
+                <a:tc>
+                  <a:txBody>
+                    <a:bodyPr/>
+                    <a:lstStyle/>
+                    <a:p/>
+                  </a:txBody>
+                  <a:tcPr>
+                    <a:lnL w="9525">
+                      <a:solidFill>
+                        <a:srgbClr val="BFBFBF"/>
+                      </a:solidFill>
+                    </a:lnL>
+                    <a:lnR w="9525">
+                      <a:solidFill>
+                        <a:srgbClr val="BFBFBF"/>
+                      </a:solidFill>
+                    </a:lnR>
+                    <a:lnT w="9525">
+                      <a:solidFill>
+                        <a:srgbClr val="BFBFBF"/>
+                      </a:solidFill>
+                    </a:lnT>
+                    <a:lnB w="9525">
+                      <a:solidFill>
+                        <a:srgbClr val="BFBFBF"/>
+                      </a:solidFill>
+                    </a:lnB>
+                  </a:tcPr>
+                </a:tc>
               </a:tr>
-              <a:tr h="526143">
-                <a:tc>
-                  <a:txBody>
-                    <a:bodyPr/>
-                    <a:lstStyle/>
-                    <a:p>
-                      <a:pPr>
-                        <a:buNone/>
-                      </a:pPr>
-                      <a:r>
-                        <a:rPr lang="en-US" sz="1200" dirty="0"/>
-                        <a:t>ii</a:t>
-                      </a:r>
-                      <a:endParaRPr lang="en-US" sz="1200" dirty="0"/>
-                    </a:p>
-                  </a:txBody>
-                  <a:tcPr>
-                    <a:lnL w="9525">
-                      <a:solidFill>
-                        <a:srgbClr val="BFBFBF"/>
-                      </a:solidFill>
-                    </a:lnL>
-                    <a:lnR w="9525">
-                      <a:solidFill>
-                        <a:srgbClr val="BFBFBF"/>
-                      </a:solidFill>
-                    </a:lnR>
-                    <a:lnT w="9525">
-                      <a:solidFill>
-                        <a:srgbClr val="BFBFBF"/>
-                      </a:solidFill>
-                    </a:lnT>
-                    <a:lnB w="9525">
-                      <a:solidFill>
-                        <a:srgbClr val="BFBFBF"/>
-                      </a:solidFill>
-                    </a:lnB>
-                  </a:tcPr>
-                </a:tc>
+              <a:tr h="334818">
                 <a:tc>
                   <a:txBody>
                     <a:bodyPr/>
@@ -5823,19 +5294,48 @@
                     </a:lnB>
                   </a:tcPr>
                 </a:tc>
+                <a:tc>
+                  <a:txBody>
+                    <a:bodyPr/>
+                    <a:lstStyle/>
+                    <a:p/>
+                  </a:txBody>
+                  <a:tcPr>
+                    <a:lnL w="9525">
+                      <a:solidFill>
+                        <a:srgbClr val="BFBFBF"/>
+                      </a:solidFill>
+                    </a:lnL>
+                    <a:lnR w="9525">
+                      <a:solidFill>
+                        <a:srgbClr val="BFBFBF"/>
+                      </a:solidFill>
+                    </a:lnR>
+                    <a:lnT w="9525">
+                      <a:solidFill>
+                        <a:srgbClr val="BFBFBF"/>
+                      </a:solidFill>
+                    </a:lnT>
+                    <a:lnB w="9525">
+                      <a:solidFill>
+                        <a:srgbClr val="BFBFBF"/>
+                      </a:solidFill>
+                    </a:lnB>
+                  </a:tcPr>
+                </a:tc>
               </a:tr>
-              <a:tr h="526143">
-                <a:tc>
-                  <a:txBody>
-                    <a:bodyPr/>
-                    <a:lstStyle/>
-                    <a:p>
-                      <a:pPr>
-                        <a:buNone/>
-                      </a:pPr>
-                      <a:r>
-                        <a:rPr lang="en-US" sz="1200" dirty="0"/>
-                        <a:t>An interruption in our regularly scheduled listing, for this essential and very relevant public service announcement. </a:t>
+              <a:tr h="334818">
+                <a:tc>
+                  <a:txBody>
+                    <a:bodyPr/>
+                    <a:lstStyle/>
+                    <a:p>
+                      <a:pPr>
+                        <a:buNone/>
+                      </a:pPr>
+                      <a:r>
+                        <a:rPr lang="en-US" sz="1200" dirty="0"/>
+                        <a:t>This bullet uses an image as the bullet item </a:t>
                       </a:r>
                       <a:endParaRPr lang="en-US" sz="1200" dirty="0"/>
                     </a:p>
@@ -5893,59 +5393,50 @@
                   </a:tcPr>
                 </a:tc>
               </a:tr>
-              <a:tr h="526143">
-                <a:tc>
-                  <a:txBody>
-                    <a:bodyPr/>
-                    <a:lstStyle/>
-                    <a:p>
-                      <a:pPr>
-                        <a:buNone/>
-                      </a:pPr>
-                      <a:r>
-                        <a:rPr lang="en-US" sz="1200" dirty="0"/>
-                        <a:t>iii</a:t>
-                      </a:r>
-                      <a:endParaRPr lang="en-US" sz="1200" dirty="0"/>
-                    </a:p>
-                  </a:txBody>
-                  <a:tcPr>
-                    <a:lnL w="9525">
-                      <a:solidFill>
-                        <a:srgbClr val="BFBFBF"/>
-                      </a:solidFill>
-                    </a:lnL>
-                    <a:lnR w="9525">
-                      <a:solidFill>
-                        <a:srgbClr val="BFBFBF"/>
-                      </a:solidFill>
-                    </a:lnR>
-                    <a:lnT w="9525">
-                      <a:solidFill>
-                        <a:srgbClr val="BFBFBF"/>
-                      </a:solidFill>
-                    </a:lnT>
-                    <a:lnB w="9525">
-                      <a:solidFill>
-                        <a:srgbClr val="BFBFBF"/>
-                      </a:solidFill>
-                    </a:lnB>
-                  </a:tcPr>
-                </a:tc>
-                <a:tc>
-                  <a:txBody>
-                    <a:bodyPr/>
-                    <a:lstStyle/>
-                    <a:p>
-                      <a:pPr>
-                        <a:buNone/>
-                      </a:pPr>
-                      <a:r>
-                        <a:rPr lang="en-US" sz="1200" dirty="0"/>
-                        <a:t>We now resume our normal programming </a:t>
-                      </a:r>
-                      <a:endParaRPr lang="en-US" sz="1200" dirty="0"/>
-                    </a:p>
+              <a:tr h="334818">
+                <a:tc>
+                  <a:txBody>
+                    <a:bodyPr/>
+                    <a:lstStyle/>
+                    <a:p>
+                      <a:pPr>
+                        <a:buNone/>
+                      </a:pPr>
+                      <a:r>
+                        <a:rPr lang="en-US" sz="1200" dirty="0"/>
+                        <a:t>Four </a:t>
+                      </a:r>
+                      <a:endParaRPr lang="en-US" sz="1200" dirty="0"/>
+                    </a:p>
+                  </a:txBody>
+                  <a:tcPr>
+                    <a:lnL w="9525">
+                      <a:solidFill>
+                        <a:srgbClr val="BFBFBF"/>
+                      </a:solidFill>
+                    </a:lnL>
+                    <a:lnR w="9525">
+                      <a:solidFill>
+                        <a:srgbClr val="BFBFBF"/>
+                      </a:solidFill>
+                    </a:lnR>
+                    <a:lnT w="9525">
+                      <a:solidFill>
+                        <a:srgbClr val="BFBFBF"/>
+                      </a:solidFill>
+                    </a:lnT>
+                    <a:lnB w="9525">
+                      <a:solidFill>
+                        <a:srgbClr val="BFBFBF"/>
+                      </a:solidFill>
+                    </a:lnB>
+                  </a:tcPr>
+                </a:tc>
+                <a:tc>
+                  <a:txBody>
+                    <a:bodyPr/>
+                    <a:lstStyle/>
+                    <a:p/>
                   </a:txBody>
                   <a:tcPr>
                     <a:lnL w="9525">
@@ -5971,59 +5462,50 @@
                   </a:tcPr>
                 </a:tc>
               </a:tr>
-              <a:tr h="526143">
-                <a:tc>
-                  <a:txBody>
-                    <a:bodyPr/>
-                    <a:lstStyle/>
-                    <a:p>
-                      <a:pPr>
-                        <a:buNone/>
-                      </a:pPr>
-                      <a:r>
-                        <a:rPr lang="en-US" sz="1200" dirty="0"/>
-                        <a:t>iv</a:t>
-                      </a:r>
-                      <a:endParaRPr lang="en-US" sz="1200" dirty="0"/>
-                    </a:p>
-                  </a:txBody>
-                  <a:tcPr>
-                    <a:lnL w="9525">
-                      <a:solidFill>
-                        <a:srgbClr val="BFBFBF"/>
-                      </a:solidFill>
-                    </a:lnL>
-                    <a:lnR w="9525">
-                      <a:solidFill>
-                        <a:srgbClr val="BFBFBF"/>
-                      </a:solidFill>
-                    </a:lnR>
-                    <a:lnT w="9525">
-                      <a:solidFill>
-                        <a:srgbClr val="BFBFBF"/>
-                      </a:solidFill>
-                    </a:lnT>
-                    <a:lnB w="9525">
-                      <a:solidFill>
-                        <a:srgbClr val="BFBFBF"/>
-                      </a:solidFill>
-                    </a:lnB>
-                  </a:tcPr>
-                </a:tc>
-                <a:tc>
-                  <a:txBody>
-                    <a:bodyPr/>
-                    <a:lstStyle/>
-                    <a:p>
-                      <a:pPr>
-                        <a:buNone/>
-                      </a:pPr>
-                      <a:r>
-                        <a:rPr lang="en-US" sz="1200" dirty="0"/>
-                        <a:t>Four </a:t>
-                      </a:r>
-                      <a:endParaRPr lang="en-US" sz="1200" dirty="0"/>
-                    </a:p>
+              <a:tr h="334818">
+                <a:tc>
+                  <a:txBody>
+                    <a:bodyPr/>
+                    <a:lstStyle/>
+                    <a:p>
+                      <a:pPr>
+                        <a:buNone/>
+                      </a:pPr>
+                      <a:r>
+                        <a:rPr lang="en-US" sz="1200" dirty="0"/>
+                        <a:t>Five </a:t>
+                      </a:r>
+                      <a:endParaRPr lang="en-US" sz="1200" dirty="0"/>
+                    </a:p>
+                  </a:txBody>
+                  <a:tcPr>
+                    <a:lnL w="9525">
+                      <a:solidFill>
+                        <a:srgbClr val="BFBFBF"/>
+                      </a:solidFill>
+                    </a:lnL>
+                    <a:lnR w="9525">
+                      <a:solidFill>
+                        <a:srgbClr val="BFBFBF"/>
+                      </a:solidFill>
+                    </a:lnR>
+                    <a:lnT w="9525">
+                      <a:solidFill>
+                        <a:srgbClr val="BFBFBF"/>
+                      </a:solidFill>
+                    </a:lnT>
+                    <a:lnB w="9525">
+                      <a:solidFill>
+                        <a:srgbClr val="BFBFBF"/>
+                      </a:solidFill>
+                    </a:lnB>
+                  </a:tcPr>
+                </a:tc>
+                <a:tc>
+                  <a:txBody>
+                    <a:bodyPr/>
+                    <a:lstStyle/>
+                    <a:p/>
                   </a:txBody>
                   <a:tcPr>
                     <a:lnL w="9525">
@@ -6062,6 +5544,610 @@
 </file>
 
 <file path=ppt/slides/slide16.xml><?xml version="1.0" encoding="utf-8"?>
+<p:sld xmlns:a="http://schemas.openxmlformats.org/drawingml/2006/main" xmlns:r="http://schemas.openxmlformats.org/officeDocument/2006/relationships" xmlns:p="http://schemas.openxmlformats.org/presentationml/2006/main">
+  <p:cSld>
+    <p:spTree>
+      <p:nvGrpSpPr>
+        <p:cNvPr id="1" name=""/>
+        <p:cNvGrpSpPr/>
+        <p:nvPr/>
+      </p:nvGrpSpPr>
+      <p:grpSpPr>
+        <a:xfrm>
+          <a:off x="0" y="0"/>
+          <a:ext cx="0" cy="0"/>
+          <a:chOff x="0" y="0"/>
+          <a:chExt cx="0" cy="0"/>
+        </a:xfrm>
+      </p:grpSpPr>
+      <p:sp>
+        <p:nvSpPr>
+          <p:cNvPr id="2" name="Title 2"/>
+          <p:cNvSpPr txBox="1"/>
+          <p:nvPr/>
+        </p:nvSpPr>
+        <p:spPr>
+          <a:xfrm>
+            <a:off x="457200" y="279400"/>
+            <a:ext cx="8229600" cy="711200"/>
+          </a:xfrm>
+          <a:prstGeom prst="rect">
+            <a:avLst/>
+          </a:prstGeom>
+          <a:noFill/>
+          <a:ln>
+            <a:noFill/>
+          </a:ln>
+        </p:spPr>
+        <p:txBody>
+          <a:bodyPr wrap="square" anchor="b" rtlCol="0">
+            <a:normAutofit/>
+          </a:bodyPr>
+          <a:lstStyle/>
+          <a:p>
+            <a:pPr>
+              <a:buNone/>
+            </a:pPr>
+            <a:r>
+              <a:rPr lang="en-US" sz="2800" b="1" dirty="0"/>
+              <a:t>Sheet8</a:t>
+            </a:r>
+            <a:endParaRPr lang="en-US" sz="2800" dirty="0"/>
+          </a:p>
+        </p:txBody>
+      </p:sp>
+      <p:graphicFrame>
+        <p:nvGraphicFramePr>
+          <p:cNvPr id="3" name="Table 3"/>
+          <p:cNvGraphicFramePr>
+            <a:graphicFrameLocks noGrp="1"/>
+          </p:cNvGraphicFramePr>
+          <p:nvPr/>
+        </p:nvGraphicFramePr>
+        <p:xfrm>
+          <a:off x="457200" y="1143000"/>
+          <a:ext cx="8229600" cy="3683000"/>
+        </p:xfrm>
+        <a:graphic>
+          <a:graphicData uri="http://schemas.openxmlformats.org/drawingml/2006/table">
+            <a:tbl>
+              <a:tblPr firstRow="1"/>
+              <a:tblGrid>
+                <a:gridCol w="4114800"/>
+                <a:gridCol w="4114800"/>
+              </a:tblGrid>
+              <a:tr h="526143">
+                <a:tc>
+                  <a:txBody>
+                    <a:bodyPr/>
+                    <a:lstStyle/>
+                    <a:p>
+                      <a:pPr>
+                        <a:buNone/>
+                      </a:pPr>
+                      <a:r>
+                        <a:rPr lang="en-US" sz="1200" dirty="0"/>
+                        <a:t>Lists </a:t>
+                      </a:r>
+                      <a:endParaRPr lang="en-US" sz="1200" dirty="0"/>
+                    </a:p>
+                  </a:txBody>
+                  <a:tcPr>
+                    <a:lnL w="9525">
+                      <a:solidFill>
+                        <a:srgbClr val="BFBFBF"/>
+                      </a:solidFill>
+                    </a:lnL>
+                    <a:lnR w="9525">
+                      <a:solidFill>
+                        <a:srgbClr val="BFBFBF"/>
+                      </a:solidFill>
+                    </a:lnR>
+                    <a:lnT w="9525">
+                      <a:solidFill>
+                        <a:srgbClr val="BFBFBF"/>
+                      </a:solidFill>
+                    </a:lnT>
+                    <a:lnB w="9525">
+                      <a:solidFill>
+                        <a:srgbClr val="BFBFBF"/>
+                      </a:solidFill>
+                    </a:lnB>
+                  </a:tcPr>
+                </a:tc>
+                <a:tc>
+                  <a:txBody>
+                    <a:bodyPr/>
+                    <a:lstStyle/>
+                    <a:p/>
+                  </a:txBody>
+                  <a:tcPr>
+                    <a:lnL w="9525">
+                      <a:solidFill>
+                        <a:srgbClr val="BFBFBF"/>
+                      </a:solidFill>
+                    </a:lnL>
+                    <a:lnR w="9525">
+                      <a:solidFill>
+                        <a:srgbClr val="BFBFBF"/>
+                      </a:solidFill>
+                    </a:lnR>
+                    <a:lnT w="9525">
+                      <a:solidFill>
+                        <a:srgbClr val="BFBFBF"/>
+                      </a:solidFill>
+                    </a:lnT>
+                    <a:lnB w="9525">
+                      <a:solidFill>
+                        <a:srgbClr val="BFBFBF"/>
+                      </a:solidFill>
+                    </a:lnB>
+                  </a:tcPr>
+                </a:tc>
+              </a:tr>
+              <a:tr h="526143">
+                <a:tc>
+                  <a:txBody>
+                    <a:bodyPr/>
+                    <a:lstStyle/>
+                    <a:p>
+                      <a:pPr>
+                        <a:buNone/>
+                      </a:pPr>
+                      <a:r>
+                        <a:rPr lang="en-US" sz="1200" dirty="0"/>
+                        <a:t>Continued Lists </a:t>
+                      </a:r>
+                      <a:endParaRPr lang="en-US" sz="1200" dirty="0"/>
+                    </a:p>
+                  </a:txBody>
+                  <a:tcPr>
+                    <a:lnL w="9525">
+                      <a:solidFill>
+                        <a:srgbClr val="BFBFBF"/>
+                      </a:solidFill>
+                    </a:lnL>
+                    <a:lnR w="9525">
+                      <a:solidFill>
+                        <a:srgbClr val="BFBFBF"/>
+                      </a:solidFill>
+                    </a:lnR>
+                    <a:lnT w="9525">
+                      <a:solidFill>
+                        <a:srgbClr val="BFBFBF"/>
+                      </a:solidFill>
+                    </a:lnT>
+                    <a:lnB w="9525">
+                      <a:solidFill>
+                        <a:srgbClr val="BFBFBF"/>
+                      </a:solidFill>
+                    </a:lnB>
+                  </a:tcPr>
+                </a:tc>
+                <a:tc>
+                  <a:txBody>
+                    <a:bodyPr/>
+                    <a:lstStyle/>
+                    <a:p/>
+                  </a:txBody>
+                  <a:tcPr>
+                    <a:lnL w="9525">
+                      <a:solidFill>
+                        <a:srgbClr val="BFBFBF"/>
+                      </a:solidFill>
+                    </a:lnL>
+                    <a:lnR w="9525">
+                      <a:solidFill>
+                        <a:srgbClr val="BFBFBF"/>
+                      </a:solidFill>
+                    </a:lnR>
+                    <a:lnT w="9525">
+                      <a:solidFill>
+                        <a:srgbClr val="BFBFBF"/>
+                      </a:solidFill>
+                    </a:lnT>
+                    <a:lnB w="9525">
+                      <a:solidFill>
+                        <a:srgbClr val="BFBFBF"/>
+                      </a:solidFill>
+                    </a:lnB>
+                  </a:tcPr>
+                </a:tc>
+              </a:tr>
+              <a:tr h="526143">
+                <a:tc>
+                  <a:txBody>
+                    <a:bodyPr/>
+                    <a:lstStyle/>
+                    <a:p>
+                      <a:pPr>
+                        <a:buNone/>
+                      </a:pPr>
+                      <a:r>
+                        <a:rPr lang="en-US" sz="1200" dirty="0"/>
+                        <a:t>i</a:t>
+                      </a:r>
+                      <a:endParaRPr lang="en-US" sz="1200" dirty="0"/>
+                    </a:p>
+                  </a:txBody>
+                  <a:tcPr>
+                    <a:lnL w="9525">
+                      <a:solidFill>
+                        <a:srgbClr val="BFBFBF"/>
+                      </a:solidFill>
+                    </a:lnL>
+                    <a:lnR w="9525">
+                      <a:solidFill>
+                        <a:srgbClr val="BFBFBF"/>
+                      </a:solidFill>
+                    </a:lnR>
+                    <a:lnT w="9525">
+                      <a:solidFill>
+                        <a:srgbClr val="BFBFBF"/>
+                      </a:solidFill>
+                    </a:lnT>
+                    <a:lnB w="9525">
+                      <a:solidFill>
+                        <a:srgbClr val="BFBFBF"/>
+                      </a:solidFill>
+                    </a:lnB>
+                  </a:tcPr>
+                </a:tc>
+                <a:tc>
+                  <a:txBody>
+                    <a:bodyPr/>
+                    <a:lstStyle/>
+                    <a:p>
+                      <a:pPr>
+                        <a:buNone/>
+                      </a:pPr>
+                      <a:r>
+                        <a:rPr lang="en-US" sz="1200" dirty="0"/>
+                        <a:t>One </a:t>
+                      </a:r>
+                      <a:endParaRPr lang="en-US" sz="1200" dirty="0"/>
+                    </a:p>
+                  </a:txBody>
+                  <a:tcPr>
+                    <a:lnL w="9525">
+                      <a:solidFill>
+                        <a:srgbClr val="BFBFBF"/>
+                      </a:solidFill>
+                    </a:lnL>
+                    <a:lnR w="9525">
+                      <a:solidFill>
+                        <a:srgbClr val="BFBFBF"/>
+                      </a:solidFill>
+                    </a:lnR>
+                    <a:lnT w="9525">
+                      <a:solidFill>
+                        <a:srgbClr val="BFBFBF"/>
+                      </a:solidFill>
+                    </a:lnT>
+                    <a:lnB w="9525">
+                      <a:solidFill>
+                        <a:srgbClr val="BFBFBF"/>
+                      </a:solidFill>
+                    </a:lnB>
+                  </a:tcPr>
+                </a:tc>
+              </a:tr>
+              <a:tr h="526143">
+                <a:tc>
+                  <a:txBody>
+                    <a:bodyPr/>
+                    <a:lstStyle/>
+                    <a:p>
+                      <a:pPr>
+                        <a:buNone/>
+                      </a:pPr>
+                      <a:r>
+                        <a:rPr lang="en-US" sz="1200" dirty="0"/>
+                        <a:t>ii</a:t>
+                      </a:r>
+                      <a:endParaRPr lang="en-US" sz="1200" dirty="0"/>
+                    </a:p>
+                  </a:txBody>
+                  <a:tcPr>
+                    <a:lnL w="9525">
+                      <a:solidFill>
+                        <a:srgbClr val="BFBFBF"/>
+                      </a:solidFill>
+                    </a:lnL>
+                    <a:lnR w="9525">
+                      <a:solidFill>
+                        <a:srgbClr val="BFBFBF"/>
+                      </a:solidFill>
+                    </a:lnR>
+                    <a:lnT w="9525">
+                      <a:solidFill>
+                        <a:srgbClr val="BFBFBF"/>
+                      </a:solidFill>
+                    </a:lnT>
+                    <a:lnB w="9525">
+                      <a:solidFill>
+                        <a:srgbClr val="BFBFBF"/>
+                      </a:solidFill>
+                    </a:lnB>
+                  </a:tcPr>
+                </a:tc>
+                <a:tc>
+                  <a:txBody>
+                    <a:bodyPr/>
+                    <a:lstStyle/>
+                    <a:p>
+                      <a:pPr>
+                        <a:buNone/>
+                      </a:pPr>
+                      <a:r>
+                        <a:rPr lang="en-US" sz="1200" dirty="0"/>
+                        <a:t>Two </a:t>
+                      </a:r>
+                      <a:endParaRPr lang="en-US" sz="1200" dirty="0"/>
+                    </a:p>
+                  </a:txBody>
+                  <a:tcPr>
+                    <a:lnL w="9525">
+                      <a:solidFill>
+                        <a:srgbClr val="BFBFBF"/>
+                      </a:solidFill>
+                    </a:lnL>
+                    <a:lnR w="9525">
+                      <a:solidFill>
+                        <a:srgbClr val="BFBFBF"/>
+                      </a:solidFill>
+                    </a:lnR>
+                    <a:lnT w="9525">
+                      <a:solidFill>
+                        <a:srgbClr val="BFBFBF"/>
+                      </a:solidFill>
+                    </a:lnT>
+                    <a:lnB w="9525">
+                      <a:solidFill>
+                        <a:srgbClr val="BFBFBF"/>
+                      </a:solidFill>
+                    </a:lnB>
+                  </a:tcPr>
+                </a:tc>
+              </a:tr>
+              <a:tr h="526143">
+                <a:tc>
+                  <a:txBody>
+                    <a:bodyPr/>
+                    <a:lstStyle/>
+                    <a:p>
+                      <a:pPr>
+                        <a:buNone/>
+                      </a:pPr>
+                      <a:r>
+                        <a:rPr lang="en-US" sz="1200" dirty="0"/>
+                        <a:t>An interruption in our regularly scheduled listing, for this essential and very relevant public service announcement. </a:t>
+                      </a:r>
+                      <a:endParaRPr lang="en-US" sz="1200" dirty="0"/>
+                    </a:p>
+                  </a:txBody>
+                  <a:tcPr>
+                    <a:lnL w="9525">
+                      <a:solidFill>
+                        <a:srgbClr val="BFBFBF"/>
+                      </a:solidFill>
+                    </a:lnL>
+                    <a:lnR w="9525">
+                      <a:solidFill>
+                        <a:srgbClr val="BFBFBF"/>
+                      </a:solidFill>
+                    </a:lnR>
+                    <a:lnT w="9525">
+                      <a:solidFill>
+                        <a:srgbClr val="BFBFBF"/>
+                      </a:solidFill>
+                    </a:lnT>
+                    <a:lnB w="9525">
+                      <a:solidFill>
+                        <a:srgbClr val="BFBFBF"/>
+                      </a:solidFill>
+                    </a:lnB>
+                  </a:tcPr>
+                </a:tc>
+                <a:tc>
+                  <a:txBody>
+                    <a:bodyPr/>
+                    <a:lstStyle/>
+                    <a:p/>
+                  </a:txBody>
+                  <a:tcPr>
+                    <a:lnL w="9525">
+                      <a:solidFill>
+                        <a:srgbClr val="BFBFBF"/>
+                      </a:solidFill>
+                    </a:lnL>
+                    <a:lnR w="9525">
+                      <a:solidFill>
+                        <a:srgbClr val="BFBFBF"/>
+                      </a:solidFill>
+                    </a:lnR>
+                    <a:lnT w="9525">
+                      <a:solidFill>
+                        <a:srgbClr val="BFBFBF"/>
+                      </a:solidFill>
+                    </a:lnT>
+                    <a:lnB w="9525">
+                      <a:solidFill>
+                        <a:srgbClr val="BFBFBF"/>
+                      </a:solidFill>
+                    </a:lnB>
+                  </a:tcPr>
+                </a:tc>
+              </a:tr>
+              <a:tr h="526143">
+                <a:tc>
+                  <a:txBody>
+                    <a:bodyPr/>
+                    <a:lstStyle/>
+                    <a:p>
+                      <a:pPr>
+                        <a:buNone/>
+                      </a:pPr>
+                      <a:r>
+                        <a:rPr lang="en-US" sz="1200" dirty="0"/>
+                        <a:t>iii</a:t>
+                      </a:r>
+                      <a:endParaRPr lang="en-US" sz="1200" dirty="0"/>
+                    </a:p>
+                  </a:txBody>
+                  <a:tcPr>
+                    <a:lnL w="9525">
+                      <a:solidFill>
+                        <a:srgbClr val="BFBFBF"/>
+                      </a:solidFill>
+                    </a:lnL>
+                    <a:lnR w="9525">
+                      <a:solidFill>
+                        <a:srgbClr val="BFBFBF"/>
+                      </a:solidFill>
+                    </a:lnR>
+                    <a:lnT w="9525">
+                      <a:solidFill>
+                        <a:srgbClr val="BFBFBF"/>
+                      </a:solidFill>
+                    </a:lnT>
+                    <a:lnB w="9525">
+                      <a:solidFill>
+                        <a:srgbClr val="BFBFBF"/>
+                      </a:solidFill>
+                    </a:lnB>
+                  </a:tcPr>
+                </a:tc>
+                <a:tc>
+                  <a:txBody>
+                    <a:bodyPr/>
+                    <a:lstStyle/>
+                    <a:p>
+                      <a:pPr>
+                        <a:buNone/>
+                      </a:pPr>
+                      <a:r>
+                        <a:rPr lang="en-US" sz="1200" dirty="0"/>
+                        <a:t>We now resume our normal programming </a:t>
+                      </a:r>
+                      <a:endParaRPr lang="en-US" sz="1200" dirty="0"/>
+                    </a:p>
+                  </a:txBody>
+                  <a:tcPr>
+                    <a:lnL w="9525">
+                      <a:solidFill>
+                        <a:srgbClr val="BFBFBF"/>
+                      </a:solidFill>
+                    </a:lnL>
+                    <a:lnR w="9525">
+                      <a:solidFill>
+                        <a:srgbClr val="BFBFBF"/>
+                      </a:solidFill>
+                    </a:lnR>
+                    <a:lnT w="9525">
+                      <a:solidFill>
+                        <a:srgbClr val="BFBFBF"/>
+                      </a:solidFill>
+                    </a:lnT>
+                    <a:lnB w="9525">
+                      <a:solidFill>
+                        <a:srgbClr val="BFBFBF"/>
+                      </a:solidFill>
+                    </a:lnB>
+                  </a:tcPr>
+                </a:tc>
+              </a:tr>
+              <a:tr h="526143">
+                <a:tc>
+                  <a:txBody>
+                    <a:bodyPr/>
+                    <a:lstStyle/>
+                    <a:p>
+                      <a:pPr>
+                        <a:buNone/>
+                      </a:pPr>
+                      <a:r>
+                        <a:rPr lang="en-US" sz="1200" dirty="0"/>
+                        <a:t>iv</a:t>
+                      </a:r>
+                      <a:endParaRPr lang="en-US" sz="1200" dirty="0"/>
+                    </a:p>
+                  </a:txBody>
+                  <a:tcPr>
+                    <a:lnL w="9525">
+                      <a:solidFill>
+                        <a:srgbClr val="BFBFBF"/>
+                      </a:solidFill>
+                    </a:lnL>
+                    <a:lnR w="9525">
+                      <a:solidFill>
+                        <a:srgbClr val="BFBFBF"/>
+                      </a:solidFill>
+                    </a:lnR>
+                    <a:lnT w="9525">
+                      <a:solidFill>
+                        <a:srgbClr val="BFBFBF"/>
+                      </a:solidFill>
+                    </a:lnT>
+                    <a:lnB w="9525">
+                      <a:solidFill>
+                        <a:srgbClr val="BFBFBF"/>
+                      </a:solidFill>
+                    </a:lnB>
+                  </a:tcPr>
+                </a:tc>
+                <a:tc>
+                  <a:txBody>
+                    <a:bodyPr/>
+                    <a:lstStyle/>
+                    <a:p>
+                      <a:pPr>
+                        <a:buNone/>
+                      </a:pPr>
+                      <a:r>
+                        <a:rPr lang="en-US" sz="1200" dirty="0"/>
+                        <a:t>Four </a:t>
+                      </a:r>
+                      <a:endParaRPr lang="en-US" sz="1200" dirty="0"/>
+                    </a:p>
+                  </a:txBody>
+                  <a:tcPr>
+                    <a:lnL w="9525">
+                      <a:solidFill>
+                        <a:srgbClr val="BFBFBF"/>
+                      </a:solidFill>
+                    </a:lnL>
+                    <a:lnR w="9525">
+                      <a:solidFill>
+                        <a:srgbClr val="BFBFBF"/>
+                      </a:solidFill>
+                    </a:lnR>
+                    <a:lnT w="9525">
+                      <a:solidFill>
+                        <a:srgbClr val="BFBFBF"/>
+                      </a:solidFill>
+                    </a:lnT>
+                    <a:lnB w="9525">
+                      <a:solidFill>
+                        <a:srgbClr val="BFBFBF"/>
+                      </a:solidFill>
+                    </a:lnB>
+                  </a:tcPr>
+                </a:tc>
+              </a:tr>
+            </a:tbl>
+          </a:graphicData>
+        </a:graphic>
+      </p:graphicFrame>
+    </p:spTree>
+  </p:cSld>
+  <p:clrMapOvr>
+    <a:masterClrMapping/>
+  </p:clrMapOvr>
+</p:sld>
+</file>
+
+<file path=ppt/slides/slide17.xml><?xml version="1.0" encoding="utf-8"?>
 <p:sld xmlns:a="http://schemas.openxmlformats.org/drawingml/2006/main" xmlns:r="http://schemas.openxmlformats.org/officeDocument/2006/relationships" xmlns:p="http://schemas.openxmlformats.org/presentationml/2006/main">
   <p:cSld>
     <p:spTree>

--- a/test/generator/baseline/gen.ods.to.pptx.pptx
+++ b/test/generator/baseline/gen.ods.to.pptx.pptx
@@ -167,10 +167,15 @@
                         <a:buNone/>
                       </a:pPr>
                       <a:r>
-                        <a:rPr lang="en-US" sz="1200" dirty="0"/>
+                        <a:rPr lang="en-US" sz="2600" dirty="0">
+                          <a:solidFill>
+                            <a:srgbClr val="17365D"/>
+                          </a:solidFill>
+                          <a:latin typeface="Ubuntu"/>
+                        </a:rPr>
                         <a:t>Demonstration of DOCX support in calibre </a:t>
                       </a:r>
-                      <a:endParaRPr lang="en-US" sz="1200" dirty="0"/>
+                      <a:endParaRPr lang="en-US" sz="2600" dirty="0"/>
                     </a:p>
                   </a:txBody>
                   <a:tcPr>
@@ -236,7 +241,12 @@
                         <a:buNone/>
                       </a:pPr>
                       <a:r>
-                        <a:rPr lang="en-US" sz="1200" dirty="0"/>
+                        <a:rPr lang="en-US" sz="1200" dirty="0">
+                          <a:solidFill>
+                            <a:srgbClr val="000000"/>
+                          </a:solidFill>
+                          <a:latin typeface="Ubuntu"/>
+                        </a:rPr>
                         <a:t>This document demonstrates the ability of the </a:t>
                       </a:r>
                       <a:r>
@@ -249,7 +259,12 @@
                         <a:t>calibre</a:t>
                       </a:r>
                       <a:r>
-                        <a:rPr lang="en-US" sz="1200" dirty="0"/>
+                        <a:rPr lang="en-US" sz="1200" dirty="0">
+                          <a:solidFill>
+                            <a:srgbClr val="000000"/>
+                          </a:solidFill>
+                          <a:latin typeface="Ubuntu"/>
+                        </a:rPr>
                         <a:t> DOCX Input plugin to convert the various typographic features in a Microsoft Word (2007 and newer) document. Convert this document to a modern ebook format, such as AZW3 for Kindles or EPUB for other ebook readers, to see it in action. </a:t>
                       </a:r>
                       <a:endParaRPr lang="en-US" sz="1200" dirty="0"/>
@@ -318,7 +333,12 @@
                         <a:buNone/>
                       </a:pPr>
                       <a:r>
-                        <a:rPr lang="en-US" sz="1200" dirty="0"/>
+                        <a:rPr lang="en-US" sz="1200" dirty="0">
+                          <a:solidFill>
+                            <a:srgbClr val="000000"/>
+                          </a:solidFill>
+                          <a:latin typeface="Ubuntu"/>
+                        </a:rPr>
                         <a:t>There is support for images, tables, lists, footnotes, endnotes, links, dropcaps and various types of text and paragraph level formatting. </a:t>
                       </a:r>
                       <a:endParaRPr lang="en-US" sz="1200" dirty="0"/>
@@ -387,7 +407,12 @@
                         <a:buNone/>
                       </a:pPr>
                       <a:r>
-                        <a:rPr lang="en-US" sz="1200" dirty="0"/>
+                        <a:rPr lang="en-US" sz="1200" dirty="0">
+                          <a:solidFill>
+                            <a:srgbClr val="000000"/>
+                          </a:solidFill>
+                          <a:latin typeface="Ubuntu"/>
+                        </a:rPr>
                         <a:t>To see the DOCX conversion in action, simply add this file to calibre using the </a:t>
                       </a:r>
                       <a:r>
@@ -400,7 +425,12 @@
                         <a:t>“Add Books” </a:t>
                       </a:r>
                       <a:r>
-                        <a:rPr lang="en-US" sz="1200" dirty="0"/>
+                        <a:rPr lang="en-US" sz="1200" dirty="0">
+                          <a:solidFill>
+                            <a:srgbClr val="000000"/>
+                          </a:solidFill>
+                          <a:latin typeface="Ubuntu"/>
+                        </a:rPr>
                         <a:t>button and then click “</a:t>
                       </a:r>
                       <a:r>
@@ -413,7 +443,12 @@
                         <a:t>Convert”. </a:t>
                       </a:r>
                       <a:r>
-                        <a:rPr lang="en-US" sz="1200" dirty="0"/>
+                        <a:rPr lang="en-US" sz="1200" dirty="0">
+                          <a:solidFill>
+                            <a:srgbClr val="000000"/>
+                          </a:solidFill>
+                          <a:latin typeface="Ubuntu"/>
+                        </a:rPr>
                         <a:t> Set the output format in the top right corner of the conversion dialog to EPUB or AZW3 and click </a:t>
                       </a:r>
                       <a:r>
@@ -426,7 +461,12 @@
                         <a:t>“OK”</a:t>
                       </a:r>
                       <a:r>
-                        <a:rPr lang="en-US" sz="1200" dirty="0"/>
+                        <a:rPr lang="en-US" sz="1200" dirty="0">
+                          <a:solidFill>
+                            <a:srgbClr val="000000"/>
+                          </a:solidFill>
+                          <a:latin typeface="Ubuntu"/>
+                        </a:rPr>
                         <a:t>. </a:t>
                       </a:r>
                       <a:endParaRPr lang="en-US" sz="1200" dirty="0"/>
@@ -524,7 +564,12 @@
                         <a:buNone/>
                       </a:pPr>
                       <a:r>
-                        <a:rPr lang="en-US" sz="1200" dirty="0"/>
+                        <a:rPr lang="en-US" sz="1200" dirty="0">
+                          <a:solidFill>
+                            <a:srgbClr val="000000"/>
+                          </a:solidFill>
+                          <a:latin typeface="Ubuntu"/>
+                        </a:rPr>
                         <a:t>One, with a very long line to demonstrate that the hanging indent for the list is working correctly </a:t>
                       </a:r>
                       <a:endParaRPr lang="en-US" sz="1200" dirty="0"/>
@@ -593,7 +638,12 @@
                         <a:buNone/>
                       </a:pPr>
                       <a:r>
-                        <a:rPr lang="en-US" sz="1200" dirty="0"/>
+                        <a:rPr lang="en-US" sz="1200" dirty="0">
+                          <a:solidFill>
+                            <a:srgbClr val="000000"/>
+                          </a:solidFill>
+                          <a:latin typeface="Ubuntu"/>
+                        </a:rPr>
                         <a:t>Two </a:t>
                       </a:r>
                       <a:endParaRPr lang="en-US" sz="1200" dirty="0"/>
@@ -662,7 +712,12 @@
                         <a:buNone/>
                       </a:pPr>
                       <a:r>
-                        <a:rPr lang="en-US" sz="1200" dirty="0"/>
+                        <a:rPr lang="en-US" sz="1200" dirty="0">
+                          <a:solidFill>
+                            <a:srgbClr val="000000"/>
+                          </a:solidFill>
+                          <a:latin typeface="Ubuntu"/>
+                        </a:rPr>
                         <a:t>One </a:t>
                       </a:r>
                       <a:endParaRPr lang="en-US" sz="1200" dirty="0"/>
@@ -731,7 +786,12 @@
                         <a:buNone/>
                       </a:pPr>
                       <a:r>
-                        <a:rPr lang="en-US" sz="1200" dirty="0"/>
+                        <a:rPr lang="en-US" sz="1200" dirty="0">
+                          <a:solidFill>
+                            <a:srgbClr val="000000"/>
+                          </a:solidFill>
+                          <a:latin typeface="Ubuntu"/>
+                        </a:rPr>
                         <a:t>Two </a:t>
                       </a:r>
                       <a:endParaRPr lang="en-US" sz="1200" dirty="0"/>
@@ -800,7 +860,12 @@
                         <a:buNone/>
                       </a:pPr>
                       <a:r>
-                        <a:rPr lang="en-US" sz="1200" dirty="0"/>
+                        <a:rPr lang="en-US" sz="1200" dirty="0">
+                          <a:solidFill>
+                            <a:srgbClr val="000000"/>
+                          </a:solidFill>
+                          <a:latin typeface="Ubuntu"/>
+                        </a:rPr>
                         <a:t>Three </a:t>
                       </a:r>
                       <a:endParaRPr lang="en-US" sz="1200" dirty="0"/>
@@ -869,7 +934,12 @@
                         <a:buNone/>
                       </a:pPr>
                       <a:r>
-                        <a:rPr lang="en-US" sz="1200" dirty="0"/>
+                        <a:rPr lang="en-US" sz="1200" dirty="0">
+                          <a:solidFill>
+                            <a:srgbClr val="000000"/>
+                          </a:solidFill>
+                          <a:latin typeface="Ubuntu"/>
+                        </a:rPr>
                         <a:t>Four with a very long line to demonstrate that the hanging indent for the list is working correctly. </a:t>
                       </a:r>
                       <a:endParaRPr lang="en-US" sz="1200" dirty="0"/>
@@ -938,7 +1008,12 @@
                         <a:buNone/>
                       </a:pPr>
                       <a:r>
-                        <a:rPr lang="en-US" sz="1200" dirty="0"/>
+                        <a:rPr lang="en-US" sz="1200" dirty="0">
+                          <a:solidFill>
+                            <a:srgbClr val="000000"/>
+                          </a:solidFill>
+                          <a:latin typeface="Ubuntu"/>
+                        </a:rPr>
                         <a:t>Five </a:t>
                       </a:r>
                       <a:endParaRPr lang="en-US" sz="1200" dirty="0"/>
@@ -1075,7 +1150,12 @@
                         <a:buNone/>
                       </a:pPr>
                       <a:r>
-                        <a:rPr lang="en-US" sz="1200" dirty="0"/>
+                        <a:rPr lang="en-US" sz="1200" dirty="0">
+                          <a:solidFill>
+                            <a:srgbClr val="000000"/>
+                          </a:solidFill>
+                          <a:latin typeface="Ubuntu"/>
+                        </a:rPr>
                         <a:t>We end with a fancy calendar, note how much of the original formatting is preserved. Note that this table will only display correctly on relatively wide screens. In general, very wide tables or tables whose cells have fixed width requirements don’t fare well in ebooks. </a:t>
                       </a:r>
                       <a:endParaRPr lang="en-US" sz="1200" dirty="0"/>
@@ -1492,7 +1572,12 @@
                         <a:buNone/>
                       </a:pPr>
                       <a:r>
-                        <a:rPr lang="en-US" sz="1200" dirty="0"/>
+                        <a:rPr lang="en-US" sz="1200" dirty="0">
+                          <a:solidFill>
+                            <a:srgbClr val="365F91"/>
+                          </a:solidFill>
+                          <a:latin typeface="Ubuntu"/>
+                        </a:rPr>
                         <a:t>23 </a:t>
                       </a:r>
                       <a:endParaRPr lang="en-US" sz="1200" dirty="0"/>
@@ -1564,7 +1649,12 @@
                         <a:buNone/>
                       </a:pPr>
                       <a:r>
-                        <a:rPr lang="en-US" sz="1200" dirty="0"/>
+                        <a:rPr lang="en-US" sz="1200" dirty="0">
+                          <a:solidFill>
+                            <a:srgbClr val="7F7F7F"/>
+                          </a:solidFill>
+                          <a:latin typeface="Ubuntu"/>
+                        </a:rPr>
                         <a:t>24 </a:t>
                       </a:r>
                       <a:endParaRPr lang="en-US" sz="1200" dirty="0"/>
@@ -1636,7 +1726,12 @@
                         <a:buNone/>
                       </a:pPr>
                       <a:r>
-                        <a:rPr lang="en-US" sz="1200" dirty="0"/>
+                        <a:rPr lang="en-US" sz="1200" dirty="0">
+                          <a:solidFill>
+                            <a:srgbClr val="7F7F7F"/>
+                          </a:solidFill>
+                          <a:latin typeface="Ubuntu"/>
+                        </a:rPr>
                         <a:t>25 </a:t>
                       </a:r>
                       <a:endParaRPr lang="en-US" sz="1200" dirty="0"/>
@@ -1708,7 +1803,12 @@
                         <a:buNone/>
                       </a:pPr>
                       <a:r>
-                        <a:rPr lang="en-US" sz="1200" dirty="0"/>
+                        <a:rPr lang="en-US" sz="1200" dirty="0">
+                          <a:solidFill>
+                            <a:srgbClr val="7F7F7F"/>
+                          </a:solidFill>
+                          <a:latin typeface="Ubuntu"/>
+                        </a:rPr>
                         <a:t>26 </a:t>
                       </a:r>
                       <a:endParaRPr lang="en-US" sz="1200" dirty="0"/>
@@ -1780,7 +1880,12 @@
                         <a:buNone/>
                       </a:pPr>
                       <a:r>
-                        <a:rPr lang="en-US" sz="1200" dirty="0"/>
+                        <a:rPr lang="en-US" sz="1200" dirty="0">
+                          <a:solidFill>
+                            <a:srgbClr val="7F7F7F"/>
+                          </a:solidFill>
+                          <a:latin typeface="Ubuntu"/>
+                        </a:rPr>
                         <a:t>27 </a:t>
                       </a:r>
                       <a:endParaRPr lang="en-US" sz="1200" dirty="0"/>
@@ -1852,7 +1957,12 @@
                         <a:buNone/>
                       </a:pPr>
                       <a:r>
-                        <a:rPr lang="en-US" sz="1200" dirty="0"/>
+                        <a:rPr lang="en-US" sz="1200" dirty="0">
+                          <a:solidFill>
+                            <a:srgbClr val="7F7F7F"/>
+                          </a:solidFill>
+                          <a:latin typeface="Ubuntu"/>
+                        </a:rPr>
                         <a:t>28 </a:t>
                       </a:r>
                       <a:endParaRPr lang="en-US" sz="1200" dirty="0"/>
@@ -1924,7 +2034,12 @@
                         <a:buNone/>
                       </a:pPr>
                       <a:r>
-                        <a:rPr lang="en-US" sz="1200" dirty="0"/>
+                        <a:rPr lang="en-US" sz="1200" dirty="0">
+                          <a:solidFill>
+                            <a:srgbClr val="7F7F7F"/>
+                          </a:solidFill>
+                          <a:latin typeface="Ubuntu"/>
+                        </a:rPr>
                         <a:t>29 </a:t>
                       </a:r>
                       <a:endParaRPr lang="en-US" sz="1200" dirty="0"/>
@@ -2466,7 +2581,12 @@
                         <a:buNone/>
                       </a:pPr>
                       <a:r>
-                        <a:rPr lang="en-US" sz="1200" dirty="0"/>
+                        <a:rPr lang="en-US" sz="1200" dirty="0">
+                          <a:solidFill>
+                            <a:srgbClr val="365F91"/>
+                          </a:solidFill>
+                          <a:latin typeface="Ubuntu"/>
+                        </a:rPr>
                         <a:t>30 </a:t>
                       </a:r>
                       <a:endParaRPr lang="en-US" sz="1200" dirty="0"/>
@@ -2538,7 +2658,12 @@
                         <a:buNone/>
                       </a:pPr>
                       <a:r>
-                        <a:rPr lang="en-US" sz="1200" dirty="0"/>
+                        <a:rPr lang="en-US" sz="1200" dirty="0">
+                          <a:solidFill>
+                            <a:srgbClr val="7F7F7F"/>
+                          </a:solidFill>
+                          <a:latin typeface="Ubuntu"/>
+                        </a:rPr>
                         <a:t>31 </a:t>
                       </a:r>
                       <a:endParaRPr lang="en-US" sz="1200" dirty="0"/>
@@ -3031,10 +3156,15 @@
                         <a:buNone/>
                       </a:pPr>
                       <a:r>
-                        <a:rPr lang="en-US" sz="1200" dirty="0"/>
+                        <a:rPr lang="en-US" sz="1400" b="1" dirty="0">
+                          <a:solidFill>
+                            <a:srgbClr val="365F91"/>
+                          </a:solidFill>
+                          <a:latin typeface="Ubuntu"/>
+                        </a:rPr>
                         <a:t>Structural Elements </a:t>
                       </a:r>
-                      <a:endParaRPr lang="en-US" sz="1200" dirty="0"/>
+                      <a:endParaRPr lang="en-US" sz="1400" dirty="0"/>
                     </a:p>
                   </a:txBody>
                   <a:tcPr>
@@ -3071,7 +3201,12 @@
                         <a:buNone/>
                       </a:pPr>
                       <a:r>
-                        <a:rPr lang="en-US" sz="1200" dirty="0"/>
+                        <a:rPr lang="en-US" sz="1200" dirty="0">
+                          <a:solidFill>
+                            <a:srgbClr val="000000"/>
+                          </a:solidFill>
+                          <a:latin typeface="Ubuntu"/>
+                        </a:rPr>
                         <a:t>Miscellaneous structural elements you can add to your document, like footnotes, endnotes, dropcaps and the like.  </a:t>
                       </a:r>
                       <a:endParaRPr lang="en-US" sz="1200" dirty="0"/>
@@ -3111,10 +3246,15 @@
                         <a:buNone/>
                       </a:pPr>
                       <a:r>
-                        <a:rPr lang="en-US" sz="1200" dirty="0"/>
+                        <a:rPr lang="en-US" sz="1300" b="1" dirty="0">
+                          <a:solidFill>
+                            <a:srgbClr val="4F81BD"/>
+                          </a:solidFill>
+                          <a:latin typeface="Ubuntu"/>
+                        </a:rPr>
                         <a:t>Footnotes &amp; Endnotes </a:t>
                       </a:r>
-                      <a:endParaRPr lang="en-US" sz="1200" dirty="0"/>
+                      <a:endParaRPr lang="en-US" sz="1300" dirty="0"/>
                     </a:p>
                   </a:txBody>
                   <a:tcPr>
@@ -3151,7 +3291,12 @@
                         <a:buNone/>
                       </a:pPr>
                       <a:r>
-                        <a:rPr lang="en-US" sz="1200" dirty="0"/>
+                        <a:rPr lang="en-US" sz="1200" dirty="0">
+                          <a:solidFill>
+                            <a:srgbClr val="000000"/>
+                          </a:solidFill>
+                          <a:latin typeface="Ubuntu"/>
+                        </a:rPr>
                         <a:t>Footnotes</a:t>
                       </a:r>
                       <a:r>
@@ -3164,7 +3309,12 @@
                         <a:t>1</a:t>
                       </a:r>
                       <a:r>
-                        <a:rPr lang="en-US" sz="1200" dirty="0"/>
+                        <a:rPr lang="en-US" sz="1200" dirty="0">
+                          <a:solidFill>
+                            <a:srgbClr val="000000"/>
+                          </a:solidFill>
+                          <a:latin typeface="Ubuntu"/>
+                        </a:rPr>
                         <a:t> and endnotes</a:t>
                       </a:r>
                       <a:r>
@@ -3177,10 +3327,15 @@
                         <a:t>i</a:t>
                       </a:r>
                       <a:r>
-                        <a:rPr lang="en-US" sz="1200" dirty="0"/>
+                        <a:rPr lang="en-US" sz="1200" dirty="0">
+                          <a:solidFill>
+                            <a:srgbClr val="000000"/>
+                          </a:solidFill>
+                          <a:latin typeface="Ubuntu"/>
+                        </a:rPr>
                         <a:t> are automatically recognized and both are converted to endnotes, with backlinks for maximum ease of use in ebook devices. </a:t>
                       </a:r>
-                      <a:endParaRPr lang="en-US" sz="900" dirty="0"/>
+                      <a:endParaRPr lang="en-US" sz="1200" dirty="0"/>
                     </a:p>
                   </a:txBody>
                   <a:tcPr>
@@ -3217,10 +3372,15 @@
                         <a:buNone/>
                       </a:pPr>
                       <a:r>
-                        <a:rPr lang="en-US" sz="1200" dirty="0"/>
+                        <a:rPr lang="en-US" sz="1300" b="1" dirty="0">
+                          <a:solidFill>
+                            <a:srgbClr val="4F81BD"/>
+                          </a:solidFill>
+                          <a:latin typeface="Ubuntu"/>
+                        </a:rPr>
                         <a:t>Dropcaps </a:t>
                       </a:r>
-                      <a:endParaRPr lang="en-US" sz="1200" dirty="0"/>
+                      <a:endParaRPr lang="en-US" sz="1300" dirty="0"/>
                     </a:p>
                   </a:txBody>
                   <a:tcPr>
@@ -3257,10 +3417,15 @@
                         <a:buNone/>
                       </a:pPr>
                       <a:r>
-                        <a:rPr lang="en-US" sz="1200" dirty="0"/>
+                        <a:rPr lang="en-US" sz="5800" dirty="0">
+                          <a:solidFill>
+                            <a:srgbClr val="000000"/>
+                          </a:solidFill>
+                          <a:latin typeface="Ubuntu"/>
+                        </a:rPr>
                         <a:t>D </a:t>
                       </a:r>
-                      <a:endParaRPr lang="en-US" sz="1200" dirty="0"/>
+                      <a:endParaRPr lang="en-US" sz="5800" dirty="0"/>
                     </a:p>
                   </a:txBody>
                   <a:tcPr>
@@ -3297,7 +3462,12 @@
                         <a:buNone/>
                       </a:pPr>
                       <a:r>
-                        <a:rPr lang="en-US" sz="1200" dirty="0"/>
+                        <a:rPr lang="en-US" sz="1200" dirty="0">
+                          <a:solidFill>
+                            <a:srgbClr val="000000"/>
+                          </a:solidFill>
+                          <a:latin typeface="Ubuntu"/>
+                        </a:rPr>
                         <a:t>rop caps are used to emphasize the leading paragraph at the start of a section. In Word it is possible to specify how many lines of text a drop-cap should use. </a:t>
                       </a:r>
                       <a:endParaRPr lang="en-US" sz="1200" dirty="0"/>
@@ -3337,10 +3507,15 @@
                         <a:buNone/>
                       </a:pPr>
                       <a:r>
-                        <a:rPr lang="en-US" sz="1200" dirty="0"/>
+                        <a:rPr lang="en-US" sz="1300" b="1" dirty="0">
+                          <a:solidFill>
+                            <a:srgbClr val="4F81BD"/>
+                          </a:solidFill>
+                          <a:latin typeface="Ubuntu"/>
+                        </a:rPr>
                         <a:t>Links </a:t>
                       </a:r>
-                      <a:endParaRPr lang="en-US" sz="1200" dirty="0"/>
+                      <a:endParaRPr lang="en-US" sz="1300" dirty="0"/>
                     </a:p>
                   </a:txBody>
                   <a:tcPr>
@@ -3377,7 +3552,12 @@
                         <a:buNone/>
                       </a:pPr>
                       <a:r>
-                        <a:rPr lang="en-US" sz="1200" dirty="0"/>
+                        <a:rPr lang="en-US" sz="1200" dirty="0">
+                          <a:solidFill>
+                            <a:srgbClr val="000000"/>
+                          </a:solidFill>
+                          <a:latin typeface="Ubuntu"/>
+                        </a:rPr>
                         <a:t>Two kinds of links are possible, those that refer to an external website and those that refer to locations inside the document itself. Both are supported by calibre. For example, here is a link pointing to the </a:t>
                       </a:r>
                       <a:r>
@@ -3390,7 +3570,12 @@
                         <a:t>calibre download page</a:t>
                       </a:r>
                       <a:r>
-                        <a:rPr lang="en-US" sz="1200" dirty="0"/>
+                        <a:rPr lang="en-US" sz="1200" dirty="0">
+                          <a:solidFill>
+                            <a:srgbClr val="000000"/>
+                          </a:solidFill>
+                          <a:latin typeface="Ubuntu"/>
+                        </a:rPr>
                         <a:t>. Then we have a link that points back to the section on </a:t>
                       </a:r>
                       <a:r>
@@ -3403,7 +3588,12 @@
                         <a:t>paragraph level formatting</a:t>
                       </a:r>
                       <a:r>
-                        <a:rPr lang="en-US" sz="1200" dirty="0"/>
+                        <a:rPr lang="en-US" sz="1200" dirty="0">
+                          <a:solidFill>
+                            <a:srgbClr val="000000"/>
+                          </a:solidFill>
+                          <a:latin typeface="Ubuntu"/>
+                        </a:rPr>
                         <a:t> in this document. </a:t>
                       </a:r>
                       <a:endParaRPr lang="en-US" sz="1200" dirty="0"/>
@@ -3527,10 +3717,15 @@
                         <a:buNone/>
                       </a:pPr>
                       <a:r>
-                        <a:rPr lang="en-US" sz="1200" dirty="0"/>
+                        <a:rPr lang="en-US" sz="1400" b="1" dirty="0">
+                          <a:solidFill>
+                            <a:srgbClr val="365F91"/>
+                          </a:solidFill>
+                          <a:latin typeface="Ubuntu"/>
+                        </a:rPr>
                         <a:t>Images </a:t>
                       </a:r>
-                      <a:endParaRPr lang="en-US" sz="1200" dirty="0"/>
+                      <a:endParaRPr lang="en-US" sz="1400" dirty="0"/>
                     </a:p>
                   </a:txBody>
                   <a:tcPr>
@@ -3567,7 +3762,12 @@
                         <a:buNone/>
                       </a:pPr>
                       <a:r>
-                        <a:rPr lang="en-US" sz="1200" dirty="0"/>
+                        <a:rPr lang="en-US" sz="1200" dirty="0">
+                          <a:solidFill>
+                            <a:srgbClr val="000000"/>
+                          </a:solidFill>
+                          <a:latin typeface="Ubuntu"/>
+                        </a:rPr>
                         <a:t>Centered images like this are useful for large pictures that should be a focus of attention.  </a:t>
                       </a:r>
                       <a:endParaRPr lang="en-US" sz="1200" dirty="0"/>
@@ -3643,7 +3843,12 @@
                         <a:buNone/>
                       </a:pPr>
                       <a:r>
-                        <a:rPr lang="en-US" sz="1200" dirty="0"/>
+                        <a:rPr lang="en-US" sz="1200" dirty="0">
+                          <a:solidFill>
+                            <a:srgbClr val="000000"/>
+                          </a:solidFill>
+                          <a:latin typeface="Ubuntu"/>
+                        </a:rPr>
                         <a:t>There is no analogous technology in ebooks, so the conversion will usually end up placing the image either centered or floating close to the point in the text where it was </a:t>
                       </a:r>
                       <a:r>
@@ -3656,7 +3861,12 @@
                         <a:t>inserted</a:t>
                       </a:r>
                       <a:r>
-                        <a:rPr lang="en-US" sz="1200" dirty="0"/>
+                        <a:rPr lang="en-US" sz="1200" dirty="0">
+                          <a:solidFill>
+                            <a:srgbClr val="000000"/>
+                          </a:solidFill>
+                          <a:latin typeface="Ubuntu"/>
+                        </a:rPr>
                         <a:t>, not necessarily where it appears on the page in Word. </a:t>
                       </a:r>
                       <a:endParaRPr lang="en-US" sz="1200" dirty="0"/>
@@ -3866,10 +4076,15 @@
                         <a:buNone/>
                       </a:pPr>
                       <a:r>
-                        <a:rPr lang="en-US" sz="1200" dirty="0"/>
+                        <a:rPr lang="en-US" sz="1400" b="1" dirty="0">
+                          <a:solidFill>
+                            <a:srgbClr val="365F91"/>
+                          </a:solidFill>
+                          <a:latin typeface="Ubuntu"/>
+                        </a:rPr>
                         <a:t>Lists </a:t>
                       </a:r>
-                      <a:endParaRPr lang="en-US" sz="1200" dirty="0"/>
+                      <a:endParaRPr lang="en-US" sz="1400" dirty="0"/>
                     </a:p>
                   </a:txBody>
                   <a:tcPr>
@@ -3935,7 +4150,12 @@
                         <a:buNone/>
                       </a:pPr>
                       <a:r>
-                        <a:rPr lang="en-US" sz="1200" dirty="0"/>
+                        <a:rPr lang="en-US" sz="1200" dirty="0">
+                          <a:solidFill>
+                            <a:srgbClr val="000000"/>
+                          </a:solidFill>
+                          <a:latin typeface="Ubuntu"/>
+                        </a:rPr>
                         <a:t>All types of lists are supported by the conversion, with the exception of lists that use fancy bullets, these get converted to regular bullets. </a:t>
                       </a:r>
                       <a:endParaRPr lang="en-US" sz="1200" dirty="0"/>
@@ -4004,10 +4224,15 @@
                         <a:buNone/>
                       </a:pPr>
                       <a:r>
-                        <a:rPr lang="en-US" sz="1200" dirty="0"/>
+                        <a:rPr lang="en-US" sz="1300" b="1" dirty="0">
+                          <a:solidFill>
+                            <a:srgbClr val="4F81BD"/>
+                          </a:solidFill>
+                          <a:latin typeface="Ubuntu"/>
+                        </a:rPr>
                         <a:t>Bulleted List </a:t>
                       </a:r>
-                      <a:endParaRPr lang="en-US" sz="1200" dirty="0"/>
+                      <a:endParaRPr lang="en-US" sz="1300" dirty="0"/>
                     </a:p>
                   </a:txBody>
                   <a:tcPr>
@@ -4073,7 +4298,12 @@
                         <a:buNone/>
                       </a:pPr>
                       <a:r>
-                        <a:rPr lang="en-US" sz="1200" dirty="0"/>
+                        <a:rPr lang="en-US" sz="1200" dirty="0">
+                          <a:solidFill>
+                            <a:srgbClr val="000000"/>
+                          </a:solidFill>
+                          <a:latin typeface="Ubuntu"/>
+                        </a:rPr>
                         <a:t>One </a:t>
                       </a:r>
                       <a:endParaRPr lang="en-US" sz="1200" dirty="0"/>
@@ -4142,7 +4372,12 @@
                         <a:buNone/>
                       </a:pPr>
                       <a:r>
-                        <a:rPr lang="en-US" sz="1200" dirty="0"/>
+                        <a:rPr lang="en-US" sz="1200" dirty="0">
+                          <a:solidFill>
+                            <a:srgbClr val="000000"/>
+                          </a:solidFill>
+                          <a:latin typeface="Ubuntu"/>
+                        </a:rPr>
                         <a:t>Two </a:t>
                       </a:r>
                       <a:endParaRPr lang="en-US" sz="1200" dirty="0"/>
@@ -4211,10 +4446,15 @@
                         <a:buNone/>
                       </a:pPr>
                       <a:r>
-                        <a:rPr lang="en-US" sz="1200" dirty="0"/>
+                        <a:rPr lang="en-US" sz="1300" b="1" dirty="0">
+                          <a:solidFill>
+                            <a:srgbClr val="4F81BD"/>
+                          </a:solidFill>
+                          <a:latin typeface="Ubuntu"/>
+                        </a:rPr>
                         <a:t>Numbered List </a:t>
                       </a:r>
-                      <a:endParaRPr lang="en-US" sz="1200" dirty="0"/>
+                      <a:endParaRPr lang="en-US" sz="1300" dirty="0"/>
                     </a:p>
                   </a:txBody>
                   <a:tcPr>
@@ -4280,7 +4520,12 @@
                         <a:buNone/>
                       </a:pPr>
                       <a:r>
-                        <a:rPr lang="en-US" sz="1200" dirty="0"/>
+                        <a:rPr lang="en-US" sz="1200" dirty="0">
+                          <a:solidFill>
+                            <a:srgbClr val="000000"/>
+                          </a:solidFill>
+                          <a:latin typeface="Ubuntu"/>
+                        </a:rPr>
                         <a:t>1</a:t>
                       </a:r>
                       <a:endParaRPr lang="en-US" sz="1200" dirty="0"/>
@@ -4318,7 +4563,12 @@
                         <a:buNone/>
                       </a:pPr>
                       <a:r>
-                        <a:rPr lang="en-US" sz="1200" dirty="0"/>
+                        <a:rPr lang="en-US" sz="1200" dirty="0">
+                          <a:solidFill>
+                            <a:srgbClr val="000000"/>
+                          </a:solidFill>
+                          <a:latin typeface="Ubuntu"/>
+                        </a:rPr>
                         <a:t>One, with a very long line to demonstrate that the hanging indent for the list is working correctly </a:t>
                       </a:r>
                       <a:endParaRPr lang="en-US" sz="1200" dirty="0"/>
@@ -4358,7 +4608,12 @@
                         <a:buNone/>
                       </a:pPr>
                       <a:r>
-                        <a:rPr lang="en-US" sz="1200" dirty="0"/>
+                        <a:rPr lang="en-US" sz="1200" dirty="0">
+                          <a:solidFill>
+                            <a:srgbClr val="000000"/>
+                          </a:solidFill>
+                          <a:latin typeface="Ubuntu"/>
+                        </a:rPr>
                         <a:t>2</a:t>
                       </a:r>
                       <a:endParaRPr lang="en-US" sz="1200" dirty="0"/>
@@ -4396,7 +4651,12 @@
                         <a:buNone/>
                       </a:pPr>
                       <a:r>
-                        <a:rPr lang="en-US" sz="1200" dirty="0"/>
+                        <a:rPr lang="en-US" sz="1200" dirty="0">
+                          <a:solidFill>
+                            <a:srgbClr val="000000"/>
+                          </a:solidFill>
+                          <a:latin typeface="Ubuntu"/>
+                        </a:rPr>
                         <a:t>Two </a:t>
                       </a:r>
                       <a:endParaRPr lang="en-US" sz="1200" dirty="0"/>
@@ -4436,10 +4696,15 @@
                         <a:buNone/>
                       </a:pPr>
                       <a:r>
-                        <a:rPr lang="en-US" sz="1200" dirty="0"/>
+                        <a:rPr lang="en-US" sz="1300" b="1" dirty="0">
+                          <a:solidFill>
+                            <a:srgbClr val="4F81BD"/>
+                          </a:solidFill>
+                          <a:latin typeface="Ubuntu"/>
+                        </a:rPr>
                         <a:t>Multi-level Lists </a:t>
                       </a:r>
-                      <a:endParaRPr lang="en-US" sz="1200" dirty="0"/>
+                      <a:endParaRPr lang="en-US" sz="1300" dirty="0"/>
                     </a:p>
                   </a:txBody>
                   <a:tcPr>
@@ -4505,7 +4770,12 @@
                         <a:buNone/>
                       </a:pPr>
                       <a:r>
-                        <a:rPr lang="en-US" sz="1200" dirty="0"/>
+                        <a:rPr lang="en-US" sz="1200" dirty="0">
+                          <a:solidFill>
+                            <a:srgbClr val="000000"/>
+                          </a:solidFill>
+                          <a:latin typeface="Ubuntu"/>
+                        </a:rPr>
                         <a:t>1</a:t>
                       </a:r>
                       <a:endParaRPr lang="en-US" sz="1200" dirty="0"/>
@@ -4543,7 +4813,12 @@
                         <a:buNone/>
                       </a:pPr>
                       <a:r>
-                        <a:rPr lang="en-US" sz="1200" dirty="0"/>
+                        <a:rPr lang="en-US" sz="1200" dirty="0">
+                          <a:solidFill>
+                            <a:srgbClr val="000000"/>
+                          </a:solidFill>
+                          <a:latin typeface="Ubuntu"/>
+                        </a:rPr>
                         <a:t>One </a:t>
                       </a:r>
                       <a:endParaRPr lang="en-US" sz="1200" dirty="0"/>
@@ -4583,7 +4858,12 @@
                         <a:buNone/>
                       </a:pPr>
                       <a:r>
-                        <a:rPr lang="en-US" sz="1200" dirty="0"/>
+                        <a:rPr lang="en-US" sz="1200" dirty="0">
+                          <a:solidFill>
+                            <a:srgbClr val="000000"/>
+                          </a:solidFill>
+                          <a:latin typeface="Ubuntu"/>
+                        </a:rPr>
                         <a:t>1</a:t>
                       </a:r>
                       <a:endParaRPr lang="en-US" sz="1200" dirty="0"/>
@@ -4621,7 +4901,12 @@
                         <a:buNone/>
                       </a:pPr>
                       <a:r>
-                        <a:rPr lang="en-US" sz="1200" dirty="0"/>
+                        <a:rPr lang="en-US" sz="1200" dirty="0">
+                          <a:solidFill>
+                            <a:srgbClr val="000000"/>
+                          </a:solidFill>
+                          <a:latin typeface="Ubuntu"/>
+                        </a:rPr>
                         <a:t>Two </a:t>
                       </a:r>
                       <a:endParaRPr lang="en-US" sz="1200" dirty="0"/>
@@ -4746,10 +5031,15 @@
                         <a:buNone/>
                       </a:pPr>
                       <a:r>
-                        <a:rPr lang="en-US" sz="1200" dirty="0"/>
+                        <a:rPr lang="en-US" sz="1400" b="1" dirty="0">
+                          <a:solidFill>
+                            <a:srgbClr val="365F91"/>
+                          </a:solidFill>
+                          <a:latin typeface="Ubuntu"/>
+                        </a:rPr>
                         <a:t>Lists </a:t>
                       </a:r>
-                      <a:endParaRPr lang="en-US" sz="1200" dirty="0"/>
+                      <a:endParaRPr lang="en-US" sz="1400" dirty="0"/>
                     </a:p>
                   </a:txBody>
                   <a:tcPr>
@@ -4815,7 +5105,12 @@
                         <a:buNone/>
                       </a:pPr>
                       <a:r>
-                        <a:rPr lang="en-US" sz="1200" dirty="0"/>
+                        <a:rPr lang="en-US" sz="1200" dirty="0">
+                          <a:solidFill>
+                            <a:srgbClr val="000000"/>
+                          </a:solidFill>
+                          <a:latin typeface="Ubuntu"/>
+                        </a:rPr>
                         <a:t>1</a:t>
                       </a:r>
                       <a:endParaRPr lang="en-US" sz="1200" dirty="0"/>
@@ -4853,7 +5148,12 @@
                         <a:buNone/>
                       </a:pPr>
                       <a:r>
-                        <a:rPr lang="en-US" sz="1200" dirty="0"/>
+                        <a:rPr lang="en-US" sz="1200" dirty="0">
+                          <a:solidFill>
+                            <a:srgbClr val="000000"/>
+                          </a:solidFill>
+                          <a:latin typeface="Ubuntu"/>
+                        </a:rPr>
                         <a:t>Three </a:t>
                       </a:r>
                       <a:endParaRPr lang="en-US" sz="1200" dirty="0"/>
@@ -4893,7 +5193,12 @@
                         <a:buNone/>
                       </a:pPr>
                       <a:r>
-                        <a:rPr lang="en-US" sz="1200" dirty="0"/>
+                        <a:rPr lang="en-US" sz="1200" dirty="0">
+                          <a:solidFill>
+                            <a:srgbClr val="000000"/>
+                          </a:solidFill>
+                          <a:latin typeface="Ubuntu"/>
+                        </a:rPr>
                         <a:t>2</a:t>
                       </a:r>
                       <a:endParaRPr lang="en-US" sz="1200" dirty="0"/>
@@ -4931,7 +5236,12 @@
                         <a:buNone/>
                       </a:pPr>
                       <a:r>
-                        <a:rPr lang="en-US" sz="1200" dirty="0"/>
+                        <a:rPr lang="en-US" sz="1200" dirty="0">
+                          <a:solidFill>
+                            <a:srgbClr val="000000"/>
+                          </a:solidFill>
+                          <a:latin typeface="Ubuntu"/>
+                        </a:rPr>
                         <a:t>Four with a very long line to demonstrate that the hanging indent for the list is working correctly. </a:t>
                       </a:r>
                       <a:endParaRPr lang="en-US" sz="1200" dirty="0"/>
@@ -4971,7 +5281,12 @@
                         <a:buNone/>
                       </a:pPr>
                       <a:r>
-                        <a:rPr lang="en-US" sz="1200" dirty="0"/>
+                        <a:rPr lang="en-US" sz="1200" dirty="0">
+                          <a:solidFill>
+                            <a:srgbClr val="000000"/>
+                          </a:solidFill>
+                          <a:latin typeface="Ubuntu"/>
+                        </a:rPr>
                         <a:t>3</a:t>
                       </a:r>
                       <a:endParaRPr lang="en-US" sz="1200" dirty="0"/>
@@ -5009,7 +5324,12 @@
                         <a:buNone/>
                       </a:pPr>
                       <a:r>
-                        <a:rPr lang="en-US" sz="1200" dirty="0"/>
+                        <a:rPr lang="en-US" sz="1200" dirty="0">
+                          <a:solidFill>
+                            <a:srgbClr val="000000"/>
+                          </a:solidFill>
+                          <a:latin typeface="Ubuntu"/>
+                        </a:rPr>
                         <a:t>Five </a:t>
                       </a:r>
                       <a:endParaRPr lang="en-US" sz="1200" dirty="0"/>
@@ -5049,7 +5369,12 @@
                         <a:buNone/>
                       </a:pPr>
                       <a:r>
-                        <a:rPr lang="en-US" sz="1200" dirty="0"/>
+                        <a:rPr lang="en-US" sz="1200" dirty="0">
+                          <a:solidFill>
+                            <a:srgbClr val="000000"/>
+                          </a:solidFill>
+                          <a:latin typeface="Ubuntu"/>
+                        </a:rPr>
                         <a:t>2</a:t>
                       </a:r>
                       <a:endParaRPr lang="en-US" sz="1200" dirty="0"/>
@@ -5087,7 +5412,12 @@
                         <a:buNone/>
                       </a:pPr>
                       <a:r>
-                        <a:rPr lang="en-US" sz="1200" dirty="0"/>
+                        <a:rPr lang="en-US" sz="1200" dirty="0">
+                          <a:solidFill>
+                            <a:srgbClr val="000000"/>
+                          </a:solidFill>
+                          <a:latin typeface="Ubuntu"/>
+                        </a:rPr>
                         <a:t>Six </a:t>
                       </a:r>
                       <a:endParaRPr lang="en-US" sz="1200" dirty="0"/>
@@ -5127,7 +5457,12 @@
                         <a:buNone/>
                       </a:pPr>
                       <a:r>
-                        <a:rPr lang="en-US" sz="1200" dirty="0"/>
+                        <a:rPr lang="en-US" sz="1200" dirty="0">
+                          <a:solidFill>
+                            <a:srgbClr val="000000"/>
+                          </a:solidFill>
+                          <a:latin typeface="Ubuntu"/>
+                        </a:rPr>
                         <a:t>A Multi-level list with bullets: </a:t>
                       </a:r>
                       <a:endParaRPr lang="en-US" sz="1200" dirty="0"/>
@@ -5196,7 +5531,12 @@
                         <a:buNone/>
                       </a:pPr>
                       <a:r>
-                        <a:rPr lang="en-US" sz="1200" dirty="0"/>
+                        <a:rPr lang="en-US" sz="1200" dirty="0">
+                          <a:solidFill>
+                            <a:srgbClr val="000000"/>
+                          </a:solidFill>
+                          <a:latin typeface="Ubuntu"/>
+                        </a:rPr>
                         <a:t>One </a:t>
                       </a:r>
                       <a:endParaRPr lang="en-US" sz="1200" dirty="0"/>
@@ -5265,7 +5605,12 @@
                         <a:buNone/>
                       </a:pPr>
                       <a:r>
-                        <a:rPr lang="en-US" sz="1200" dirty="0"/>
+                        <a:rPr lang="en-US" sz="1200" dirty="0">
+                          <a:solidFill>
+                            <a:srgbClr val="000000"/>
+                          </a:solidFill>
+                          <a:latin typeface="Ubuntu"/>
+                        </a:rPr>
                         <a:t>Two </a:t>
                       </a:r>
                       <a:endParaRPr lang="en-US" sz="1200" dirty="0"/>
@@ -5334,7 +5679,12 @@
                         <a:buNone/>
                       </a:pPr>
                       <a:r>
-                        <a:rPr lang="en-US" sz="1200" dirty="0"/>
+                        <a:rPr lang="en-US" sz="1200" dirty="0">
+                          <a:solidFill>
+                            <a:srgbClr val="000000"/>
+                          </a:solidFill>
+                          <a:latin typeface="Ubuntu"/>
+                        </a:rPr>
                         <a:t>This bullet uses an image as the bullet item </a:t>
                       </a:r>
                       <a:endParaRPr lang="en-US" sz="1200" dirty="0"/>
@@ -5403,7 +5753,12 @@
                         <a:buNone/>
                       </a:pPr>
                       <a:r>
-                        <a:rPr lang="en-US" sz="1200" dirty="0"/>
+                        <a:rPr lang="en-US" sz="1200" dirty="0">
+                          <a:solidFill>
+                            <a:srgbClr val="000000"/>
+                          </a:solidFill>
+                          <a:latin typeface="Ubuntu"/>
+                        </a:rPr>
                         <a:t>Four </a:t>
                       </a:r>
                       <a:endParaRPr lang="en-US" sz="1200" dirty="0"/>
@@ -5472,7 +5827,12 @@
                         <a:buNone/>
                       </a:pPr>
                       <a:r>
-                        <a:rPr lang="en-US" sz="1200" dirty="0"/>
+                        <a:rPr lang="en-US" sz="1200" dirty="0">
+                          <a:solidFill>
+                            <a:srgbClr val="000000"/>
+                          </a:solidFill>
+                          <a:latin typeface="Ubuntu"/>
+                        </a:rPr>
                         <a:t>Five </a:t>
                       </a:r>
                       <a:endParaRPr lang="en-US" sz="1200" dirty="0"/>
@@ -5626,10 +5986,15 @@
                         <a:buNone/>
                       </a:pPr>
                       <a:r>
-                        <a:rPr lang="en-US" sz="1200" dirty="0"/>
+                        <a:rPr lang="en-US" sz="1400" b="1" dirty="0">
+                          <a:solidFill>
+                            <a:srgbClr val="365F91"/>
+                          </a:solidFill>
+                          <a:latin typeface="Ubuntu"/>
+                        </a:rPr>
                         <a:t>Lists </a:t>
                       </a:r>
-                      <a:endParaRPr lang="en-US" sz="1200" dirty="0"/>
+                      <a:endParaRPr lang="en-US" sz="1400" dirty="0"/>
                     </a:p>
                   </a:txBody>
                   <a:tcPr>
@@ -5695,10 +6060,15 @@
                         <a:buNone/>
                       </a:pPr>
                       <a:r>
-                        <a:rPr lang="en-US" sz="1200" dirty="0"/>
+                        <a:rPr lang="en-US" sz="1300" b="1" dirty="0">
+                          <a:solidFill>
+                            <a:srgbClr val="4F81BD"/>
+                          </a:solidFill>
+                          <a:latin typeface="Ubuntu"/>
+                        </a:rPr>
                         <a:t>Continued Lists </a:t>
                       </a:r>
-                      <a:endParaRPr lang="en-US" sz="1200" dirty="0"/>
+                      <a:endParaRPr lang="en-US" sz="1300" dirty="0"/>
                     </a:p>
                   </a:txBody>
                   <a:tcPr>
@@ -5764,7 +6134,12 @@
                         <a:buNone/>
                       </a:pPr>
                       <a:r>
-                        <a:rPr lang="en-US" sz="1200" dirty="0"/>
+                        <a:rPr lang="en-US" sz="1200" dirty="0">
+                          <a:solidFill>
+                            <a:srgbClr val="000000"/>
+                          </a:solidFill>
+                          <a:latin typeface="Ubuntu"/>
+                        </a:rPr>
                         <a:t>i</a:t>
                       </a:r>
                       <a:endParaRPr lang="en-US" sz="1200" dirty="0"/>
@@ -5802,7 +6177,12 @@
                         <a:buNone/>
                       </a:pPr>
                       <a:r>
-                        <a:rPr lang="en-US" sz="1200" dirty="0"/>
+                        <a:rPr lang="en-US" sz="1200" dirty="0">
+                          <a:solidFill>
+                            <a:srgbClr val="000000"/>
+                          </a:solidFill>
+                          <a:latin typeface="Ubuntu"/>
+                        </a:rPr>
                         <a:t>One </a:t>
                       </a:r>
                       <a:endParaRPr lang="en-US" sz="1200" dirty="0"/>
@@ -5842,7 +6222,12 @@
                         <a:buNone/>
                       </a:pPr>
                       <a:r>
-                        <a:rPr lang="en-US" sz="1200" dirty="0"/>
+                        <a:rPr lang="en-US" sz="1200" dirty="0">
+                          <a:solidFill>
+                            <a:srgbClr val="000000"/>
+                          </a:solidFill>
+                          <a:latin typeface="Ubuntu"/>
+                        </a:rPr>
                         <a:t>ii</a:t>
                       </a:r>
                       <a:endParaRPr lang="en-US" sz="1200" dirty="0"/>
@@ -5880,7 +6265,12 @@
                         <a:buNone/>
                       </a:pPr>
                       <a:r>
-                        <a:rPr lang="en-US" sz="1200" dirty="0"/>
+                        <a:rPr lang="en-US" sz="1200" dirty="0">
+                          <a:solidFill>
+                            <a:srgbClr val="000000"/>
+                          </a:solidFill>
+                          <a:latin typeface="Ubuntu"/>
+                        </a:rPr>
                         <a:t>Two </a:t>
                       </a:r>
                       <a:endParaRPr lang="en-US" sz="1200" dirty="0"/>
@@ -5920,7 +6310,12 @@
                         <a:buNone/>
                       </a:pPr>
                       <a:r>
-                        <a:rPr lang="en-US" sz="1200" dirty="0"/>
+                        <a:rPr lang="en-US" sz="1200" dirty="0">
+                          <a:solidFill>
+                            <a:srgbClr val="000000"/>
+                          </a:solidFill>
+                          <a:latin typeface="Ubuntu"/>
+                        </a:rPr>
                         <a:t>An interruption in our regularly scheduled listing, for this essential and very relevant public service announcement. </a:t>
                       </a:r>
                       <a:endParaRPr lang="en-US" sz="1200" dirty="0"/>
@@ -5989,7 +6384,12 @@
                         <a:buNone/>
                       </a:pPr>
                       <a:r>
-                        <a:rPr lang="en-US" sz="1200" dirty="0"/>
+                        <a:rPr lang="en-US" sz="1200" dirty="0">
+                          <a:solidFill>
+                            <a:srgbClr val="000000"/>
+                          </a:solidFill>
+                          <a:latin typeface="Ubuntu"/>
+                        </a:rPr>
                         <a:t>iii</a:t>
                       </a:r>
                       <a:endParaRPr lang="en-US" sz="1200" dirty="0"/>
@@ -6027,7 +6427,12 @@
                         <a:buNone/>
                       </a:pPr>
                       <a:r>
-                        <a:rPr lang="en-US" sz="1200" dirty="0"/>
+                        <a:rPr lang="en-US" sz="1200" dirty="0">
+                          <a:solidFill>
+                            <a:srgbClr val="000000"/>
+                          </a:solidFill>
+                          <a:latin typeface="Ubuntu"/>
+                        </a:rPr>
                         <a:t>We now resume our normal programming </a:t>
                       </a:r>
                       <a:endParaRPr lang="en-US" sz="1200" dirty="0"/>
@@ -6067,7 +6472,12 @@
                         <a:buNone/>
                       </a:pPr>
                       <a:r>
-                        <a:rPr lang="en-US" sz="1200" dirty="0"/>
+                        <a:rPr lang="en-US" sz="1200" dirty="0">
+                          <a:solidFill>
+                            <a:srgbClr val="000000"/>
+                          </a:solidFill>
+                          <a:latin typeface="Ubuntu"/>
+                        </a:rPr>
                         <a:t>iv</a:t>
                       </a:r>
                       <a:endParaRPr lang="en-US" sz="1200" dirty="0"/>
@@ -6105,7 +6515,12 @@
                         <a:buNone/>
                       </a:pPr>
                       <a:r>
-                        <a:rPr lang="en-US" sz="1200" dirty="0"/>
+                        <a:rPr lang="en-US" sz="1200" dirty="0">
+                          <a:solidFill>
+                            <a:srgbClr val="000000"/>
+                          </a:solidFill>
+                          <a:latin typeface="Ubuntu"/>
+                        </a:rPr>
                         <a:t>Four </a:t>
                       </a:r>
                       <a:endParaRPr lang="en-US" sz="1200" dirty="0"/>
@@ -6234,10 +6649,15 @@
                         <a:buNone/>
                       </a:pPr>
                       <a:r>
-                        <a:rPr lang="en-US" sz="1200" dirty="0"/>
+                        <a:rPr lang="en-US" sz="1400" b="1" dirty="0">
+                          <a:solidFill>
+                            <a:srgbClr val="365F91"/>
+                          </a:solidFill>
+                          <a:latin typeface="Ubuntu"/>
+                        </a:rPr>
                         <a:t>Charts</a:t>
                       </a:r>
-                      <a:endParaRPr lang="en-US" sz="1200" dirty="0"/>
+                      <a:endParaRPr lang="en-US" sz="1400" dirty="0"/>
                     </a:p>
                   </a:txBody>
                   <a:tcPr>
@@ -6511,7 +6931,11 @@
                         <a:buNone/>
                       </a:pPr>
                       <a:r>
-                        <a:rPr lang="en-US" sz="1200" dirty="0"/>
+                        <a:rPr lang="en-US" sz="1200" dirty="0">
+                          <a:solidFill>
+                            <a:srgbClr val="000000"/>
+                          </a:solidFill>
+                        </a:rPr>
                         <a:t>Series 1</a:t>
                       </a:r>
                       <a:endParaRPr lang="en-US" sz="1200" dirty="0"/>
@@ -6549,7 +6973,11 @@
                         <a:buNone/>
                       </a:pPr>
                       <a:r>
-                        <a:rPr lang="en-US" sz="1200" dirty="0"/>
+                        <a:rPr lang="en-US" sz="1200" dirty="0">
+                          <a:solidFill>
+                            <a:srgbClr val="000000"/>
+                          </a:solidFill>
+                        </a:rPr>
                         <a:t>Series 2</a:t>
                       </a:r>
                       <a:endParaRPr lang="en-US" sz="1200" dirty="0"/>
@@ -6587,7 +7015,11 @@
                         <a:buNone/>
                       </a:pPr>
                       <a:r>
-                        <a:rPr lang="en-US" sz="1200" dirty="0"/>
+                        <a:rPr lang="en-US" sz="1200" dirty="0">
+                          <a:solidFill>
+                            <a:srgbClr val="000000"/>
+                          </a:solidFill>
+                        </a:rPr>
                         <a:t>Series 3</a:t>
                       </a:r>
                       <a:endParaRPr lang="en-US" sz="1200" dirty="0"/>
@@ -6685,7 +7117,11 @@
                         <a:buNone/>
                       </a:pPr>
                       <a:r>
-                        <a:rPr lang="en-US" sz="1200" dirty="0"/>
+                        <a:rPr lang="en-US" sz="1200" dirty="0">
+                          <a:solidFill>
+                            <a:srgbClr val="000000"/>
+                          </a:solidFill>
+                        </a:rPr>
                         <a:t>Category 1</a:t>
                       </a:r>
                       <a:endParaRPr lang="en-US" sz="1200" dirty="0"/>
@@ -6723,7 +7159,11 @@
                         <a:buNone/>
                       </a:pPr>
                       <a:r>
-                        <a:rPr lang="en-US" sz="1200" dirty="0"/>
+                        <a:rPr lang="en-US" sz="1200" dirty="0">
+                          <a:solidFill>
+                            <a:srgbClr val="000000"/>
+                          </a:solidFill>
+                        </a:rPr>
                         <a:t>4.3</a:t>
                       </a:r>
                       <a:endParaRPr lang="en-US" sz="1200" dirty="0"/>
@@ -6761,7 +7201,11 @@
                         <a:buNone/>
                       </a:pPr>
                       <a:r>
-                        <a:rPr lang="en-US" sz="1200" dirty="0"/>
+                        <a:rPr lang="en-US" sz="1200" dirty="0">
+                          <a:solidFill>
+                            <a:srgbClr val="000000"/>
+                          </a:solidFill>
+                        </a:rPr>
                         <a:t>2.4</a:t>
                       </a:r>
                       <a:endParaRPr lang="en-US" sz="1200" dirty="0"/>
@@ -6799,7 +7243,11 @@
                         <a:buNone/>
                       </a:pPr>
                       <a:r>
-                        <a:rPr lang="en-US" sz="1200" dirty="0"/>
+                        <a:rPr lang="en-US" sz="1200" dirty="0">
+                          <a:solidFill>
+                            <a:srgbClr val="000000"/>
+                          </a:solidFill>
+                        </a:rPr>
                         <a:t>2</a:t>
                       </a:r>
                       <a:endParaRPr lang="en-US" sz="1200" dirty="0"/>
@@ -6902,7 +7350,11 @@
                         <a:buNone/>
                       </a:pPr>
                       <a:r>
-                        <a:rPr lang="en-US" sz="1200" dirty="0"/>
+                        <a:rPr lang="en-US" sz="1200" dirty="0">
+                          <a:solidFill>
+                            <a:srgbClr val="000000"/>
+                          </a:solidFill>
+                        </a:rPr>
                         <a:t>Category 2</a:t>
                       </a:r>
                       <a:endParaRPr lang="en-US" sz="1200" dirty="0"/>
@@ -6940,7 +7392,11 @@
                         <a:buNone/>
                       </a:pPr>
                       <a:r>
-                        <a:rPr lang="en-US" sz="1200" dirty="0"/>
+                        <a:rPr lang="en-US" sz="1200" dirty="0">
+                          <a:solidFill>
+                            <a:srgbClr val="000000"/>
+                          </a:solidFill>
+                        </a:rPr>
                         <a:t>2.5</a:t>
                       </a:r>
                       <a:endParaRPr lang="en-US" sz="1200" dirty="0"/>
@@ -6978,7 +7434,11 @@
                         <a:buNone/>
                       </a:pPr>
                       <a:r>
-                        <a:rPr lang="en-US" sz="1200" dirty="0"/>
+                        <a:rPr lang="en-US" sz="1200" dirty="0">
+                          <a:solidFill>
+                            <a:srgbClr val="000000"/>
+                          </a:solidFill>
+                        </a:rPr>
                         <a:t>4.4</a:t>
                       </a:r>
                       <a:endParaRPr lang="en-US" sz="1200" dirty="0"/>
@@ -7016,7 +7476,11 @@
                         <a:buNone/>
                       </a:pPr>
                       <a:r>
-                        <a:rPr lang="en-US" sz="1200" dirty="0"/>
+                        <a:rPr lang="en-US" sz="1200" dirty="0">
+                          <a:solidFill>
+                            <a:srgbClr val="000000"/>
+                          </a:solidFill>
+                        </a:rPr>
                         <a:t>2</a:t>
                       </a:r>
                       <a:endParaRPr lang="en-US" sz="1200" dirty="0"/>
@@ -7114,7 +7578,11 @@
                         <a:buNone/>
                       </a:pPr>
                       <a:r>
-                        <a:rPr lang="en-US" sz="1200" dirty="0"/>
+                        <a:rPr lang="en-US" sz="1200" dirty="0">
+                          <a:solidFill>
+                            <a:srgbClr val="000000"/>
+                          </a:solidFill>
+                        </a:rPr>
                         <a:t>Category 3</a:t>
                       </a:r>
                       <a:endParaRPr lang="en-US" sz="1200" dirty="0"/>
@@ -7152,7 +7620,11 @@
                         <a:buNone/>
                       </a:pPr>
                       <a:r>
-                        <a:rPr lang="en-US" sz="1200" dirty="0"/>
+                        <a:rPr lang="en-US" sz="1200" dirty="0">
+                          <a:solidFill>
+                            <a:srgbClr val="000000"/>
+                          </a:solidFill>
+                        </a:rPr>
                         <a:t>3.5</a:t>
                       </a:r>
                       <a:endParaRPr lang="en-US" sz="1200" dirty="0"/>
@@ -7190,7 +7662,11 @@
                         <a:buNone/>
                       </a:pPr>
                       <a:r>
-                        <a:rPr lang="en-US" sz="1200" dirty="0"/>
+                        <a:rPr lang="en-US" sz="1200" dirty="0">
+                          <a:solidFill>
+                            <a:srgbClr val="000000"/>
+                          </a:solidFill>
+                        </a:rPr>
                         <a:t>1.8</a:t>
                       </a:r>
                       <a:endParaRPr lang="en-US" sz="1200" dirty="0"/>
@@ -7228,7 +7704,11 @@
                         <a:buNone/>
                       </a:pPr>
                       <a:r>
-                        <a:rPr lang="en-US" sz="1200" dirty="0"/>
+                        <a:rPr lang="en-US" sz="1200" dirty="0">
+                          <a:solidFill>
+                            <a:srgbClr val="000000"/>
+                          </a:solidFill>
+                        </a:rPr>
                         <a:t>3</a:t>
                       </a:r>
                       <a:endParaRPr lang="en-US" sz="1200" dirty="0"/>
@@ -7326,7 +7806,11 @@
                         <a:buNone/>
                       </a:pPr>
                       <a:r>
-                        <a:rPr lang="en-US" sz="1200" dirty="0"/>
+                        <a:rPr lang="en-US" sz="1200" dirty="0">
+                          <a:solidFill>
+                            <a:srgbClr val="000000"/>
+                          </a:solidFill>
+                        </a:rPr>
                         <a:t>Category 4</a:t>
                       </a:r>
                       <a:endParaRPr lang="en-US" sz="1200" dirty="0"/>
@@ -7364,7 +7848,11 @@
                         <a:buNone/>
                       </a:pPr>
                       <a:r>
-                        <a:rPr lang="en-US" sz="1200" dirty="0"/>
+                        <a:rPr lang="en-US" sz="1200" dirty="0">
+                          <a:solidFill>
+                            <a:srgbClr val="000000"/>
+                          </a:solidFill>
+                        </a:rPr>
                         <a:t>4.5</a:t>
                       </a:r>
                       <a:endParaRPr lang="en-US" sz="1200" dirty="0"/>
@@ -7402,7 +7890,11 @@
                         <a:buNone/>
                       </a:pPr>
                       <a:r>
-                        <a:rPr lang="en-US" sz="1200" dirty="0"/>
+                        <a:rPr lang="en-US" sz="1200" dirty="0">
+                          <a:solidFill>
+                            <a:srgbClr val="000000"/>
+                          </a:solidFill>
+                        </a:rPr>
                         <a:t>2.8</a:t>
                       </a:r>
                       <a:endParaRPr lang="en-US" sz="1200" dirty="0"/>
@@ -7440,7 +7932,11 @@
                         <a:buNone/>
                       </a:pPr>
                       <a:r>
-                        <a:rPr lang="en-US" sz="1200" dirty="0"/>
+                        <a:rPr lang="en-US" sz="1200" dirty="0">
+                          <a:solidFill>
+                            <a:srgbClr val="000000"/>
+                          </a:solidFill>
+                        </a:rPr>
                         <a:t>5</a:t>
                       </a:r>
                       <a:endParaRPr lang="en-US" sz="1200" dirty="0"/>
@@ -7565,10 +8061,15 @@
                         <a:buNone/>
                       </a:pPr>
                       <a:r>
-                        <a:rPr lang="en-US" sz="1200" dirty="0"/>
+                        <a:rPr lang="en-US" sz="2600" dirty="0">
+                          <a:solidFill>
+                            <a:srgbClr val="17365D"/>
+                          </a:solidFill>
+                          <a:latin typeface="Ubuntu"/>
+                        </a:rPr>
                         <a:t>Demonstration of DOCX support in calibre </a:t>
                       </a:r>
-                      <a:endParaRPr lang="en-US" sz="1200" dirty="0"/>
+                      <a:endParaRPr lang="en-US" sz="2600" dirty="0"/>
                     </a:p>
                   </a:txBody>
                   <a:tcPr>
@@ -7663,7 +8164,12 @@
                         <a:buNone/>
                       </a:pPr>
                       <a:r>
-                        <a:rPr lang="en-US" sz="1200" dirty="0"/>
+                        <a:rPr lang="en-US" sz="1200" dirty="0">
+                          <a:solidFill>
+                            <a:srgbClr val="000000"/>
+                          </a:solidFill>
+                          <a:latin typeface="Ubuntu"/>
+                        </a:rPr>
                         <a:t>Six </a:t>
                       </a:r>
                       <a:endParaRPr lang="en-US" sz="1200" dirty="0"/>
@@ -7732,7 +8238,12 @@
                         <a:buNone/>
                       </a:pPr>
                       <a:r>
-                        <a:rPr lang="en-US" sz="1200" dirty="0"/>
+                        <a:rPr lang="en-US" sz="1200" dirty="0">
+                          <a:solidFill>
+                            <a:srgbClr val="000000"/>
+                          </a:solidFill>
+                          <a:latin typeface="Ubuntu"/>
+                        </a:rPr>
                         <a:t>One </a:t>
                       </a:r>
                       <a:endParaRPr lang="en-US" sz="1200" dirty="0"/>
@@ -7801,7 +8312,12 @@
                         <a:buNone/>
                       </a:pPr>
                       <a:r>
-                        <a:rPr lang="en-US" sz="1200" dirty="0"/>
+                        <a:rPr lang="en-US" sz="1200" dirty="0">
+                          <a:solidFill>
+                            <a:srgbClr val="000000"/>
+                          </a:solidFill>
+                          <a:latin typeface="Ubuntu"/>
+                        </a:rPr>
                         <a:t>Two </a:t>
                       </a:r>
                       <a:endParaRPr lang="en-US" sz="1200" dirty="0"/>
@@ -7870,7 +8386,12 @@
                         <a:buNone/>
                       </a:pPr>
                       <a:r>
-                        <a:rPr lang="en-US" sz="1200" dirty="0"/>
+                        <a:rPr lang="en-US" sz="1200" dirty="0">
+                          <a:solidFill>
+                            <a:srgbClr val="000000"/>
+                          </a:solidFill>
+                          <a:latin typeface="Ubuntu"/>
+                        </a:rPr>
                         <a:t>We now resume our normal programming </a:t>
                       </a:r>
                       <a:endParaRPr lang="en-US" sz="1200" dirty="0"/>
@@ -7939,7 +8460,12 @@
                         <a:buNone/>
                       </a:pPr>
                       <a:r>
-                        <a:rPr lang="en-US" sz="1200" dirty="0"/>
+                        <a:rPr lang="en-US" sz="1200" dirty="0">
+                          <a:solidFill>
+                            <a:srgbClr val="000000"/>
+                          </a:solidFill>
+                          <a:latin typeface="Ubuntu"/>
+                        </a:rPr>
                         <a:t>Four </a:t>
                       </a:r>
                       <a:endParaRPr lang="en-US" sz="1200" dirty="0"/>
@@ -8063,10 +8589,15 @@
                         <a:buNone/>
                       </a:pPr>
                       <a:r>
-                        <a:rPr lang="en-US" sz="1200" dirty="0"/>
+                        <a:rPr lang="en-US" sz="1400" b="1" dirty="0">
+                          <a:solidFill>
+                            <a:srgbClr val="365F91"/>
+                          </a:solidFill>
+                          <a:latin typeface="Ubuntu"/>
+                        </a:rPr>
                         <a:t>Text Formatting </a:t>
                       </a:r>
-                      <a:endParaRPr lang="en-US" sz="1200" dirty="0"/>
+                      <a:endParaRPr lang="en-US" sz="1400" dirty="0"/>
                     </a:p>
                   </a:txBody>
                   <a:tcPr>
@@ -8103,10 +8634,15 @@
                         <a:buNone/>
                       </a:pPr>
                       <a:r>
-                        <a:rPr lang="en-US" sz="1200" dirty="0"/>
+                        <a:rPr lang="en-US" sz="1300" b="1" dirty="0">
+                          <a:solidFill>
+                            <a:srgbClr val="4F81BD"/>
+                          </a:solidFill>
+                          <a:latin typeface="Ubuntu"/>
+                        </a:rPr>
                         <a:t>Inline formatting </a:t>
                       </a:r>
-                      <a:endParaRPr lang="en-US" sz="1200" dirty="0"/>
+                      <a:endParaRPr lang="en-US" sz="1300" dirty="0"/>
                     </a:p>
                   </a:txBody>
                   <a:tcPr>
@@ -8143,7 +8679,12 @@
                         <a:buNone/>
                       </a:pPr>
                       <a:r>
-                        <a:rPr lang="en-US" sz="1200" dirty="0"/>
+                        <a:rPr lang="en-US" sz="1200" dirty="0">
+                          <a:solidFill>
+                            <a:srgbClr val="000000"/>
+                          </a:solidFill>
+                          <a:latin typeface="Ubuntu"/>
+                        </a:rPr>
                         <a:t>Here, we demonstrate various types of inline text formatting and the use of embedded fonts. </a:t>
                       </a:r>
                       <a:endParaRPr lang="en-US" sz="1200" dirty="0"/>
@@ -8381,7 +8922,12 @@
                         <a:buNone/>
                       </a:pPr>
                       <a:r>
-                        <a:rPr lang="en-US" sz="1200" dirty="0"/>
+                        <a:rPr lang="en-US" sz="1200" dirty="0">
+                          <a:solidFill>
+                            <a:srgbClr val="FFFFFF"/>
+                          </a:solidFill>
+                          <a:latin typeface="Ubuntu"/>
+                        </a:rPr>
                         <a:t>inverse video</a:t>
                       </a:r>
                       <a:endParaRPr lang="en-US" sz="1200" dirty="0"/>
@@ -8421,7 +8967,12 @@
                         <a:buNone/>
                       </a:pPr>
                       <a:r>
-                        <a:rPr lang="en-US" sz="1200" dirty="0"/>
+                        <a:rPr lang="en-US" sz="1200" dirty="0">
+                          <a:solidFill>
+                            <a:srgbClr val="000000"/>
+                          </a:solidFill>
+                          <a:latin typeface="Ubuntu"/>
+                        </a:rPr>
                         <a:t>.</a:t>
                       </a:r>
                       <a:endParaRPr lang="en-US" sz="1200" dirty="0"/>
@@ -8461,7 +9012,12 @@
                         <a:buNone/>
                       </a:pPr>
                       <a:r>
-                        <a:rPr lang="en-US" sz="1200" dirty="0"/>
+                        <a:rPr lang="en-US" sz="1200" dirty="0">
+                          <a:solidFill>
+                            <a:srgbClr val="000000"/>
+                          </a:solidFill>
+                          <a:latin typeface="Ubuntu"/>
+                        </a:rPr>
                         <a:t>A paragraph with styled text: </a:t>
                       </a:r>
                       <a:r>
@@ -8474,7 +9030,12 @@
                         <a:t>subtle emphasis  </a:t>
                       </a:r>
                       <a:r>
-                        <a:rPr lang="en-US" sz="1200" dirty="0"/>
+                        <a:rPr lang="en-US" sz="1200" dirty="0">
+                          <a:solidFill>
+                            <a:srgbClr val="000000"/>
+                          </a:solidFill>
+                          <a:latin typeface="Ubuntu"/>
+                        </a:rPr>
                         <a:t>followed by </a:t>
                       </a:r>
                       <a:r>
@@ -8487,7 +9048,12 @@
                         <a:t>strong text </a:t>
                       </a:r>
                       <a:r>
-                        <a:rPr lang="en-US" sz="1200" dirty="0"/>
+                        <a:rPr lang="en-US" sz="1200" dirty="0">
+                          <a:solidFill>
+                            <a:srgbClr val="000000"/>
+                          </a:solidFill>
+                          <a:latin typeface="Ubuntu"/>
+                        </a:rPr>
                         <a:t>and </a:t>
                       </a:r>
                       <a:r>
@@ -8500,7 +9066,12 @@
                         <a:t>intense emphasis</a:t>
                       </a:r>
                       <a:r>
-                        <a:rPr lang="en-US" sz="1200" dirty="0"/>
+                        <a:rPr lang="en-US" sz="1200" dirty="0">
+                          <a:solidFill>
+                            <a:srgbClr val="000000"/>
+                          </a:solidFill>
+                          <a:latin typeface="Ubuntu"/>
+                        </a:rPr>
                         <a:t>. This paragraph uses document wide styles for styling rather than inline text properties as demonstrated in the previous paragraph — calibre can handle both with equal ease. </a:t>
                       </a:r>
                       <a:endParaRPr lang="en-US" sz="1200" dirty="0"/>
@@ -8540,10 +9111,15 @@
                         <a:buNone/>
                       </a:pPr>
                       <a:r>
-                        <a:rPr lang="en-US" sz="1200" dirty="0"/>
+                        <a:rPr lang="en-US" sz="1300" b="1" dirty="0">
+                          <a:solidFill>
+                            <a:srgbClr val="4F81BD"/>
+                          </a:solidFill>
+                          <a:latin typeface="Ubuntu"/>
+                        </a:rPr>
                         <a:t>Fun with fonts </a:t>
                       </a:r>
-                      <a:endParaRPr lang="en-US" sz="1200" dirty="0"/>
+                      <a:endParaRPr lang="en-US" sz="1300" dirty="0"/>
                     </a:p>
                   </a:txBody>
                   <a:tcPr>
@@ -8580,7 +9156,12 @@
                         <a:buNone/>
                       </a:pPr>
                       <a:r>
-                        <a:rPr lang="en-US" sz="1200" dirty="0"/>
+                        <a:rPr lang="en-US" sz="1200" dirty="0">
+                          <a:solidFill>
+                            <a:srgbClr val="000000"/>
+                          </a:solidFill>
+                          <a:latin typeface="Ubuntu"/>
+                        </a:rPr>
                         <a:t>This document has embedded the Ubuntu font family. The body text is in the Ubuntu typeface, here is </a:t>
                       </a:r>
                       <a:r>
@@ -8593,7 +9174,12 @@
                         <a:t>some text in the Ubuntu Mono typeface, notice how every letter has the same width, even i and m</a:t>
                       </a:r>
                       <a:r>
-                        <a:rPr lang="en-US" sz="1200" dirty="0"/>
+                        <a:rPr lang="en-US" sz="1200" dirty="0">
+                          <a:solidFill>
+                            <a:srgbClr val="000000"/>
+                          </a:solidFill>
+                          <a:latin typeface="Ubuntu"/>
+                        </a:rPr>
                         <a:t>. Every embedded font will automatically be embedded in the output ebook during conversion.  </a:t>
                       </a:r>
                       <a:endParaRPr lang="en-US" sz="1200" dirty="0"/>
@@ -8633,10 +9219,15 @@
                         <a:buNone/>
                       </a:pPr>
                       <a:r>
-                        <a:rPr lang="en-US" sz="1200" dirty="0"/>
+                        <a:rPr lang="en-US" sz="1300" b="1" dirty="0">
+                          <a:solidFill>
+                            <a:srgbClr val="4F81BD"/>
+                          </a:solidFill>
+                          <a:latin typeface="Ubuntu"/>
+                        </a:rPr>
                         <a:t>Paragraph level formatting </a:t>
                       </a:r>
-                      <a:endParaRPr lang="en-US" sz="1200" dirty="0"/>
+                      <a:endParaRPr lang="en-US" sz="1300" dirty="0"/>
                     </a:p>
                   </a:txBody>
                   <a:tcPr>
@@ -8673,7 +9264,12 @@
                         <a:buNone/>
                       </a:pPr>
                       <a:r>
-                        <a:rPr lang="en-US" sz="1200" dirty="0"/>
+                        <a:rPr lang="en-US" sz="1200" dirty="0">
+                          <a:solidFill>
+                            <a:srgbClr val="000000"/>
+                          </a:solidFill>
+                          <a:latin typeface="Ubuntu"/>
+                        </a:rPr>
                         <a:t>You can do crazy things with paragraphs, if the urge strikes you. For instance this paragraph is right aligned and has a right border. It has also been given a light gray background. </a:t>
                       </a:r>
                       <a:endParaRPr lang="en-US" sz="1200" dirty="0"/>
@@ -8797,10 +9393,15 @@
                         <a:buNone/>
                       </a:pPr>
                       <a:r>
-                        <a:rPr lang="en-US" sz="1200" dirty="0"/>
+                        <a:rPr lang="en-US" sz="1400" b="1" dirty="0">
+                          <a:solidFill>
+                            <a:srgbClr val="365F91"/>
+                          </a:solidFill>
+                          <a:latin typeface="Ubuntu"/>
+                        </a:rPr>
                         <a:t>Text Formatting </a:t>
                       </a:r>
-                      <a:endParaRPr lang="en-US" sz="1200" dirty="0"/>
+                      <a:endParaRPr lang="en-US" sz="1400" dirty="0"/>
                     </a:p>
                   </a:txBody>
                   <a:tcPr>
@@ -8837,14 +9438,24 @@
                         <a:buNone/>
                       </a:pPr>
                       <a:r>
-                        <a:rPr lang="en-US" sz="1200" dirty="0"/>
+                        <a:rPr lang="en-US" sz="1200" dirty="0">
+                          <a:solidFill>
+                            <a:srgbClr val="000000"/>
+                          </a:solidFill>
+                          <a:latin typeface="Ubuntu"/>
+                        </a:rPr>
                         <a:t>For the lovers of poetry amongst you, paragraphs with hanging indents, like this often</a:t>
                       </a:r>
                       <a:br>
                         <a:rPr lang="en-US" dirty="0"/>
                       </a:br>
                       <a:r>
-                        <a:rPr lang="en-US" sz="1200" dirty="0"/>
+                        <a:rPr lang="en-US" sz="1200" dirty="0">
+                          <a:solidFill>
+                            <a:srgbClr val="000000"/>
+                          </a:solidFill>
+                          <a:latin typeface="Ubuntu"/>
+                        </a:rPr>
                         <a:t>come in handy. You can use hanging indents to ensure that a line of poetry retains its individual identity as a line even when the screen is  too narrow to display it as a single line. Not only does this paragraph have a hanging indent, it is also has an extra top margin, setting it apart from the preceding paragraph. </a:t>
                       </a:r>
                       <a:endParaRPr lang="en-US" sz="1200" dirty="0"/>
@@ -8973,10 +9584,15 @@
                         <a:buNone/>
                       </a:pPr>
                       <a:r>
-                        <a:rPr lang="en-US" sz="1200" dirty="0"/>
+                        <a:rPr lang="en-US" sz="1400" b="1" dirty="0">
+                          <a:solidFill>
+                            <a:srgbClr val="365F91"/>
+                          </a:solidFill>
+                          <a:latin typeface="Ubuntu"/>
+                        </a:rPr>
                         <a:t>Tables </a:t>
                       </a:r>
-                      <a:endParaRPr lang="en-US" sz="1200" dirty="0"/>
+                      <a:endParaRPr lang="en-US" sz="1400" dirty="0"/>
                     </a:p>
                   </a:txBody>
                   <a:tcPr>
@@ -9158,7 +9774,12 @@
                         <a:buNone/>
                       </a:pPr>
                       <a:r>
-                        <a:rPr lang="en-US" sz="1200" dirty="0"/>
+                        <a:rPr lang="en-US" sz="1200" b="1" dirty="0">
+                          <a:solidFill>
+                            <a:srgbClr val="FFFFFF"/>
+                          </a:solidFill>
+                          <a:latin typeface="Ubuntu"/>
+                        </a:rPr>
                         <a:t>ITEM </a:t>
                       </a:r>
                       <a:endParaRPr lang="en-US" sz="1200" dirty="0"/>
@@ -9196,7 +9817,12 @@
                         <a:buNone/>
                       </a:pPr>
                       <a:r>
-                        <a:rPr lang="en-US" sz="1200" dirty="0"/>
+                        <a:rPr lang="en-US" sz="1200" b="1" dirty="0">
+                          <a:solidFill>
+                            <a:srgbClr val="FFFFFF"/>
+                          </a:solidFill>
+                          <a:latin typeface="Ubuntu"/>
+                        </a:rPr>
                         <a:t>NEEDED </a:t>
                       </a:r>
                       <a:endParaRPr lang="en-US" sz="1200" dirty="0"/>
@@ -9352,7 +9978,12 @@
                         <a:buNone/>
                       </a:pPr>
                       <a:r>
-                        <a:rPr lang="en-US" sz="1200" dirty="0"/>
+                        <a:rPr lang="en-US" sz="1200" dirty="0">
+                          <a:solidFill>
+                            <a:srgbClr val="000000"/>
+                          </a:solidFill>
+                          <a:latin typeface="Ubuntu"/>
+                        </a:rPr>
                         <a:t>Books </a:t>
                       </a:r>
                       <a:endParaRPr lang="en-US" sz="1200" dirty="0"/>
@@ -9390,7 +10021,12 @@
                         <a:buNone/>
                       </a:pPr>
                       <a:r>
-                        <a:rPr lang="en-US" sz="1200" dirty="0"/>
+                        <a:rPr lang="en-US" sz="1200" dirty="0">
+                          <a:solidFill>
+                            <a:srgbClr val="000000"/>
+                          </a:solidFill>
+                          <a:latin typeface="Ubuntu"/>
+                        </a:rPr>
                         <a:t>1 </a:t>
                       </a:r>
                       <a:endParaRPr lang="en-US" sz="1200" dirty="0"/>
@@ -9546,7 +10182,12 @@
                         <a:buNone/>
                       </a:pPr>
                       <a:r>
-                        <a:rPr lang="en-US" sz="1200" dirty="0"/>
+                        <a:rPr lang="en-US" sz="1200" dirty="0">
+                          <a:solidFill>
+                            <a:srgbClr val="000000"/>
+                          </a:solidFill>
+                          <a:latin typeface="Ubuntu"/>
+                        </a:rPr>
                         <a:t>Pens </a:t>
                       </a:r>
                       <a:endParaRPr lang="en-US" sz="1200" dirty="0"/>
@@ -9584,7 +10225,12 @@
                         <a:buNone/>
                       </a:pPr>
                       <a:r>
-                        <a:rPr lang="en-US" sz="1200" dirty="0"/>
+                        <a:rPr lang="en-US" sz="1200" dirty="0">
+                          <a:solidFill>
+                            <a:srgbClr val="000000"/>
+                          </a:solidFill>
+                          <a:latin typeface="Ubuntu"/>
+                        </a:rPr>
                         <a:t>3 </a:t>
                       </a:r>
                       <a:endParaRPr lang="en-US" sz="1200" dirty="0"/>
@@ -9740,7 +10386,12 @@
                         <a:buNone/>
                       </a:pPr>
                       <a:r>
-                        <a:rPr lang="en-US" sz="1200" dirty="0"/>
+                        <a:rPr lang="en-US" sz="1200" dirty="0">
+                          <a:solidFill>
+                            <a:srgbClr val="000000"/>
+                          </a:solidFill>
+                          <a:latin typeface="Ubuntu"/>
+                        </a:rPr>
                         <a:t>Pencils </a:t>
                       </a:r>
                       <a:endParaRPr lang="en-US" sz="1200" dirty="0"/>
@@ -9778,7 +10429,12 @@
                         <a:buNone/>
                       </a:pPr>
                       <a:r>
-                        <a:rPr lang="en-US" sz="1200" dirty="0"/>
+                        <a:rPr lang="en-US" sz="1200" dirty="0">
+                          <a:solidFill>
+                            <a:srgbClr val="000000"/>
+                          </a:solidFill>
+                          <a:latin typeface="Ubuntu"/>
+                        </a:rPr>
                         <a:t>2 </a:t>
                       </a:r>
                       <a:endParaRPr lang="en-US" sz="1200" dirty="0"/>
@@ -9934,7 +10590,12 @@
                         <a:buNone/>
                       </a:pPr>
                       <a:r>
-                        <a:rPr lang="en-US" sz="1200" dirty="0"/>
+                        <a:rPr lang="en-US" sz="1200" dirty="0">
+                          <a:solidFill>
+                            <a:srgbClr val="000000"/>
+                          </a:solidFill>
+                          <a:latin typeface="Ubuntu"/>
+                        </a:rPr>
                         <a:t>Highlighter </a:t>
                       </a:r>
                       <a:endParaRPr lang="en-US" sz="1200" dirty="0"/>
@@ -9972,7 +10633,12 @@
                         <a:buNone/>
                       </a:pPr>
                       <a:r>
-                        <a:rPr lang="en-US" sz="1200" dirty="0"/>
+                        <a:rPr lang="en-US" sz="1200" dirty="0">
+                          <a:solidFill>
+                            <a:srgbClr val="000000"/>
+                          </a:solidFill>
+                          <a:latin typeface="Ubuntu"/>
+                        </a:rPr>
                         <a:t>2 colors </a:t>
                       </a:r>
                       <a:endParaRPr lang="en-US" sz="1200" dirty="0"/>
@@ -10128,7 +10794,12 @@
                         <a:buNone/>
                       </a:pPr>
                       <a:r>
-                        <a:rPr lang="en-US" sz="1200" dirty="0"/>
+                        <a:rPr lang="en-US" sz="1200" dirty="0">
+                          <a:solidFill>
+                            <a:srgbClr val="000000"/>
+                          </a:solidFill>
+                          <a:latin typeface="Ubuntu"/>
+                        </a:rPr>
                         <a:t>Scissors </a:t>
                       </a:r>
                       <a:endParaRPr lang="en-US" sz="1200" dirty="0"/>
@@ -10166,7 +10837,12 @@
                         <a:buNone/>
                       </a:pPr>
                       <a:r>
-                        <a:rPr lang="en-US" sz="1200" dirty="0"/>
+                        <a:rPr lang="en-US" sz="1200" dirty="0">
+                          <a:solidFill>
+                            <a:srgbClr val="000000"/>
+                          </a:solidFill>
+                          <a:latin typeface="Ubuntu"/>
+                        </a:rPr>
                         <a:t>1 pair </a:t>
                       </a:r>
                       <a:endParaRPr lang="en-US" sz="1200" dirty="0"/>
@@ -10322,7 +10998,12 @@
                         <a:buNone/>
                       </a:pPr>
                       <a:r>
-                        <a:rPr lang="en-US" sz="1200" dirty="0"/>
+                        <a:rPr lang="en-US" sz="1200" dirty="0">
+                          <a:solidFill>
+                            <a:srgbClr val="000000"/>
+                          </a:solidFill>
+                          <a:latin typeface="Ubuntu"/>
+                        </a:rPr>
                         <a:t>Tables in Word can vary from the extremely simple to the extremely complex. calibre tries to do its best when converting tables. While you may run into trouble with the occasional table, the vast majority of common cases should be converted very well, as demonstrated in this section. Note that for optimum results, when creating tables in Word, you should set their widths using percentages, rather than absolute units.  To the left of this paragraph is a floating two column table with a nice green border and header row. </a:t>
                       </a:r>
                       <a:endParaRPr lang="en-US" sz="1200" dirty="0"/>
@@ -10507,7 +11188,12 @@
                         <a:buNone/>
                       </a:pPr>
                       <a:r>
-                        <a:rPr lang="en-US" sz="1200" dirty="0"/>
+                        <a:rPr lang="en-US" sz="1200" dirty="0">
+                          <a:solidFill>
+                            <a:srgbClr val="000000"/>
+                          </a:solidFill>
+                          <a:latin typeface="Ubuntu"/>
+                        </a:rPr>
                         <a:t>Now let’s look at a fancier table—one with alternating row colors and partial borders. This table is stretched out to take 100% of the available width. </a:t>
                       </a:r>
                       <a:endParaRPr lang="en-US" sz="1200" dirty="0"/>
@@ -10692,7 +11378,12 @@
                         <a:buNone/>
                       </a:pPr>
                       <a:r>
-                        <a:rPr lang="en-US" sz="1200" dirty="0"/>
+                        <a:rPr lang="en-US" sz="1200" dirty="0">
+                          <a:solidFill>
+                            <a:srgbClr val="000000"/>
+                          </a:solidFill>
+                          <a:latin typeface="Ubuntu"/>
+                        </a:rPr>
                         <a:t>City or Town </a:t>
                       </a:r>
                       <a:endParaRPr lang="en-US" sz="1200" dirty="0"/>
@@ -10730,7 +11421,12 @@
                         <a:buNone/>
                       </a:pPr>
                       <a:r>
-                        <a:rPr lang="en-US" sz="1200" dirty="0"/>
+                        <a:rPr lang="en-US" sz="1200" dirty="0">
+                          <a:solidFill>
+                            <a:srgbClr val="000000"/>
+                          </a:solidFill>
+                          <a:latin typeface="Ubuntu"/>
+                        </a:rPr>
                         <a:t>Point A </a:t>
                       </a:r>
                       <a:endParaRPr lang="en-US" sz="1200" dirty="0"/>
@@ -10768,7 +11464,12 @@
                         <a:buNone/>
                       </a:pPr>
                       <a:r>
-                        <a:rPr lang="en-US" sz="1200" dirty="0"/>
+                        <a:rPr lang="en-US" sz="1200" dirty="0">
+                          <a:solidFill>
+                            <a:srgbClr val="000000"/>
+                          </a:solidFill>
+                          <a:latin typeface="Ubuntu"/>
+                        </a:rPr>
                         <a:t>Point B </a:t>
                       </a:r>
                       <a:endParaRPr lang="en-US" sz="1200" dirty="0"/>
@@ -10806,7 +11507,12 @@
                         <a:buNone/>
                       </a:pPr>
                       <a:r>
-                        <a:rPr lang="en-US" sz="1200" dirty="0"/>
+                        <a:rPr lang="en-US" sz="1200" dirty="0">
+                          <a:solidFill>
+                            <a:srgbClr val="000000"/>
+                          </a:solidFill>
+                          <a:latin typeface="Ubuntu"/>
+                        </a:rPr>
                         <a:t>Point C </a:t>
                       </a:r>
                       <a:endParaRPr lang="en-US" sz="1200" dirty="0"/>
@@ -10844,7 +11550,12 @@
                         <a:buNone/>
                       </a:pPr>
                       <a:r>
-                        <a:rPr lang="en-US" sz="1200" dirty="0"/>
+                        <a:rPr lang="en-US" sz="1200" dirty="0">
+                          <a:solidFill>
+                            <a:srgbClr val="000000"/>
+                          </a:solidFill>
+                          <a:latin typeface="Ubuntu"/>
+                        </a:rPr>
                         <a:t>Point D </a:t>
                       </a:r>
                       <a:endParaRPr lang="en-US" sz="1200" dirty="0"/>
@@ -10882,7 +11593,12 @@
                         <a:buNone/>
                       </a:pPr>
                       <a:r>
-                        <a:rPr lang="en-US" sz="1200" dirty="0"/>
+                        <a:rPr lang="en-US" sz="1200" dirty="0">
+                          <a:solidFill>
+                            <a:srgbClr val="000000"/>
+                          </a:solidFill>
+                          <a:latin typeface="Ubuntu"/>
+                        </a:rPr>
                         <a:t>Point E </a:t>
                       </a:r>
                       <a:endParaRPr lang="en-US" sz="1200" dirty="0"/>
@@ -10922,7 +11638,12 @@
                         <a:buNone/>
                       </a:pPr>
                       <a:r>
-                        <a:rPr lang="en-US" sz="1200" dirty="0"/>
+                        <a:rPr lang="en-US" sz="1200" dirty="0">
+                          <a:solidFill>
+                            <a:srgbClr val="000000"/>
+                          </a:solidFill>
+                          <a:latin typeface="Ubuntu"/>
+                        </a:rPr>
                         <a:t>Point A </a:t>
                       </a:r>
                       <a:endParaRPr lang="en-US" sz="1200" dirty="0"/>
@@ -10960,7 +11681,12 @@
                         <a:buNone/>
                       </a:pPr>
                       <a:r>
-                        <a:rPr lang="en-US" sz="1200" dirty="0"/>
+                        <a:rPr lang="en-US" sz="1200" dirty="0">
+                          <a:solidFill>
+                            <a:srgbClr val="000000"/>
+                          </a:solidFill>
+                          <a:latin typeface="Ubuntu"/>
+                        </a:rPr>
                         <a:t>— </a:t>
                       </a:r>
                       <a:endParaRPr lang="en-US" sz="1200" dirty="0"/>
@@ -11225,10 +11951,15 @@
                         <a:buNone/>
                       </a:pPr>
                       <a:r>
-                        <a:rPr lang="en-US" sz="1200" dirty="0"/>
+                        <a:rPr lang="en-US" sz="1400" b="1" dirty="0">
+                          <a:solidFill>
+                            <a:srgbClr val="365F91"/>
+                          </a:solidFill>
+                          <a:latin typeface="Ubuntu"/>
+                        </a:rPr>
                         <a:t>Tables </a:t>
                       </a:r>
-                      <a:endParaRPr lang="en-US" sz="1200" dirty="0"/>
+                      <a:endParaRPr lang="en-US" sz="1400" dirty="0"/>
                     </a:p>
                   </a:txBody>
                   <a:tcPr>
@@ -11410,7 +12141,12 @@
                         <a:buNone/>
                       </a:pPr>
                       <a:r>
-                        <a:rPr lang="en-US" sz="1200" dirty="0"/>
+                        <a:rPr lang="en-US" sz="1200" dirty="0">
+                          <a:solidFill>
+                            <a:srgbClr val="000000"/>
+                          </a:solidFill>
+                          <a:latin typeface="Ubuntu"/>
+                        </a:rPr>
                         <a:t>Point B </a:t>
                       </a:r>
                       <a:endParaRPr lang="en-US" sz="1200" dirty="0"/>
@@ -11448,7 +12184,12 @@
                         <a:buNone/>
                       </a:pPr>
                       <a:r>
-                        <a:rPr lang="en-US" sz="1200" dirty="0"/>
+                        <a:rPr lang="en-US" sz="1200" dirty="0">
+                          <a:solidFill>
+                            <a:srgbClr val="000000"/>
+                          </a:solidFill>
+                          <a:latin typeface="Ubuntu"/>
+                        </a:rPr>
                         <a:t>87 </a:t>
                       </a:r>
                       <a:endParaRPr lang="en-US" sz="1200" dirty="0"/>
@@ -11486,7 +12227,12 @@
                         <a:buNone/>
                       </a:pPr>
                       <a:r>
-                        <a:rPr lang="en-US" sz="1200" dirty="0"/>
+                        <a:rPr lang="en-US" sz="1200" dirty="0">
+                          <a:solidFill>
+                            <a:srgbClr val="000000"/>
+                          </a:solidFill>
+                          <a:latin typeface="Ubuntu"/>
+                        </a:rPr>
                         <a:t>— </a:t>
                       </a:r>
                       <a:endParaRPr lang="en-US" sz="1200" dirty="0"/>
@@ -11628,7 +12374,12 @@
                         <a:buNone/>
                       </a:pPr>
                       <a:r>
-                        <a:rPr lang="en-US" sz="1200" dirty="0"/>
+                        <a:rPr lang="en-US" sz="1200" dirty="0">
+                          <a:solidFill>
+                            <a:srgbClr val="000000"/>
+                          </a:solidFill>
+                          <a:latin typeface="Ubuntu"/>
+                        </a:rPr>
                         <a:t>Point C </a:t>
                       </a:r>
                       <a:endParaRPr lang="en-US" sz="1200" dirty="0"/>
@@ -11666,7 +12417,12 @@
                         <a:buNone/>
                       </a:pPr>
                       <a:r>
-                        <a:rPr lang="en-US" sz="1200" dirty="0"/>
+                        <a:rPr lang="en-US" sz="1200" dirty="0">
+                          <a:solidFill>
+                            <a:srgbClr val="000000"/>
+                          </a:solidFill>
+                          <a:latin typeface="Ubuntu"/>
+                        </a:rPr>
                         <a:t>64 </a:t>
                       </a:r>
                       <a:endParaRPr lang="en-US" sz="1200" dirty="0"/>
@@ -11704,7 +12460,12 @@
                         <a:buNone/>
                       </a:pPr>
                       <a:r>
-                        <a:rPr lang="en-US" sz="1200" dirty="0"/>
+                        <a:rPr lang="en-US" sz="1200" dirty="0">
+                          <a:solidFill>
+                            <a:srgbClr val="000000"/>
+                          </a:solidFill>
+                          <a:latin typeface="Ubuntu"/>
+                        </a:rPr>
                         <a:t>56 </a:t>
                       </a:r>
                       <a:endParaRPr lang="en-US" sz="1200" dirty="0"/>
@@ -11742,7 +12503,12 @@
                         <a:buNone/>
                       </a:pPr>
                       <a:r>
-                        <a:rPr lang="en-US" sz="1200" dirty="0"/>
+                        <a:rPr lang="en-US" sz="1200" dirty="0">
+                          <a:solidFill>
+                            <a:srgbClr val="000000"/>
+                          </a:solidFill>
+                          <a:latin typeface="Ubuntu"/>
+                        </a:rPr>
                         <a:t>— </a:t>
                       </a:r>
                       <a:endParaRPr lang="en-US" sz="1200" dirty="0"/>
@@ -11850,7 +12616,12 @@
                         <a:buNone/>
                       </a:pPr>
                       <a:r>
-                        <a:rPr lang="en-US" sz="1200" dirty="0"/>
+                        <a:rPr lang="en-US" sz="1200" dirty="0">
+                          <a:solidFill>
+                            <a:srgbClr val="000000"/>
+                          </a:solidFill>
+                          <a:latin typeface="Ubuntu"/>
+                        </a:rPr>
                         <a:t>Point D </a:t>
                       </a:r>
                       <a:endParaRPr lang="en-US" sz="1200" dirty="0"/>
@@ -11888,7 +12659,12 @@
                         <a:buNone/>
                       </a:pPr>
                       <a:r>
-                        <a:rPr lang="en-US" sz="1200" dirty="0"/>
+                        <a:rPr lang="en-US" sz="1200" dirty="0">
+                          <a:solidFill>
+                            <a:srgbClr val="000000"/>
+                          </a:solidFill>
+                          <a:latin typeface="Ubuntu"/>
+                        </a:rPr>
                         <a:t>37 </a:t>
                       </a:r>
                       <a:endParaRPr lang="en-US" sz="1200" dirty="0"/>
@@ -11926,7 +12702,12 @@
                         <a:buNone/>
                       </a:pPr>
                       <a:r>
-                        <a:rPr lang="en-US" sz="1200" dirty="0"/>
+                        <a:rPr lang="en-US" sz="1200" dirty="0">
+                          <a:solidFill>
+                            <a:srgbClr val="000000"/>
+                          </a:solidFill>
+                          <a:latin typeface="Ubuntu"/>
+                        </a:rPr>
                         <a:t>32 </a:t>
                       </a:r>
                       <a:endParaRPr lang="en-US" sz="1200" dirty="0"/>
@@ -11964,7 +12745,12 @@
                         <a:buNone/>
                       </a:pPr>
                       <a:r>
-                        <a:rPr lang="en-US" sz="1200" dirty="0"/>
+                        <a:rPr lang="en-US" sz="1200" dirty="0">
+                          <a:solidFill>
+                            <a:srgbClr val="000000"/>
+                          </a:solidFill>
+                          <a:latin typeface="Ubuntu"/>
+                        </a:rPr>
                         <a:t>91 </a:t>
                       </a:r>
                       <a:endParaRPr lang="en-US" sz="1200" dirty="0"/>
@@ -12002,7 +12788,12 @@
                         <a:buNone/>
                       </a:pPr>
                       <a:r>
-                        <a:rPr lang="en-US" sz="1200" dirty="0"/>
+                        <a:rPr lang="en-US" sz="1200" dirty="0">
+                          <a:solidFill>
+                            <a:srgbClr val="000000"/>
+                          </a:solidFill>
+                          <a:latin typeface="Ubuntu"/>
+                        </a:rPr>
                         <a:t>— </a:t>
                       </a:r>
                       <a:endParaRPr lang="en-US" sz="1200" dirty="0"/>
@@ -12076,7 +12867,12 @@
                         <a:buNone/>
                       </a:pPr>
                       <a:r>
-                        <a:rPr lang="en-US" sz="1200" dirty="0"/>
+                        <a:rPr lang="en-US" sz="1200" dirty="0">
+                          <a:solidFill>
+                            <a:srgbClr val="000000"/>
+                          </a:solidFill>
+                          <a:latin typeface="Ubuntu"/>
+                        </a:rPr>
                         <a:t>Point E </a:t>
                       </a:r>
                       <a:endParaRPr lang="en-US" sz="1200" dirty="0"/>
@@ -12114,7 +12910,12 @@
                         <a:buNone/>
                       </a:pPr>
                       <a:r>
-                        <a:rPr lang="en-US" sz="1200" dirty="0"/>
+                        <a:rPr lang="en-US" sz="1200" dirty="0">
+                          <a:solidFill>
+                            <a:srgbClr val="000000"/>
+                          </a:solidFill>
+                          <a:latin typeface="Ubuntu"/>
+                        </a:rPr>
                         <a:t>93 </a:t>
                       </a:r>
                       <a:endParaRPr lang="en-US" sz="1200" dirty="0"/>
@@ -12152,7 +12953,12 @@
                         <a:buNone/>
                       </a:pPr>
                       <a:r>
-                        <a:rPr lang="en-US" sz="1200" dirty="0"/>
+                        <a:rPr lang="en-US" sz="1200" dirty="0">
+                          <a:solidFill>
+                            <a:srgbClr val="000000"/>
+                          </a:solidFill>
+                          <a:latin typeface="Ubuntu"/>
+                        </a:rPr>
                         <a:t>35 </a:t>
                       </a:r>
                       <a:endParaRPr lang="en-US" sz="1200" dirty="0"/>
@@ -12190,7 +12996,12 @@
                         <a:buNone/>
                       </a:pPr>
                       <a:r>
-                        <a:rPr lang="en-US" sz="1200" dirty="0"/>
+                        <a:rPr lang="en-US" sz="1200" dirty="0">
+                          <a:solidFill>
+                            <a:srgbClr val="000000"/>
+                          </a:solidFill>
+                          <a:latin typeface="Ubuntu"/>
+                        </a:rPr>
                         <a:t>54 </a:t>
                       </a:r>
                       <a:endParaRPr lang="en-US" sz="1200" dirty="0"/>
@@ -12228,7 +13039,12 @@
                         <a:buNone/>
                       </a:pPr>
                       <a:r>
-                        <a:rPr lang="en-US" sz="1200" dirty="0"/>
+                        <a:rPr lang="en-US" sz="1200" dirty="0">
+                          <a:solidFill>
+                            <a:srgbClr val="000000"/>
+                          </a:solidFill>
+                          <a:latin typeface="Ubuntu"/>
+                        </a:rPr>
                         <a:t>43 </a:t>
                       </a:r>
                       <a:endParaRPr lang="en-US" sz="1200" dirty="0"/>
@@ -12266,7 +13082,12 @@
                         <a:buNone/>
                       </a:pPr>
                       <a:r>
-                        <a:rPr lang="en-US" sz="1200" dirty="0"/>
+                        <a:rPr lang="en-US" sz="1200" dirty="0">
+                          <a:solidFill>
+                            <a:srgbClr val="000000"/>
+                          </a:solidFill>
+                          <a:latin typeface="Ubuntu"/>
+                        </a:rPr>
                         <a:t>— </a:t>
                       </a:r>
                       <a:endParaRPr lang="en-US" sz="1200" dirty="0"/>
@@ -12393,7 +13214,12 @@
                         <a:buNone/>
                       </a:pPr>
                       <a:r>
-                        <a:rPr lang="en-US" sz="1200" dirty="0"/>
+                        <a:rPr lang="en-US" sz="1200" dirty="0">
+                          <a:solidFill>
+                            <a:srgbClr val="000000"/>
+                          </a:solidFill>
+                          <a:latin typeface="Ubuntu"/>
+                        </a:rPr>
                         <a:t>Next, we see a table with special formatting in various locations. Notice how the formatting for the header row and sub header rows is preserved. </a:t>
                       </a:r>
                       <a:endParaRPr lang="en-US" sz="1200" dirty="0"/>
@@ -12520,7 +13346,12 @@
                         <a:buNone/>
                       </a:pPr>
                       <a:r>
-                        <a:rPr lang="en-US" sz="1200" dirty="0"/>
+                        <a:rPr lang="en-US" sz="1200" b="1" dirty="0">
+                          <a:solidFill>
+                            <a:srgbClr val="FFFFFF"/>
+                          </a:solidFill>
+                          <a:latin typeface="Ubuntu"/>
+                        </a:rPr>
                         <a:t>College </a:t>
                       </a:r>
                       <a:endParaRPr lang="en-US" sz="1200" dirty="0"/>
@@ -12558,7 +13389,12 @@
                         <a:buNone/>
                       </a:pPr>
                       <a:r>
-                        <a:rPr lang="en-US" sz="1200" dirty="0"/>
+                        <a:rPr lang="en-US" sz="1200" b="1" dirty="0">
+                          <a:solidFill>
+                            <a:srgbClr val="FFFFFF"/>
+                          </a:solidFill>
+                          <a:latin typeface="Ubuntu"/>
+                        </a:rPr>
                         <a:t>New students </a:t>
                       </a:r>
                       <a:endParaRPr lang="en-US" sz="1200" dirty="0"/>
@@ -12596,7 +13432,12 @@
                         <a:buNone/>
                       </a:pPr>
                       <a:r>
-                        <a:rPr lang="en-US" sz="1200" dirty="0"/>
+                        <a:rPr lang="en-US" sz="1200" b="1" dirty="0">
+                          <a:solidFill>
+                            <a:srgbClr val="FFFFFF"/>
+                          </a:solidFill>
+                          <a:latin typeface="Ubuntu"/>
+                        </a:rPr>
                         <a:t>Graduating students </a:t>
                       </a:r>
                       <a:endParaRPr lang="en-US" sz="1200" dirty="0"/>
@@ -12634,7 +13475,12 @@
                         <a:buNone/>
                       </a:pPr>
                       <a:r>
-                        <a:rPr lang="en-US" sz="1200" dirty="0"/>
+                        <a:rPr lang="en-US" sz="1200" b="1" dirty="0">
+                          <a:solidFill>
+                            <a:srgbClr val="FFFFFF"/>
+                          </a:solidFill>
+                          <a:latin typeface="Ubuntu"/>
+                        </a:rPr>
                         <a:t>Change </a:t>
                       </a:r>
                       <a:endParaRPr lang="en-US" sz="1200" dirty="0"/>
@@ -12708,7 +13554,12 @@
                         <a:buNone/>
                       </a:pPr>
                       <a:r>
-                        <a:rPr lang="en-US" sz="1200" dirty="0"/>
+                        <a:rPr lang="en-US" sz="1200" i="1" dirty="0">
+                          <a:solidFill>
+                            <a:srgbClr val="808080"/>
+                          </a:solidFill>
+                          <a:latin typeface="Ubuntu"/>
+                        </a:rPr>
                         <a:t>Undergraduate</a:t>
                       </a:r>
                       <a:r>
@@ -12825,7 +13676,12 @@
                         <a:buNone/>
                       </a:pPr>
                       <a:r>
-                        <a:rPr lang="en-US" sz="1200" dirty="0"/>
+                        <a:rPr lang="en-US" sz="1200" dirty="0">
+                          <a:solidFill>
+                            <a:srgbClr val="000000"/>
+                          </a:solidFill>
+                          <a:latin typeface="Ubuntu"/>
+                        </a:rPr>
                         <a:t>Cedar University </a:t>
                       </a:r>
                       <a:endParaRPr lang="en-US" sz="1200" dirty="0"/>
@@ -12863,7 +13719,12 @@
                         <a:buNone/>
                       </a:pPr>
                       <a:r>
-                        <a:rPr lang="en-US" sz="1200" dirty="0"/>
+                        <a:rPr lang="en-US" sz="1200" dirty="0">
+                          <a:solidFill>
+                            <a:srgbClr val="000000"/>
+                          </a:solidFill>
+                          <a:latin typeface="Ubuntu"/>
+                        </a:rPr>
                         <a:t>110 </a:t>
                       </a:r>
                       <a:endParaRPr lang="en-US" sz="1200" dirty="0"/>
@@ -12901,7 +13762,12 @@
                         <a:buNone/>
                       </a:pPr>
                       <a:r>
-                        <a:rPr lang="en-US" sz="1200" dirty="0"/>
+                        <a:rPr lang="en-US" sz="1200" dirty="0">
+                          <a:solidFill>
+                            <a:srgbClr val="000000"/>
+                          </a:solidFill>
+                          <a:latin typeface="Ubuntu"/>
+                        </a:rPr>
                         <a:t>103 </a:t>
                       </a:r>
                       <a:endParaRPr lang="en-US" sz="1200" dirty="0"/>
@@ -12939,7 +13805,12 @@
                         <a:buNone/>
                       </a:pPr>
                       <a:r>
-                        <a:rPr lang="en-US" sz="1200" dirty="0"/>
+                        <a:rPr lang="en-US" sz="1200" dirty="0">
+                          <a:solidFill>
+                            <a:srgbClr val="000000"/>
+                          </a:solidFill>
+                          <a:latin typeface="Ubuntu"/>
+                        </a:rPr>
                         <a:t>+7 </a:t>
                       </a:r>
                       <a:endParaRPr lang="en-US" sz="1200" dirty="0"/>
@@ -12979,7 +13850,12 @@
                         <a:buNone/>
                       </a:pPr>
                       <a:r>
-                        <a:rPr lang="en-US" sz="1200" dirty="0"/>
+                        <a:rPr lang="en-US" sz="1200" dirty="0">
+                          <a:solidFill>
+                            <a:srgbClr val="000000"/>
+                          </a:solidFill>
+                          <a:latin typeface="Ubuntu"/>
+                        </a:rPr>
                         <a:t>Oak Institute </a:t>
                       </a:r>
                       <a:endParaRPr lang="en-US" sz="1200" dirty="0"/>
@@ -13017,7 +13893,12 @@
                         <a:buNone/>
                       </a:pPr>
                       <a:r>
-                        <a:rPr lang="en-US" sz="1200" dirty="0"/>
+                        <a:rPr lang="en-US" sz="1200" dirty="0">
+                          <a:solidFill>
+                            <a:srgbClr val="000000"/>
+                          </a:solidFill>
+                          <a:latin typeface="Ubuntu"/>
+                        </a:rPr>
                         <a:t>202 </a:t>
                       </a:r>
                       <a:endParaRPr lang="en-US" sz="1200" dirty="0"/>
@@ -13055,7 +13936,12 @@
                         <a:buNone/>
                       </a:pPr>
                       <a:r>
-                        <a:rPr lang="en-US" sz="1200" dirty="0"/>
+                        <a:rPr lang="en-US" sz="1200" dirty="0">
+                          <a:solidFill>
+                            <a:srgbClr val="000000"/>
+                          </a:solidFill>
+                          <a:latin typeface="Ubuntu"/>
+                        </a:rPr>
                         <a:t>210 </a:t>
                       </a:r>
                       <a:endParaRPr lang="en-US" sz="1200" dirty="0"/>
@@ -13093,7 +13979,12 @@
                         <a:buNone/>
                       </a:pPr>
                       <a:r>
-                        <a:rPr lang="en-US" sz="1200" dirty="0"/>
+                        <a:rPr lang="en-US" sz="1200" dirty="0">
+                          <a:solidFill>
+                            <a:srgbClr val="000000"/>
+                          </a:solidFill>
+                          <a:latin typeface="Ubuntu"/>
+                        </a:rPr>
                         <a:t>-8 </a:t>
                       </a:r>
                       <a:endParaRPr lang="en-US" sz="1200" dirty="0"/>
@@ -13167,7 +14058,12 @@
                         <a:buNone/>
                       </a:pPr>
                       <a:r>
-                        <a:rPr lang="en-US" sz="1200" dirty="0"/>
+                        <a:rPr lang="en-US" sz="1200" i="1" dirty="0">
+                          <a:solidFill>
+                            <a:srgbClr val="808080"/>
+                          </a:solidFill>
+                          <a:latin typeface="Ubuntu"/>
+                        </a:rPr>
                         <a:t>Graduate</a:t>
                       </a:r>
                       <a:r>
@@ -13284,7 +14180,12 @@
                         <a:buNone/>
                       </a:pPr>
                       <a:r>
-                        <a:rPr lang="en-US" sz="1200" dirty="0"/>
+                        <a:rPr lang="en-US" sz="1200" dirty="0">
+                          <a:solidFill>
+                            <a:srgbClr val="000000"/>
+                          </a:solidFill>
+                          <a:latin typeface="Ubuntu"/>
+                        </a:rPr>
                         <a:t>Cedar University </a:t>
                       </a:r>
                       <a:endParaRPr lang="en-US" sz="1200" dirty="0"/>
@@ -13322,7 +14223,12 @@
                         <a:buNone/>
                       </a:pPr>
                       <a:r>
-                        <a:rPr lang="en-US" sz="1200" dirty="0"/>
+                        <a:rPr lang="en-US" sz="1200" dirty="0">
+                          <a:solidFill>
+                            <a:srgbClr val="000000"/>
+                          </a:solidFill>
+                          <a:latin typeface="Ubuntu"/>
+                        </a:rPr>
                         <a:t>24 </a:t>
                       </a:r>
                       <a:endParaRPr lang="en-US" sz="1200" dirty="0"/>
@@ -13360,7 +14266,12 @@
                         <a:buNone/>
                       </a:pPr>
                       <a:r>
-                        <a:rPr lang="en-US" sz="1200" dirty="0"/>
+                        <a:rPr lang="en-US" sz="1200" dirty="0">
+                          <a:solidFill>
+                            <a:srgbClr val="000000"/>
+                          </a:solidFill>
+                          <a:latin typeface="Ubuntu"/>
+                        </a:rPr>
                         <a:t>20 </a:t>
                       </a:r>
                       <a:endParaRPr lang="en-US" sz="1200" dirty="0"/>
@@ -13398,7 +14309,12 @@
                         <a:buNone/>
                       </a:pPr>
                       <a:r>
-                        <a:rPr lang="en-US" sz="1200" dirty="0"/>
+                        <a:rPr lang="en-US" sz="1200" dirty="0">
+                          <a:solidFill>
+                            <a:srgbClr val="000000"/>
+                          </a:solidFill>
+                          <a:latin typeface="Ubuntu"/>
+                        </a:rPr>
                         <a:t>+4 </a:t>
                       </a:r>
                       <a:endParaRPr lang="en-US" sz="1200" dirty="0"/>
@@ -13438,7 +14354,12 @@
                         <a:buNone/>
                       </a:pPr>
                       <a:r>
-                        <a:rPr lang="en-US" sz="1200" dirty="0"/>
+                        <a:rPr lang="en-US" sz="1200" dirty="0">
+                          <a:solidFill>
+                            <a:srgbClr val="000000"/>
+                          </a:solidFill>
+                          <a:latin typeface="Ubuntu"/>
+                        </a:rPr>
                         <a:t>Elm College </a:t>
                       </a:r>
                       <a:endParaRPr lang="en-US" sz="1200" dirty="0"/>
@@ -13476,7 +14397,12 @@
                         <a:buNone/>
                       </a:pPr>
                       <a:r>
-                        <a:rPr lang="en-US" sz="1200" dirty="0"/>
+                        <a:rPr lang="en-US" sz="1200" dirty="0">
+                          <a:solidFill>
+                            <a:srgbClr val="000000"/>
+                          </a:solidFill>
+                          <a:latin typeface="Ubuntu"/>
+                        </a:rPr>
                         <a:t>43 </a:t>
                       </a:r>
                       <a:endParaRPr lang="en-US" sz="1200" dirty="0"/>
@@ -13514,7 +14440,12 @@
                         <a:buNone/>
                       </a:pPr>
                       <a:r>
-                        <a:rPr lang="en-US" sz="1200" dirty="0"/>
+                        <a:rPr lang="en-US" sz="1200" dirty="0">
+                          <a:solidFill>
+                            <a:srgbClr val="000000"/>
+                          </a:solidFill>
+                          <a:latin typeface="Ubuntu"/>
+                        </a:rPr>
                         <a:t>53 </a:t>
                       </a:r>
                       <a:endParaRPr lang="en-US" sz="1200" dirty="0"/>
@@ -13552,7 +14483,12 @@
                         <a:buNone/>
                       </a:pPr>
                       <a:r>
-                        <a:rPr lang="en-US" sz="1200" dirty="0"/>
+                        <a:rPr lang="en-US" sz="1200" dirty="0">
+                          <a:solidFill>
+                            <a:srgbClr val="000000"/>
+                          </a:solidFill>
+                          <a:latin typeface="Ubuntu"/>
+                        </a:rPr>
                         <a:t>-10 </a:t>
                       </a:r>
                       <a:endParaRPr lang="en-US" sz="1200" dirty="0"/>
@@ -13592,7 +14528,12 @@
                         <a:buNone/>
                       </a:pPr>
                       <a:r>
-                        <a:rPr lang="en-US" sz="1200" dirty="0"/>
+                        <a:rPr lang="en-US" sz="1200" dirty="0">
+                          <a:solidFill>
+                            <a:srgbClr val="000000"/>
+                          </a:solidFill>
+                          <a:latin typeface="Ubuntu"/>
+                        </a:rPr>
                         <a:t>Total </a:t>
                       </a:r>
                       <a:endParaRPr lang="en-US" sz="1200" dirty="0"/>
@@ -13630,7 +14571,12 @@
                         <a:buNone/>
                       </a:pPr>
                       <a:r>
-                        <a:rPr lang="en-US" sz="1200" dirty="0"/>
+                        <a:rPr lang="en-US" sz="1200" dirty="0">
+                          <a:solidFill>
+                            <a:srgbClr val="000000"/>
+                          </a:solidFill>
+                          <a:latin typeface="Ubuntu"/>
+                        </a:rPr>
                         <a:t>998 </a:t>
                       </a:r>
                       <a:endParaRPr lang="en-US" sz="1200" dirty="0"/>
@@ -13668,7 +14614,12 @@
                         <a:buNone/>
                       </a:pPr>
                       <a:r>
-                        <a:rPr lang="en-US" sz="1200" dirty="0"/>
+                        <a:rPr lang="en-US" sz="1200" dirty="0">
+                          <a:solidFill>
+                            <a:srgbClr val="000000"/>
+                          </a:solidFill>
+                          <a:latin typeface="Ubuntu"/>
+                        </a:rPr>
                         <a:t>908 </a:t>
                       </a:r>
                       <a:endParaRPr lang="en-US" sz="1200" dirty="0"/>
@@ -13706,7 +14657,12 @@
                         <a:buNone/>
                       </a:pPr>
                       <a:r>
-                        <a:rPr lang="en-US" sz="1200" dirty="0"/>
+                        <a:rPr lang="en-US" sz="1200" dirty="0">
+                          <a:solidFill>
+                            <a:srgbClr val="000000"/>
+                          </a:solidFill>
+                          <a:latin typeface="Ubuntu"/>
+                        </a:rPr>
                         <a:t>90 </a:t>
                       </a:r>
                       <a:endParaRPr lang="en-US" sz="1200" dirty="0"/>
@@ -13746,7 +14702,12 @@
                         <a:buNone/>
                       </a:pPr>
                       <a:r>
-                        <a:rPr lang="en-US" sz="1200" dirty="0"/>
+                        <a:rPr lang="en-US" sz="1000" i="1" dirty="0">
+                          <a:solidFill>
+                            <a:srgbClr val="808080"/>
+                          </a:solidFill>
+                          <a:latin typeface="Ubuntu"/>
+                        </a:rPr>
                         <a:t>Source:</a:t>
                       </a:r>
                       <a:r>
@@ -13882,7 +14843,12 @@
                         <a:buNone/>
                       </a:pPr>
                       <a:r>
-                        <a:rPr lang="en-US" sz="1200" dirty="0"/>
+                        <a:rPr lang="en-US" sz="1200" dirty="0">
+                          <a:solidFill>
+                            <a:srgbClr val="000000"/>
+                          </a:solidFill>
+                          <a:latin typeface="Ubuntu"/>
+                        </a:rPr>
                         <a:t>Next, we have something a little more complex, a nested table, i.e. a table inside another table. Additionally, the inner table has some of its cells merged. The table is displayed horizontally centered. </a:t>
                       </a:r>
                       <a:endParaRPr lang="en-US" sz="1200" dirty="0"/>
@@ -14096,7 +15062,12 @@
                         <a:buNone/>
                       </a:pPr>
                       <a:r>
-                        <a:rPr lang="en-US" sz="1200" dirty="0"/>
+                        <a:rPr lang="en-US" sz="1200" dirty="0">
+                          <a:solidFill>
+                            <a:srgbClr val="000000"/>
+                          </a:solidFill>
+                          <a:latin typeface="Ubuntu"/>
+                        </a:rPr>
                         <a:t>Next, we see a table with special formatting in various locations. Notice how the formatting for the header row and sub header rows is preserved. </a:t>
                       </a:r>
                       <a:endParaRPr lang="en-US" sz="1200" dirty="0"/>
@@ -14223,7 +15194,12 @@
                         <a:buNone/>
                       </a:pPr>
                       <a:r>
-                        <a:rPr lang="en-US" sz="1200" dirty="0"/>
+                        <a:rPr lang="en-US" sz="1200" dirty="0">
+                          <a:solidFill>
+                            <a:srgbClr val="000000"/>
+                          </a:solidFill>
+                          <a:latin typeface="Ubuntu"/>
+                        </a:rPr>
                         <a:t>One </a:t>
                       </a:r>
                       <a:endParaRPr lang="en-US" sz="1200" dirty="0"/>
@@ -14261,7 +15237,12 @@
                         <a:buNone/>
                       </a:pPr>
                       <a:r>
-                        <a:rPr lang="en-US" sz="1200" dirty="0"/>
+                        <a:rPr lang="en-US" sz="1200" dirty="0">
+                          <a:solidFill>
+                            <a:srgbClr val="000000"/>
+                          </a:solidFill>
+                          <a:latin typeface="Ubuntu"/>
+                        </a:rPr>
                         <a:t>Two </a:t>
                       </a:r>
                       <a:endParaRPr lang="en-US" sz="1200" dirty="0"/>
@@ -14299,7 +15280,12 @@
                         <a:buNone/>
                       </a:pPr>
                       <a:r>
-                        <a:rPr lang="en-US" sz="1200" dirty="0"/>
+                        <a:rPr lang="en-US" sz="1200" dirty="0">
+                          <a:solidFill>
+                            <a:srgbClr val="000000"/>
+                          </a:solidFill>
+                          <a:latin typeface="Ubuntu"/>
+                        </a:rPr>
                         <a:t>To the left is a table inside a table, with some cells merged. </a:t>
                       </a:r>
                       <a:endParaRPr lang="en-US" sz="1200" dirty="0"/>
@@ -14368,7 +15354,12 @@
                         <a:buNone/>
                       </a:pPr>
                       <a:r>
-                        <a:rPr lang="en-US" sz="1200" dirty="0"/>
+                        <a:rPr lang="en-US" sz="1200" dirty="0">
+                          <a:solidFill>
+                            <a:srgbClr val="000000"/>
+                          </a:solidFill>
+                          <a:latin typeface="Ubuntu"/>
+                        </a:rPr>
                         <a:t>Three </a:t>
                       </a:r>
                       <a:endParaRPr lang="en-US" sz="1200" dirty="0"/>
@@ -14524,7 +15515,12 @@
                         <a:buNone/>
                       </a:pPr>
                       <a:r>
-                        <a:rPr lang="en-US" sz="1200" dirty="0"/>
+                        <a:rPr lang="en-US" sz="1200" dirty="0">
+                          <a:solidFill>
+                            <a:srgbClr val="000000"/>
+                          </a:solidFill>
+                          <a:latin typeface="Ubuntu"/>
+                        </a:rPr>
                         <a:t>Four </a:t>
                       </a:r>
                       <a:endParaRPr lang="en-US" sz="1200" dirty="0"/>
@@ -14842,7 +15838,12 @@
                         <a:buNone/>
                       </a:pPr>
                       <a:r>
-                        <a:rPr lang="en-US" sz="1200" dirty="0"/>
+                        <a:rPr lang="en-US" sz="1200" dirty="0">
+                          <a:solidFill>
+                            <a:srgbClr val="000000"/>
+                          </a:solidFill>
+                          <a:latin typeface="Ubuntu"/>
+                        </a:rPr>
                         <a:t>We end with a fancy calendar, note how much of the original formatting is preserved. Note that this table will only display correctly on relatively wide screens. In general, very wide tables or tables whose cells have fixed width requirements don’t fare well in ebooks. </a:t>
                       </a:r>
                       <a:endParaRPr lang="en-US" sz="1200" dirty="0"/>
@@ -15259,7 +16260,12 @@
                         <a:buNone/>
                       </a:pPr>
                       <a:r>
-                        <a:rPr lang="en-US" sz="1200" dirty="0"/>
+                        <a:rPr lang="en-US" sz="1200" dirty="0">
+                          <a:solidFill>
+                            <a:srgbClr val="365F91"/>
+                          </a:solidFill>
+                          <a:latin typeface="Ubuntu"/>
+                        </a:rPr>
                         <a:t>December 2007 </a:t>
                       </a:r>
                       <a:endParaRPr lang="en-US" sz="1200" dirty="0"/>
@@ -15676,7 +16682,12 @@
                         <a:buNone/>
                       </a:pPr>
                       <a:r>
-                        <a:rPr lang="en-US" sz="1200" dirty="0"/>
+                        <a:rPr lang="en-US" sz="1200" dirty="0">
+                          <a:solidFill>
+                            <a:srgbClr val="365F91"/>
+                          </a:solidFill>
+                          <a:latin typeface="Ubuntu"/>
+                        </a:rPr>
                         <a:t>Sun </a:t>
                       </a:r>
                       <a:endParaRPr lang="en-US" sz="1200" dirty="0"/>
@@ -15748,7 +16759,12 @@
                         <a:buNone/>
                       </a:pPr>
                       <a:r>
-                        <a:rPr lang="en-US" sz="1200" dirty="0"/>
+                        <a:rPr lang="en-US" sz="1200" dirty="0">
+                          <a:solidFill>
+                            <a:srgbClr val="7F7F7F"/>
+                          </a:solidFill>
+                          <a:latin typeface="Ubuntu"/>
+                        </a:rPr>
                         <a:t>Mon </a:t>
                       </a:r>
                       <a:endParaRPr lang="en-US" sz="1200" dirty="0"/>
@@ -15820,7 +16836,12 @@
                         <a:buNone/>
                       </a:pPr>
                       <a:r>
-                        <a:rPr lang="en-US" sz="1200" dirty="0"/>
+                        <a:rPr lang="en-US" sz="1200" dirty="0">
+                          <a:solidFill>
+                            <a:srgbClr val="7F7F7F"/>
+                          </a:solidFill>
+                          <a:latin typeface="Ubuntu"/>
+                        </a:rPr>
                         <a:t>Tue </a:t>
                       </a:r>
                       <a:endParaRPr lang="en-US" sz="1200" dirty="0"/>
@@ -15892,7 +16913,12 @@
                         <a:buNone/>
                       </a:pPr>
                       <a:r>
-                        <a:rPr lang="en-US" sz="1200" dirty="0"/>
+                        <a:rPr lang="en-US" sz="1200" dirty="0">
+                          <a:solidFill>
+                            <a:srgbClr val="7F7F7F"/>
+                          </a:solidFill>
+                          <a:latin typeface="Ubuntu"/>
+                        </a:rPr>
                         <a:t>Wed </a:t>
                       </a:r>
                       <a:endParaRPr lang="en-US" sz="1200" dirty="0"/>
@@ -15964,7 +16990,12 @@
                         <a:buNone/>
                       </a:pPr>
                       <a:r>
-                        <a:rPr lang="en-US" sz="1200" dirty="0"/>
+                        <a:rPr lang="en-US" sz="1200" dirty="0">
+                          <a:solidFill>
+                            <a:srgbClr val="7F7F7F"/>
+                          </a:solidFill>
+                          <a:latin typeface="Ubuntu"/>
+                        </a:rPr>
                         <a:t>Thu </a:t>
                       </a:r>
                       <a:endParaRPr lang="en-US" sz="1200" dirty="0"/>
@@ -16036,7 +17067,12 @@
                         <a:buNone/>
                       </a:pPr>
                       <a:r>
-                        <a:rPr lang="en-US" sz="1200" dirty="0"/>
+                        <a:rPr lang="en-US" sz="1200" dirty="0">
+                          <a:solidFill>
+                            <a:srgbClr val="7F7F7F"/>
+                          </a:solidFill>
+                          <a:latin typeface="Ubuntu"/>
+                        </a:rPr>
                         <a:t>Fri </a:t>
                       </a:r>
                       <a:endParaRPr lang="en-US" sz="1200" dirty="0"/>
@@ -16108,7 +17144,12 @@
                         <a:buNone/>
                       </a:pPr>
                       <a:r>
-                        <a:rPr lang="en-US" sz="1200" dirty="0"/>
+                        <a:rPr lang="en-US" sz="1200" dirty="0">
+                          <a:solidFill>
+                            <a:srgbClr val="7F7F7F"/>
+                          </a:solidFill>
+                          <a:latin typeface="Ubuntu"/>
+                        </a:rPr>
                         <a:t>Sat </a:t>
                       </a:r>
                       <a:endParaRPr lang="en-US" sz="1200" dirty="0"/>
@@ -16585,7 +17626,12 @@
                         <a:buNone/>
                       </a:pPr>
                       <a:r>
-                        <a:rPr lang="en-US" sz="1200" dirty="0"/>
+                        <a:rPr lang="en-US" sz="1200" dirty="0">
+                          <a:solidFill>
+                            <a:srgbClr val="7F7F7F"/>
+                          </a:solidFill>
+                          <a:latin typeface="Ubuntu"/>
+                        </a:rPr>
                         <a:t>1 </a:t>
                       </a:r>
                       <a:endParaRPr lang="en-US" sz="1200" dirty="0"/>
@@ -17127,7 +18173,12 @@
                         <a:buNone/>
                       </a:pPr>
                       <a:r>
-                        <a:rPr lang="en-US" sz="1200" dirty="0"/>
+                        <a:rPr lang="en-US" sz="1200" dirty="0">
+                          <a:solidFill>
+                            <a:srgbClr val="365F91"/>
+                          </a:solidFill>
+                          <a:latin typeface="Ubuntu"/>
+                        </a:rPr>
                         <a:t>2 </a:t>
                       </a:r>
                       <a:endParaRPr lang="en-US" sz="1200" dirty="0"/>
@@ -17199,7 +18250,12 @@
                         <a:buNone/>
                       </a:pPr>
                       <a:r>
-                        <a:rPr lang="en-US" sz="1200" dirty="0"/>
+                        <a:rPr lang="en-US" sz="1200" dirty="0">
+                          <a:solidFill>
+                            <a:srgbClr val="7F7F7F"/>
+                          </a:solidFill>
+                          <a:latin typeface="Ubuntu"/>
+                        </a:rPr>
                         <a:t>3 </a:t>
                       </a:r>
                       <a:endParaRPr lang="en-US" sz="1200" dirty="0"/>
@@ -17271,7 +18327,12 @@
                         <a:buNone/>
                       </a:pPr>
                       <a:r>
-                        <a:rPr lang="en-US" sz="1200" dirty="0"/>
+                        <a:rPr lang="en-US" sz="1200" dirty="0">
+                          <a:solidFill>
+                            <a:srgbClr val="7F7F7F"/>
+                          </a:solidFill>
+                          <a:latin typeface="Ubuntu"/>
+                        </a:rPr>
                         <a:t>4 </a:t>
                       </a:r>
                       <a:endParaRPr lang="en-US" sz="1200" dirty="0"/>
@@ -17343,7 +18404,12 @@
                         <a:buNone/>
                       </a:pPr>
                       <a:r>
-                        <a:rPr lang="en-US" sz="1200" dirty="0"/>
+                        <a:rPr lang="en-US" sz="1200" dirty="0">
+                          <a:solidFill>
+                            <a:srgbClr val="7F7F7F"/>
+                          </a:solidFill>
+                          <a:latin typeface="Ubuntu"/>
+                        </a:rPr>
                         <a:t>5 </a:t>
                       </a:r>
                       <a:endParaRPr lang="en-US" sz="1200" dirty="0"/>
@@ -17415,7 +18481,12 @@
                         <a:buNone/>
                       </a:pPr>
                       <a:r>
-                        <a:rPr lang="en-US" sz="1200" dirty="0"/>
+                        <a:rPr lang="en-US" sz="1200" dirty="0">
+                          <a:solidFill>
+                            <a:srgbClr val="7F7F7F"/>
+                          </a:solidFill>
+                          <a:latin typeface="Ubuntu"/>
+                        </a:rPr>
                         <a:t>6 </a:t>
                       </a:r>
                       <a:endParaRPr lang="en-US" sz="1200" dirty="0"/>
@@ -17487,7 +18558,12 @@
                         <a:buNone/>
                       </a:pPr>
                       <a:r>
-                        <a:rPr lang="en-US" sz="1200" dirty="0"/>
+                        <a:rPr lang="en-US" sz="1200" dirty="0">
+                          <a:solidFill>
+                            <a:srgbClr val="7F7F7F"/>
+                          </a:solidFill>
+                          <a:latin typeface="Ubuntu"/>
+                        </a:rPr>
                         <a:t>7 </a:t>
                       </a:r>
                       <a:endParaRPr lang="en-US" sz="1200" dirty="0"/>
@@ -17559,7 +18635,12 @@
                         <a:buNone/>
                       </a:pPr>
                       <a:r>
-                        <a:rPr lang="en-US" sz="1200" dirty="0"/>
+                        <a:rPr lang="en-US" sz="1200" dirty="0">
+                          <a:solidFill>
+                            <a:srgbClr val="7F7F7F"/>
+                          </a:solidFill>
+                          <a:latin typeface="Ubuntu"/>
+                        </a:rPr>
                         <a:t>8 </a:t>
                       </a:r>
                       <a:endParaRPr lang="en-US" sz="1200" dirty="0"/>
@@ -18101,7 +19182,12 @@
                         <a:buNone/>
                       </a:pPr>
                       <a:r>
-                        <a:rPr lang="en-US" sz="1200" dirty="0"/>
+                        <a:rPr lang="en-US" sz="1200" dirty="0">
+                          <a:solidFill>
+                            <a:srgbClr val="365F91"/>
+                          </a:solidFill>
+                          <a:latin typeface="Ubuntu"/>
+                        </a:rPr>
                         <a:t>9 </a:t>
                       </a:r>
                       <a:endParaRPr lang="en-US" sz="1200" dirty="0"/>
@@ -18173,7 +19259,12 @@
                         <a:buNone/>
                       </a:pPr>
                       <a:r>
-                        <a:rPr lang="en-US" sz="1200" dirty="0"/>
+                        <a:rPr lang="en-US" sz="1200" dirty="0">
+                          <a:solidFill>
+                            <a:srgbClr val="7F7F7F"/>
+                          </a:solidFill>
+                          <a:latin typeface="Ubuntu"/>
+                        </a:rPr>
                         <a:t>10 </a:t>
                       </a:r>
                       <a:endParaRPr lang="en-US" sz="1200" dirty="0"/>
@@ -18245,7 +19336,12 @@
                         <a:buNone/>
                       </a:pPr>
                       <a:r>
-                        <a:rPr lang="en-US" sz="1200" dirty="0"/>
+                        <a:rPr lang="en-US" sz="1200" dirty="0">
+                          <a:solidFill>
+                            <a:srgbClr val="7F7F7F"/>
+                          </a:solidFill>
+                          <a:latin typeface="Ubuntu"/>
+                        </a:rPr>
                         <a:t>11 </a:t>
                       </a:r>
                       <a:endParaRPr lang="en-US" sz="1200" dirty="0"/>
@@ -18317,7 +19413,12 @@
                         <a:buNone/>
                       </a:pPr>
                       <a:r>
-                        <a:rPr lang="en-US" sz="1200" dirty="0"/>
+                        <a:rPr lang="en-US" sz="1200" dirty="0">
+                          <a:solidFill>
+                            <a:srgbClr val="7F7F7F"/>
+                          </a:solidFill>
+                          <a:latin typeface="Ubuntu"/>
+                        </a:rPr>
                         <a:t>12 </a:t>
                       </a:r>
                       <a:endParaRPr lang="en-US" sz="1200" dirty="0"/>
@@ -18389,7 +19490,12 @@
                         <a:buNone/>
                       </a:pPr>
                       <a:r>
-                        <a:rPr lang="en-US" sz="1200" dirty="0"/>
+                        <a:rPr lang="en-US" sz="1200" dirty="0">
+                          <a:solidFill>
+                            <a:srgbClr val="7F7F7F"/>
+                          </a:solidFill>
+                          <a:latin typeface="Ubuntu"/>
+                        </a:rPr>
                         <a:t>13 </a:t>
                       </a:r>
                       <a:endParaRPr lang="en-US" sz="1200" dirty="0"/>
@@ -18461,7 +19567,12 @@
                         <a:buNone/>
                       </a:pPr>
                       <a:r>
-                        <a:rPr lang="en-US" sz="1200" dirty="0"/>
+                        <a:rPr lang="en-US" sz="1200" dirty="0">
+                          <a:solidFill>
+                            <a:srgbClr val="7F7F7F"/>
+                          </a:solidFill>
+                          <a:latin typeface="Ubuntu"/>
+                        </a:rPr>
                         <a:t>14 </a:t>
                       </a:r>
                       <a:endParaRPr lang="en-US" sz="1200" dirty="0"/>
@@ -18533,7 +19644,12 @@
                         <a:buNone/>
                       </a:pPr>
                       <a:r>
-                        <a:rPr lang="en-US" sz="1200" dirty="0"/>
+                        <a:rPr lang="en-US" sz="1200" dirty="0">
+                          <a:solidFill>
+                            <a:srgbClr val="7F7F7F"/>
+                          </a:solidFill>
+                          <a:latin typeface="Ubuntu"/>
+                        </a:rPr>
                         <a:t>15 </a:t>
                       </a:r>
                       <a:endParaRPr lang="en-US" sz="1200" dirty="0"/>
@@ -19075,7 +20191,12 @@
                         <a:buNone/>
                       </a:pPr>
                       <a:r>
-                        <a:rPr lang="en-US" sz="1200" dirty="0"/>
+                        <a:rPr lang="en-US" sz="1200" dirty="0">
+                          <a:solidFill>
+                            <a:srgbClr val="365F91"/>
+                          </a:solidFill>
+                          <a:latin typeface="Ubuntu"/>
+                        </a:rPr>
                         <a:t>16 </a:t>
                       </a:r>
                       <a:endParaRPr lang="en-US" sz="1200" dirty="0"/>
@@ -19147,7 +20268,12 @@
                         <a:buNone/>
                       </a:pPr>
                       <a:r>
-                        <a:rPr lang="en-US" sz="1200" dirty="0"/>
+                        <a:rPr lang="en-US" sz="1200" dirty="0">
+                          <a:solidFill>
+                            <a:srgbClr val="7F7F7F"/>
+                          </a:solidFill>
+                          <a:latin typeface="Ubuntu"/>
+                        </a:rPr>
                         <a:t>17 </a:t>
                       </a:r>
                       <a:endParaRPr lang="en-US" sz="1200" dirty="0"/>
@@ -19219,7 +20345,12 @@
                         <a:buNone/>
                       </a:pPr>
                       <a:r>
-                        <a:rPr lang="en-US" sz="1200" dirty="0"/>
+                        <a:rPr lang="en-US" sz="1200" dirty="0">
+                          <a:solidFill>
+                            <a:srgbClr val="7F7F7F"/>
+                          </a:solidFill>
+                          <a:latin typeface="Ubuntu"/>
+                        </a:rPr>
                         <a:t>18 </a:t>
                       </a:r>
                       <a:endParaRPr lang="en-US" sz="1200" dirty="0"/>
@@ -19291,7 +20422,12 @@
                         <a:buNone/>
                       </a:pPr>
                       <a:r>
-                        <a:rPr lang="en-US" sz="1200" dirty="0"/>
+                        <a:rPr lang="en-US" sz="1200" dirty="0">
+                          <a:solidFill>
+                            <a:srgbClr val="7F7F7F"/>
+                          </a:solidFill>
+                          <a:latin typeface="Ubuntu"/>
+                        </a:rPr>
                         <a:t>19 </a:t>
                       </a:r>
                       <a:endParaRPr lang="en-US" sz="1200" dirty="0"/>
@@ -19363,7 +20499,12 @@
                         <a:buNone/>
                       </a:pPr>
                       <a:r>
-                        <a:rPr lang="en-US" sz="1200" dirty="0"/>
+                        <a:rPr lang="en-US" sz="1200" dirty="0">
+                          <a:solidFill>
+                            <a:srgbClr val="7F7F7F"/>
+                          </a:solidFill>
+                          <a:latin typeface="Ubuntu"/>
+                        </a:rPr>
                         <a:t>20 </a:t>
                       </a:r>
                       <a:endParaRPr lang="en-US" sz="1200" dirty="0"/>
@@ -19435,7 +20576,12 @@
                         <a:buNone/>
                       </a:pPr>
                       <a:r>
-                        <a:rPr lang="en-US" sz="1200" dirty="0"/>
+                        <a:rPr lang="en-US" sz="1200" dirty="0">
+                          <a:solidFill>
+                            <a:srgbClr val="7F7F7F"/>
+                          </a:solidFill>
+                          <a:latin typeface="Ubuntu"/>
+                        </a:rPr>
                         <a:t>21 </a:t>
                       </a:r>
                       <a:endParaRPr lang="en-US" sz="1200" dirty="0"/>
@@ -19507,7 +20653,12 @@
                         <a:buNone/>
                       </a:pPr>
                       <a:r>
-                        <a:rPr lang="en-US" sz="1200" dirty="0"/>
+                        <a:rPr lang="en-US" sz="1200" dirty="0">
+                          <a:solidFill>
+                            <a:srgbClr val="7F7F7F"/>
+                          </a:solidFill>
+                          <a:latin typeface="Ubuntu"/>
+                        </a:rPr>
                         <a:t>22 </a:t>
                       </a:r>
                       <a:endParaRPr lang="en-US" sz="1200" dirty="0"/>

--- a/test/generator/baseline/gen.ods.to.pptx.pptx
+++ b/test/generator/baseline/gen.ods.to.pptx.pptx
@@ -22,6 +22,7 @@
     <p:sldId id="270" r:id="rId16"/>
     <p:sldId id="271" r:id="rId17"/>
     <p:sldId id="272" r:id="rId18"/>
+    <p:sldId id="273" r:id="rId19"/>
   </p:sldIdLst>
   <p:sldSz cx="9144000" cy="5143500"/>
   <p:notesSz cx="6858000" cy="9144000"/>
@@ -7978,6 +7979,986 @@
 </p:sld>
 </file>
 
+<file path=ppt/slides/slide18.xml><?xml version="1.0" encoding="utf-8"?>
+<p:sld xmlns:a="http://schemas.openxmlformats.org/drawingml/2006/main" xmlns:r="http://schemas.openxmlformats.org/officeDocument/2006/relationships" xmlns:p="http://schemas.openxmlformats.org/presentationml/2006/main">
+  <p:cSld>
+    <p:spTree>
+      <p:nvGrpSpPr>
+        <p:cNvPr id="1" name=""/>
+        <p:cNvGrpSpPr/>
+        <p:nvPr/>
+      </p:nvGrpSpPr>
+      <p:grpSpPr>
+        <a:xfrm>
+          <a:off x="0" y="0"/>
+          <a:ext cx="0" cy="0"/>
+          <a:chOff x="0" y="0"/>
+          <a:chExt cx="0" cy="0"/>
+        </a:xfrm>
+      </p:grpSpPr>
+      <p:sp>
+        <p:nvSpPr>
+          <p:cNvPr id="2" name="Title 2"/>
+          <p:cNvSpPr txBox="1"/>
+          <p:nvPr/>
+        </p:nvSpPr>
+        <p:spPr>
+          <a:xfrm>
+            <a:off x="457200" y="279400"/>
+            <a:ext cx="8229600" cy="711200"/>
+          </a:xfrm>
+          <a:prstGeom prst="rect">
+            <a:avLst/>
+          </a:prstGeom>
+          <a:noFill/>
+          <a:ln>
+            <a:noFill/>
+          </a:ln>
+        </p:spPr>
+        <p:txBody>
+          <a:bodyPr wrap="square" anchor="b" rtlCol="0">
+            <a:normAutofit/>
+          </a:bodyPr>
+          <a:lstStyle/>
+          <a:p>
+            <a:pPr>
+              <a:buNone/>
+            </a:pPr>
+            <a:r>
+              <a:rPr lang="en-US" sz="2800" b="1" dirty="0"/>
+              <a:t>Chart_Sheet</a:t>
+            </a:r>
+            <a:endParaRPr lang="en-US" sz="2800" dirty="0"/>
+          </a:p>
+        </p:txBody>
+      </p:sp>
+      <p:graphicFrame>
+        <p:nvGraphicFramePr>
+          <p:cNvPr id="3" name="Table 3"/>
+          <p:cNvGraphicFramePr>
+            <a:graphicFrameLocks noGrp="1"/>
+          </p:cNvGraphicFramePr>
+          <p:nvPr/>
+        </p:nvGraphicFramePr>
+        <p:xfrm>
+          <a:off x="457200" y="1143000"/>
+          <a:ext cx="8229600" cy="3683000"/>
+        </p:xfrm>
+        <a:graphic>
+          <a:graphicData uri="http://schemas.openxmlformats.org/drawingml/2006/table">
+            <a:tbl>
+              <a:tblPr firstRow="1"/>
+              <a:tblGrid>
+                <a:gridCol w="2224216"/>
+                <a:gridCol w="2001795"/>
+                <a:gridCol w="2001795"/>
+                <a:gridCol w="2001795"/>
+              </a:tblGrid>
+              <a:tr h="613833">
+                <a:tc gridSpan="4">
+                  <a:txBody>
+                    <a:bodyPr/>
+                    <a:lstStyle/>
+                    <a:p>
+                      <a:pPr>
+                        <a:buNone/>
+                      </a:pPr>
+                      <a:r>
+                        <a:rPr lang="en-US" sz="1200" b="1" dirty="0"/>
+                        <a:t>Chart Title</a:t>
+                      </a:r>
+                      <a:endParaRPr lang="en-US" sz="1200" dirty="0"/>
+                    </a:p>
+                  </a:txBody>
+                  <a:tcPr>
+                    <a:lnL w="9525">
+                      <a:solidFill>
+                        <a:srgbClr val="BFBFBF"/>
+                      </a:solidFill>
+                    </a:lnL>
+                    <a:lnR w="9525">
+                      <a:solidFill>
+                        <a:srgbClr val="BFBFBF"/>
+                      </a:solidFill>
+                    </a:lnR>
+                    <a:lnT w="9525">
+                      <a:solidFill>
+                        <a:srgbClr val="BFBFBF"/>
+                      </a:solidFill>
+                    </a:lnT>
+                    <a:lnB w="9525">
+                      <a:solidFill>
+                        <a:srgbClr val="BFBFBF"/>
+                      </a:solidFill>
+                    </a:lnB>
+                  </a:tcPr>
+                </a:tc>
+                <a:tc hMerge="1">
+                  <a:txBody>
+                    <a:bodyPr/>
+                    <a:lstStyle/>
+                    <a:p/>
+                  </a:txBody>
+                  <a:tcPr>
+                    <a:lnL w="9525">
+                      <a:solidFill>
+                        <a:srgbClr val="BFBFBF"/>
+                      </a:solidFill>
+                    </a:lnL>
+                    <a:lnR w="9525">
+                      <a:solidFill>
+                        <a:srgbClr val="BFBFBF"/>
+                      </a:solidFill>
+                    </a:lnR>
+                    <a:lnT w="9525">
+                      <a:solidFill>
+                        <a:srgbClr val="BFBFBF"/>
+                      </a:solidFill>
+                    </a:lnT>
+                    <a:lnB w="9525">
+                      <a:solidFill>
+                        <a:srgbClr val="BFBFBF"/>
+                      </a:solidFill>
+                    </a:lnB>
+                  </a:tcPr>
+                </a:tc>
+                <a:tc hMerge="1">
+                  <a:txBody>
+                    <a:bodyPr/>
+                    <a:lstStyle/>
+                    <a:p/>
+                  </a:txBody>
+                  <a:tcPr>
+                    <a:lnL w="9525">
+                      <a:solidFill>
+                        <a:srgbClr val="BFBFBF"/>
+                      </a:solidFill>
+                    </a:lnL>
+                    <a:lnR w="9525">
+                      <a:solidFill>
+                        <a:srgbClr val="BFBFBF"/>
+                      </a:solidFill>
+                    </a:lnR>
+                    <a:lnT w="9525">
+                      <a:solidFill>
+                        <a:srgbClr val="BFBFBF"/>
+                      </a:solidFill>
+                    </a:lnT>
+                    <a:lnB w="9525">
+                      <a:solidFill>
+                        <a:srgbClr val="BFBFBF"/>
+                      </a:solidFill>
+                    </a:lnB>
+                  </a:tcPr>
+                </a:tc>
+                <a:tc hMerge="1">
+                  <a:txBody>
+                    <a:bodyPr/>
+                    <a:lstStyle/>
+                    <a:p/>
+                  </a:txBody>
+                  <a:tcPr>
+                    <a:lnL w="9525">
+                      <a:solidFill>
+                        <a:srgbClr val="BFBFBF"/>
+                      </a:solidFill>
+                    </a:lnL>
+                    <a:lnR w="9525">
+                      <a:solidFill>
+                        <a:srgbClr val="BFBFBF"/>
+                      </a:solidFill>
+                    </a:lnR>
+                    <a:lnT w="9525">
+                      <a:solidFill>
+                        <a:srgbClr val="BFBFBF"/>
+                      </a:solidFill>
+                    </a:lnT>
+                    <a:lnB w="9525">
+                      <a:solidFill>
+                        <a:srgbClr val="BFBFBF"/>
+                      </a:solidFill>
+                    </a:lnB>
+                  </a:tcPr>
+                </a:tc>
+              </a:tr>
+              <a:tr h="613833">
+                <a:tc>
+                  <a:txBody>
+                    <a:bodyPr/>
+                    <a:lstStyle/>
+                    <a:p>
+                      <a:pPr>
+                        <a:buNone/>
+                      </a:pPr>
+                      <a:endParaRPr lang="en-US" sz="1200" dirty="0"/>
+                    </a:p>
+                  </a:txBody>
+                  <a:tcPr>
+                    <a:lnL w="9525">
+                      <a:solidFill>
+                        <a:srgbClr val="BFBFBF"/>
+                      </a:solidFill>
+                    </a:lnL>
+                    <a:lnR w="9525">
+                      <a:solidFill>
+                        <a:srgbClr val="BFBFBF"/>
+                      </a:solidFill>
+                    </a:lnR>
+                    <a:lnT w="9525">
+                      <a:solidFill>
+                        <a:srgbClr val="BFBFBF"/>
+                      </a:solidFill>
+                    </a:lnT>
+                    <a:lnB w="9525">
+                      <a:solidFill>
+                        <a:srgbClr val="BFBFBF"/>
+                      </a:solidFill>
+                    </a:lnB>
+                  </a:tcPr>
+                </a:tc>
+                <a:tc>
+                  <a:txBody>
+                    <a:bodyPr/>
+                    <a:lstStyle/>
+                    <a:p>
+                      <a:pPr>
+                        <a:buNone/>
+                      </a:pPr>
+                      <a:r>
+                        <a:rPr lang="en-US" sz="1200" dirty="0"/>
+                        <a:t>Series D2</a:t>
+                      </a:r>
+                      <a:endParaRPr lang="en-US" sz="1200" dirty="0"/>
+                    </a:p>
+                  </a:txBody>
+                  <a:tcPr>
+                    <a:lnL w="9525">
+                      <a:solidFill>
+                        <a:srgbClr val="BFBFBF"/>
+                      </a:solidFill>
+                    </a:lnL>
+                    <a:lnR w="9525">
+                      <a:solidFill>
+                        <a:srgbClr val="BFBFBF"/>
+                      </a:solidFill>
+                    </a:lnR>
+                    <a:lnT w="9525">
+                      <a:solidFill>
+                        <a:srgbClr val="BFBFBF"/>
+                      </a:solidFill>
+                    </a:lnT>
+                    <a:lnB w="9525">
+                      <a:solidFill>
+                        <a:srgbClr val="BFBFBF"/>
+                      </a:solidFill>
+                    </a:lnB>
+                  </a:tcPr>
+                </a:tc>
+                <a:tc>
+                  <a:txBody>
+                    <a:bodyPr/>
+                    <a:lstStyle/>
+                    <a:p>
+                      <a:pPr>
+                        <a:buNone/>
+                      </a:pPr>
+                      <a:r>
+                        <a:rPr lang="en-US" sz="1200" dirty="0"/>
+                        <a:t>Series E2</a:t>
+                      </a:r>
+                      <a:endParaRPr lang="en-US" sz="1200" dirty="0"/>
+                    </a:p>
+                  </a:txBody>
+                  <a:tcPr>
+                    <a:lnL w="9525">
+                      <a:solidFill>
+                        <a:srgbClr val="BFBFBF"/>
+                      </a:solidFill>
+                    </a:lnL>
+                    <a:lnR w="9525">
+                      <a:solidFill>
+                        <a:srgbClr val="BFBFBF"/>
+                      </a:solidFill>
+                    </a:lnR>
+                    <a:lnT w="9525">
+                      <a:solidFill>
+                        <a:srgbClr val="BFBFBF"/>
+                      </a:solidFill>
+                    </a:lnT>
+                    <a:lnB w="9525">
+                      <a:solidFill>
+                        <a:srgbClr val="BFBFBF"/>
+                      </a:solidFill>
+                    </a:lnB>
+                  </a:tcPr>
+                </a:tc>
+                <a:tc>
+                  <a:txBody>
+                    <a:bodyPr/>
+                    <a:lstStyle/>
+                    <a:p>
+                      <a:pPr>
+                        <a:buNone/>
+                      </a:pPr>
+                      <a:r>
+                        <a:rPr lang="en-US" sz="1200" dirty="0"/>
+                        <a:t>Series F2</a:t>
+                      </a:r>
+                      <a:endParaRPr lang="en-US" sz="1200" dirty="0"/>
+                    </a:p>
+                  </a:txBody>
+                  <a:tcPr>
+                    <a:lnL w="9525">
+                      <a:solidFill>
+                        <a:srgbClr val="BFBFBF"/>
+                      </a:solidFill>
+                    </a:lnL>
+                    <a:lnR w="9525">
+                      <a:solidFill>
+                        <a:srgbClr val="BFBFBF"/>
+                      </a:solidFill>
+                    </a:lnR>
+                    <a:lnT w="9525">
+                      <a:solidFill>
+                        <a:srgbClr val="BFBFBF"/>
+                      </a:solidFill>
+                    </a:lnT>
+                    <a:lnB w="9525">
+                      <a:solidFill>
+                        <a:srgbClr val="BFBFBF"/>
+                      </a:solidFill>
+                    </a:lnB>
+                  </a:tcPr>
+                </a:tc>
+              </a:tr>
+              <a:tr h="613833">
+                <a:tc>
+                  <a:txBody>
+                    <a:bodyPr/>
+                    <a:lstStyle/>
+                    <a:p>
+                      <a:pPr>
+                        <a:buNone/>
+                      </a:pPr>
+                      <a:r>
+                        <a:rPr lang="en-US" sz="1200" dirty="0"/>
+                        <a:t>Category 1</a:t>
+                      </a:r>
+                      <a:endParaRPr lang="en-US" sz="1200" dirty="0"/>
+                    </a:p>
+                  </a:txBody>
+                  <a:tcPr>
+                    <a:lnL w="9525">
+                      <a:solidFill>
+                        <a:srgbClr val="BFBFBF"/>
+                      </a:solidFill>
+                    </a:lnL>
+                    <a:lnR w="9525">
+                      <a:solidFill>
+                        <a:srgbClr val="BFBFBF"/>
+                      </a:solidFill>
+                    </a:lnR>
+                    <a:lnT w="9525">
+                      <a:solidFill>
+                        <a:srgbClr val="BFBFBF"/>
+                      </a:solidFill>
+                    </a:lnT>
+                    <a:lnB w="9525">
+                      <a:solidFill>
+                        <a:srgbClr val="BFBFBF"/>
+                      </a:solidFill>
+                    </a:lnB>
+                  </a:tcPr>
+                </a:tc>
+                <a:tc>
+                  <a:txBody>
+                    <a:bodyPr/>
+                    <a:lstStyle/>
+                    <a:p>
+                      <a:pPr>
+                        <a:buNone/>
+                      </a:pPr>
+                      <a:r>
+                        <a:rPr lang="en-US" sz="1200" dirty="0"/>
+                        <a:t>4.3</a:t>
+                      </a:r>
+                      <a:endParaRPr lang="en-US" sz="1200" dirty="0"/>
+                    </a:p>
+                  </a:txBody>
+                  <a:tcPr>
+                    <a:lnL w="9525">
+                      <a:solidFill>
+                        <a:srgbClr val="BFBFBF"/>
+                      </a:solidFill>
+                    </a:lnL>
+                    <a:lnR w="9525">
+                      <a:solidFill>
+                        <a:srgbClr val="BFBFBF"/>
+                      </a:solidFill>
+                    </a:lnR>
+                    <a:lnT w="9525">
+                      <a:solidFill>
+                        <a:srgbClr val="BFBFBF"/>
+                      </a:solidFill>
+                    </a:lnT>
+                    <a:lnB w="9525">
+                      <a:solidFill>
+                        <a:srgbClr val="BFBFBF"/>
+                      </a:solidFill>
+                    </a:lnB>
+                  </a:tcPr>
+                </a:tc>
+                <a:tc>
+                  <a:txBody>
+                    <a:bodyPr/>
+                    <a:lstStyle/>
+                    <a:p>
+                      <a:pPr>
+                        <a:buNone/>
+                      </a:pPr>
+                      <a:r>
+                        <a:rPr lang="en-US" sz="1200" dirty="0"/>
+                        <a:t>2.4</a:t>
+                      </a:r>
+                      <a:endParaRPr lang="en-US" sz="1200" dirty="0"/>
+                    </a:p>
+                  </a:txBody>
+                  <a:tcPr>
+                    <a:lnL w="9525">
+                      <a:solidFill>
+                        <a:srgbClr val="BFBFBF"/>
+                      </a:solidFill>
+                    </a:lnL>
+                    <a:lnR w="9525">
+                      <a:solidFill>
+                        <a:srgbClr val="BFBFBF"/>
+                      </a:solidFill>
+                    </a:lnR>
+                    <a:lnT w="9525">
+                      <a:solidFill>
+                        <a:srgbClr val="BFBFBF"/>
+                      </a:solidFill>
+                    </a:lnT>
+                    <a:lnB w="9525">
+                      <a:solidFill>
+                        <a:srgbClr val="BFBFBF"/>
+                      </a:solidFill>
+                    </a:lnB>
+                  </a:tcPr>
+                </a:tc>
+                <a:tc>
+                  <a:txBody>
+                    <a:bodyPr/>
+                    <a:lstStyle/>
+                    <a:p>
+                      <a:pPr>
+                        <a:buNone/>
+                      </a:pPr>
+                      <a:r>
+                        <a:rPr lang="en-US" sz="1200" dirty="0"/>
+                        <a:t>2</a:t>
+                      </a:r>
+                      <a:endParaRPr lang="en-US" sz="1200" dirty="0"/>
+                    </a:p>
+                  </a:txBody>
+                  <a:tcPr>
+                    <a:lnL w="9525">
+                      <a:solidFill>
+                        <a:srgbClr val="BFBFBF"/>
+                      </a:solidFill>
+                    </a:lnL>
+                    <a:lnR w="9525">
+                      <a:solidFill>
+                        <a:srgbClr val="BFBFBF"/>
+                      </a:solidFill>
+                    </a:lnR>
+                    <a:lnT w="9525">
+                      <a:solidFill>
+                        <a:srgbClr val="BFBFBF"/>
+                      </a:solidFill>
+                    </a:lnT>
+                    <a:lnB w="9525">
+                      <a:solidFill>
+                        <a:srgbClr val="BFBFBF"/>
+                      </a:solidFill>
+                    </a:lnB>
+                  </a:tcPr>
+                </a:tc>
+              </a:tr>
+              <a:tr h="613833">
+                <a:tc>
+                  <a:txBody>
+                    <a:bodyPr/>
+                    <a:lstStyle/>
+                    <a:p>
+                      <a:pPr>
+                        <a:buNone/>
+                      </a:pPr>
+                      <a:r>
+                        <a:rPr lang="en-US" sz="1200" dirty="0"/>
+                        <a:t>Category 2</a:t>
+                      </a:r>
+                      <a:endParaRPr lang="en-US" sz="1200" dirty="0"/>
+                    </a:p>
+                  </a:txBody>
+                  <a:tcPr>
+                    <a:lnL w="9525">
+                      <a:solidFill>
+                        <a:srgbClr val="BFBFBF"/>
+                      </a:solidFill>
+                    </a:lnL>
+                    <a:lnR w="9525">
+                      <a:solidFill>
+                        <a:srgbClr val="BFBFBF"/>
+                      </a:solidFill>
+                    </a:lnR>
+                    <a:lnT w="9525">
+                      <a:solidFill>
+                        <a:srgbClr val="BFBFBF"/>
+                      </a:solidFill>
+                    </a:lnT>
+                    <a:lnB w="9525">
+                      <a:solidFill>
+                        <a:srgbClr val="BFBFBF"/>
+                      </a:solidFill>
+                    </a:lnB>
+                  </a:tcPr>
+                </a:tc>
+                <a:tc>
+                  <a:txBody>
+                    <a:bodyPr/>
+                    <a:lstStyle/>
+                    <a:p>
+                      <a:pPr>
+                        <a:buNone/>
+                      </a:pPr>
+                      <a:r>
+                        <a:rPr lang="en-US" sz="1200" dirty="0"/>
+                        <a:t>2.5</a:t>
+                      </a:r>
+                      <a:endParaRPr lang="en-US" sz="1200" dirty="0"/>
+                    </a:p>
+                  </a:txBody>
+                  <a:tcPr>
+                    <a:lnL w="9525">
+                      <a:solidFill>
+                        <a:srgbClr val="BFBFBF"/>
+                      </a:solidFill>
+                    </a:lnL>
+                    <a:lnR w="9525">
+                      <a:solidFill>
+                        <a:srgbClr val="BFBFBF"/>
+                      </a:solidFill>
+                    </a:lnR>
+                    <a:lnT w="9525">
+                      <a:solidFill>
+                        <a:srgbClr val="BFBFBF"/>
+                      </a:solidFill>
+                    </a:lnT>
+                    <a:lnB w="9525">
+                      <a:solidFill>
+                        <a:srgbClr val="BFBFBF"/>
+                      </a:solidFill>
+                    </a:lnB>
+                  </a:tcPr>
+                </a:tc>
+                <a:tc>
+                  <a:txBody>
+                    <a:bodyPr/>
+                    <a:lstStyle/>
+                    <a:p>
+                      <a:pPr>
+                        <a:buNone/>
+                      </a:pPr>
+                      <a:r>
+                        <a:rPr lang="en-US" sz="1200" dirty="0"/>
+                        <a:t>4.4</a:t>
+                      </a:r>
+                      <a:endParaRPr lang="en-US" sz="1200" dirty="0"/>
+                    </a:p>
+                  </a:txBody>
+                  <a:tcPr>
+                    <a:lnL w="9525">
+                      <a:solidFill>
+                        <a:srgbClr val="BFBFBF"/>
+                      </a:solidFill>
+                    </a:lnL>
+                    <a:lnR w="9525">
+                      <a:solidFill>
+                        <a:srgbClr val="BFBFBF"/>
+                      </a:solidFill>
+                    </a:lnR>
+                    <a:lnT w="9525">
+                      <a:solidFill>
+                        <a:srgbClr val="BFBFBF"/>
+                      </a:solidFill>
+                    </a:lnT>
+                    <a:lnB w="9525">
+                      <a:solidFill>
+                        <a:srgbClr val="BFBFBF"/>
+                      </a:solidFill>
+                    </a:lnB>
+                  </a:tcPr>
+                </a:tc>
+                <a:tc>
+                  <a:txBody>
+                    <a:bodyPr/>
+                    <a:lstStyle/>
+                    <a:p>
+                      <a:pPr>
+                        <a:buNone/>
+                      </a:pPr>
+                      <a:r>
+                        <a:rPr lang="en-US" sz="1200" dirty="0"/>
+                        <a:t>2</a:t>
+                      </a:r>
+                      <a:endParaRPr lang="en-US" sz="1200" dirty="0"/>
+                    </a:p>
+                  </a:txBody>
+                  <a:tcPr>
+                    <a:lnL w="9525">
+                      <a:solidFill>
+                        <a:srgbClr val="BFBFBF"/>
+                      </a:solidFill>
+                    </a:lnL>
+                    <a:lnR w="9525">
+                      <a:solidFill>
+                        <a:srgbClr val="BFBFBF"/>
+                      </a:solidFill>
+                    </a:lnR>
+                    <a:lnT w="9525">
+                      <a:solidFill>
+                        <a:srgbClr val="BFBFBF"/>
+                      </a:solidFill>
+                    </a:lnT>
+                    <a:lnB w="9525">
+                      <a:solidFill>
+                        <a:srgbClr val="BFBFBF"/>
+                      </a:solidFill>
+                    </a:lnB>
+                  </a:tcPr>
+                </a:tc>
+              </a:tr>
+              <a:tr h="613833">
+                <a:tc>
+                  <a:txBody>
+                    <a:bodyPr/>
+                    <a:lstStyle/>
+                    <a:p>
+                      <a:pPr>
+                        <a:buNone/>
+                      </a:pPr>
+                      <a:r>
+                        <a:rPr lang="en-US" sz="1200" dirty="0"/>
+                        <a:t>Category 3</a:t>
+                      </a:r>
+                      <a:endParaRPr lang="en-US" sz="1200" dirty="0"/>
+                    </a:p>
+                  </a:txBody>
+                  <a:tcPr>
+                    <a:lnL w="9525">
+                      <a:solidFill>
+                        <a:srgbClr val="BFBFBF"/>
+                      </a:solidFill>
+                    </a:lnL>
+                    <a:lnR w="9525">
+                      <a:solidFill>
+                        <a:srgbClr val="BFBFBF"/>
+                      </a:solidFill>
+                    </a:lnR>
+                    <a:lnT w="9525">
+                      <a:solidFill>
+                        <a:srgbClr val="BFBFBF"/>
+                      </a:solidFill>
+                    </a:lnT>
+                    <a:lnB w="9525">
+                      <a:solidFill>
+                        <a:srgbClr val="BFBFBF"/>
+                      </a:solidFill>
+                    </a:lnB>
+                  </a:tcPr>
+                </a:tc>
+                <a:tc>
+                  <a:txBody>
+                    <a:bodyPr/>
+                    <a:lstStyle/>
+                    <a:p>
+                      <a:pPr>
+                        <a:buNone/>
+                      </a:pPr>
+                      <a:r>
+                        <a:rPr lang="en-US" sz="1200" dirty="0"/>
+                        <a:t>3.5</a:t>
+                      </a:r>
+                      <a:endParaRPr lang="en-US" sz="1200" dirty="0"/>
+                    </a:p>
+                  </a:txBody>
+                  <a:tcPr>
+                    <a:lnL w="9525">
+                      <a:solidFill>
+                        <a:srgbClr val="BFBFBF"/>
+                      </a:solidFill>
+                    </a:lnL>
+                    <a:lnR w="9525">
+                      <a:solidFill>
+                        <a:srgbClr val="BFBFBF"/>
+                      </a:solidFill>
+                    </a:lnR>
+                    <a:lnT w="9525">
+                      <a:solidFill>
+                        <a:srgbClr val="BFBFBF"/>
+                      </a:solidFill>
+                    </a:lnT>
+                    <a:lnB w="9525">
+                      <a:solidFill>
+                        <a:srgbClr val="BFBFBF"/>
+                      </a:solidFill>
+                    </a:lnB>
+                  </a:tcPr>
+                </a:tc>
+                <a:tc>
+                  <a:txBody>
+                    <a:bodyPr/>
+                    <a:lstStyle/>
+                    <a:p>
+                      <a:pPr>
+                        <a:buNone/>
+                      </a:pPr>
+                      <a:r>
+                        <a:rPr lang="en-US" sz="1200" dirty="0"/>
+                        <a:t>1.8</a:t>
+                      </a:r>
+                      <a:endParaRPr lang="en-US" sz="1200" dirty="0"/>
+                    </a:p>
+                  </a:txBody>
+                  <a:tcPr>
+                    <a:lnL w="9525">
+                      <a:solidFill>
+                        <a:srgbClr val="BFBFBF"/>
+                      </a:solidFill>
+                    </a:lnL>
+                    <a:lnR w="9525">
+                      <a:solidFill>
+                        <a:srgbClr val="BFBFBF"/>
+                      </a:solidFill>
+                    </a:lnR>
+                    <a:lnT w="9525">
+                      <a:solidFill>
+                        <a:srgbClr val="BFBFBF"/>
+                      </a:solidFill>
+                    </a:lnT>
+                    <a:lnB w="9525">
+                      <a:solidFill>
+                        <a:srgbClr val="BFBFBF"/>
+                      </a:solidFill>
+                    </a:lnB>
+                  </a:tcPr>
+                </a:tc>
+                <a:tc>
+                  <a:txBody>
+                    <a:bodyPr/>
+                    <a:lstStyle/>
+                    <a:p>
+                      <a:pPr>
+                        <a:buNone/>
+                      </a:pPr>
+                      <a:r>
+                        <a:rPr lang="en-US" sz="1200" dirty="0"/>
+                        <a:t>3</a:t>
+                      </a:r>
+                      <a:endParaRPr lang="en-US" sz="1200" dirty="0"/>
+                    </a:p>
+                  </a:txBody>
+                  <a:tcPr>
+                    <a:lnL w="9525">
+                      <a:solidFill>
+                        <a:srgbClr val="BFBFBF"/>
+                      </a:solidFill>
+                    </a:lnL>
+                    <a:lnR w="9525">
+                      <a:solidFill>
+                        <a:srgbClr val="BFBFBF"/>
+                      </a:solidFill>
+                    </a:lnR>
+                    <a:lnT w="9525">
+                      <a:solidFill>
+                        <a:srgbClr val="BFBFBF"/>
+                      </a:solidFill>
+                    </a:lnT>
+                    <a:lnB w="9525">
+                      <a:solidFill>
+                        <a:srgbClr val="BFBFBF"/>
+                      </a:solidFill>
+                    </a:lnB>
+                  </a:tcPr>
+                </a:tc>
+              </a:tr>
+              <a:tr h="613833">
+                <a:tc>
+                  <a:txBody>
+                    <a:bodyPr/>
+                    <a:lstStyle/>
+                    <a:p>
+                      <a:pPr>
+                        <a:buNone/>
+                      </a:pPr>
+                      <a:r>
+                        <a:rPr lang="en-US" sz="1200" dirty="0"/>
+                        <a:t>Category 4</a:t>
+                      </a:r>
+                      <a:endParaRPr lang="en-US" sz="1200" dirty="0"/>
+                    </a:p>
+                  </a:txBody>
+                  <a:tcPr>
+                    <a:lnL w="9525">
+                      <a:solidFill>
+                        <a:srgbClr val="BFBFBF"/>
+                      </a:solidFill>
+                    </a:lnL>
+                    <a:lnR w="9525">
+                      <a:solidFill>
+                        <a:srgbClr val="BFBFBF"/>
+                      </a:solidFill>
+                    </a:lnR>
+                    <a:lnT w="9525">
+                      <a:solidFill>
+                        <a:srgbClr val="BFBFBF"/>
+                      </a:solidFill>
+                    </a:lnT>
+                    <a:lnB w="9525">
+                      <a:solidFill>
+                        <a:srgbClr val="BFBFBF"/>
+                      </a:solidFill>
+                    </a:lnB>
+                  </a:tcPr>
+                </a:tc>
+                <a:tc>
+                  <a:txBody>
+                    <a:bodyPr/>
+                    <a:lstStyle/>
+                    <a:p>
+                      <a:pPr>
+                        <a:buNone/>
+                      </a:pPr>
+                      <a:r>
+                        <a:rPr lang="en-US" sz="1200" dirty="0"/>
+                        <a:t>4.5</a:t>
+                      </a:r>
+                      <a:endParaRPr lang="en-US" sz="1200" dirty="0"/>
+                    </a:p>
+                  </a:txBody>
+                  <a:tcPr>
+                    <a:lnL w="9525">
+                      <a:solidFill>
+                        <a:srgbClr val="BFBFBF"/>
+                      </a:solidFill>
+                    </a:lnL>
+                    <a:lnR w="9525">
+                      <a:solidFill>
+                        <a:srgbClr val="BFBFBF"/>
+                      </a:solidFill>
+                    </a:lnR>
+                    <a:lnT w="9525">
+                      <a:solidFill>
+                        <a:srgbClr val="BFBFBF"/>
+                      </a:solidFill>
+                    </a:lnT>
+                    <a:lnB w="9525">
+                      <a:solidFill>
+                        <a:srgbClr val="BFBFBF"/>
+                      </a:solidFill>
+                    </a:lnB>
+                  </a:tcPr>
+                </a:tc>
+                <a:tc>
+                  <a:txBody>
+                    <a:bodyPr/>
+                    <a:lstStyle/>
+                    <a:p>
+                      <a:pPr>
+                        <a:buNone/>
+                      </a:pPr>
+                      <a:r>
+                        <a:rPr lang="en-US" sz="1200" dirty="0"/>
+                        <a:t>2.8</a:t>
+                      </a:r>
+                      <a:endParaRPr lang="en-US" sz="1200" dirty="0"/>
+                    </a:p>
+                  </a:txBody>
+                  <a:tcPr>
+                    <a:lnL w="9525">
+                      <a:solidFill>
+                        <a:srgbClr val="BFBFBF"/>
+                      </a:solidFill>
+                    </a:lnL>
+                    <a:lnR w="9525">
+                      <a:solidFill>
+                        <a:srgbClr val="BFBFBF"/>
+                      </a:solidFill>
+                    </a:lnR>
+                    <a:lnT w="9525">
+                      <a:solidFill>
+                        <a:srgbClr val="BFBFBF"/>
+                      </a:solidFill>
+                    </a:lnT>
+                    <a:lnB w="9525">
+                      <a:solidFill>
+                        <a:srgbClr val="BFBFBF"/>
+                      </a:solidFill>
+                    </a:lnB>
+                  </a:tcPr>
+                </a:tc>
+                <a:tc>
+                  <a:txBody>
+                    <a:bodyPr/>
+                    <a:lstStyle/>
+                    <a:p>
+                      <a:pPr>
+                        <a:buNone/>
+                      </a:pPr>
+                      <a:r>
+                        <a:rPr lang="en-US" sz="1200" dirty="0"/>
+                        <a:t>5</a:t>
+                      </a:r>
+                      <a:endParaRPr lang="en-US" sz="1200" dirty="0"/>
+                    </a:p>
+                  </a:txBody>
+                  <a:tcPr>
+                    <a:lnL w="9525">
+                      <a:solidFill>
+                        <a:srgbClr val="BFBFBF"/>
+                      </a:solidFill>
+                    </a:lnL>
+                    <a:lnR w="9525">
+                      <a:solidFill>
+                        <a:srgbClr val="BFBFBF"/>
+                      </a:solidFill>
+                    </a:lnR>
+                    <a:lnT w="9525">
+                      <a:solidFill>
+                        <a:srgbClr val="BFBFBF"/>
+                      </a:solidFill>
+                    </a:lnT>
+                    <a:lnB w="9525">
+                      <a:solidFill>
+                        <a:srgbClr val="BFBFBF"/>
+                      </a:solidFill>
+                    </a:lnB>
+                  </a:tcPr>
+                </a:tc>
+              </a:tr>
+            </a:tbl>
+          </a:graphicData>
+        </a:graphic>
+      </p:graphicFrame>
+    </p:spTree>
+  </p:cSld>
+  <p:clrMapOvr>
+    <a:masterClrMapping/>
+  </p:clrMapOvr>
+</p:sld>
+</file>
+
 <file path=ppt/slides/slide2.xml><?xml version="1.0" encoding="utf-8"?>
 <p:sld xmlns:a="http://schemas.openxmlformats.org/drawingml/2006/main" xmlns:r="http://schemas.openxmlformats.org/officeDocument/2006/relationships" xmlns:p="http://schemas.openxmlformats.org/presentationml/2006/main">
   <p:cSld>
